--- a/BrainSafe_AI_Publication/Presentation/BrainSafe_AI_Presentation.pptx
+++ b/BrainSafe_AI_Publication/Presentation/BrainSafe_AI_Presentation.pptx
@@ -4,28 +4,25 @@
   <p:sldMasterIdLst>
     <p:sldMasterId id="2147483648" r:id="rId1"/>
   </p:sldMasterIdLst>
-  <p:notesMasterIdLst>
-    <p:notesMasterId r:id="rId18"/>
-  </p:notesMasterIdLst>
   <p:sldIdLst>
-    <p:sldId id="256" r:id="rId2"/>
-    <p:sldId id="257" r:id="rId3"/>
-    <p:sldId id="258" r:id="rId4"/>
-    <p:sldId id="259" r:id="rId5"/>
-    <p:sldId id="260" r:id="rId6"/>
-    <p:sldId id="261" r:id="rId7"/>
-    <p:sldId id="262" r:id="rId8"/>
-    <p:sldId id="263" r:id="rId9"/>
-    <p:sldId id="264" r:id="rId10"/>
-    <p:sldId id="265" r:id="rId11"/>
-    <p:sldId id="266" r:id="rId12"/>
-    <p:sldId id="267" r:id="rId13"/>
-    <p:sldId id="268" r:id="rId14"/>
-    <p:sldId id="269" r:id="rId15"/>
-    <p:sldId id="270" r:id="rId16"/>
-    <p:sldId id="271" r:id="rId17"/>
+    <p:sldId id="256" r:id="rId7"/>
+    <p:sldId id="257" r:id="rId9"/>
+    <p:sldId id="258" r:id="rId10"/>
+    <p:sldId id="259" r:id="rId11"/>
+    <p:sldId id="260" r:id="rId12"/>
+    <p:sldId id="261" r:id="rId13"/>
+    <p:sldId id="262" r:id="rId14"/>
+    <p:sldId id="263" r:id="rId15"/>
+    <p:sldId id="264" r:id="rId16"/>
+    <p:sldId id="265" r:id="rId17"/>
+    <p:sldId id="266" r:id="rId18"/>
+    <p:sldId id="267" r:id="rId19"/>
+    <p:sldId id="268" r:id="rId20"/>
+    <p:sldId id="269" r:id="rId21"/>
+    <p:sldId id="270" r:id="rId22"/>
+    <p:sldId id="271" r:id="rId23"/>
   </p:sldIdLst>
-  <p:sldSz cx="12192000" cy="6858000"/>
+  <p:sldSz cx="12191695" cy="6858000" type="screen4x3"/>
   <p:notesSz cx="6858000" cy="9144000"/>
   <p:defaultTextStyle>
     <a:defPPr>
@@ -122,27 +119,11 @@
       </a:defRPr>
     </a:lvl9pPr>
   </p:defaultTextStyle>
-  <p:extLst>
-    <p:ext uri="{EFAFB233-063F-42B5-8137-9DF3F51BA10A}">
-      <p15:sldGuideLst xmlns:p15="http://schemas.microsoft.com/office/powerpoint/2012/main">
-        <p15:guide id="1" orient="horz" pos="2160">
-          <p15:clr>
-            <a:srgbClr val="A4A3A4"/>
-          </p15:clr>
-        </p15:guide>
-        <p15:guide id="2" pos="2880">
-          <p15:clr>
-            <a:srgbClr val="A4A3A4"/>
-          </p15:clr>
-        </p15:guide>
-      </p15:sldGuideLst>
-    </p:ext>
-  </p:extLst>
 </p:presentation>
 </file>
 
 <file path=ppt/notesMasters/notesMaster1.xml><?xml version="1.0" encoding="utf-8"?>
-<p:notesMaster xmlns:a="http://schemas.openxmlformats.org/drawingml/2006/main" xmlns:r="http://schemas.openxmlformats.org/officeDocument/2006/relationships" xmlns:p="http://schemas.openxmlformats.org/presentationml/2006/main">
+<p:notesMaster xmlns:a="http://schemas.openxmlformats.org/drawingml/2006/main" xmlns:p="http://schemas.openxmlformats.org/presentationml/2006/main" xmlns:r="http://schemas.openxmlformats.org/officeDocument/2006/relationships">
   <p:cSld>
     <p:bg>
       <p:bgRef idx="1001">
@@ -163,16 +144,241 @@
           <a:chExt cx="0" cy="0"/>
         </a:xfrm>
       </p:grpSpPr>
+      <p:sp>
+        <p:nvSpPr>
+          <p:cNvPr id="2" name="Header Placeholder 1"/>
+          <p:cNvSpPr>
+            <a:spLocks noGrp="1"/>
+          </p:cNvSpPr>
+          <p:nvPr>
+            <p:ph type="hdr" sz="quarter"/>
+          </p:nvPr>
+        </p:nvSpPr>
+        <p:spPr>
+          <a:xfrm>
+            <a:off x="0" y="0"/>
+            <a:ext cx="2971800" cy="457200"/>
+          </a:xfrm>
+          <a:prstGeom prst="rect">
+            <a:avLst/>
+          </a:prstGeom>
+        </p:spPr>
+        <p:txBody>
+          <a:bodyPr vert="horz" lIns="91440" tIns="45720" rIns="91440" bIns="45720" rtlCol="0"/>
+          <a:lstStyle>
+            <a:lvl1pPr algn="l">
+              <a:defRPr sz="1200"/>
+            </a:lvl1pPr>
+          </a:lstStyle>
+          <a:p>
+            <a:endParaRPr lang="en-US"/>
+          </a:p>
+        </p:txBody>
+      </p:sp>
+      <p:sp>
+        <p:nvSpPr>
+          <p:cNvPr id="3" name="Date Placeholder 2"/>
+          <p:cNvSpPr>
+            <a:spLocks noGrp="1"/>
+          </p:cNvSpPr>
+          <p:nvPr>
+            <p:ph type="dt" idx="1"/>
+          </p:nvPr>
+        </p:nvSpPr>
+        <p:spPr>
+          <a:xfrm>
+            <a:off x="3884613" y="0"/>
+            <a:ext cx="2971800" cy="457200"/>
+          </a:xfrm>
+          <a:prstGeom prst="rect">
+            <a:avLst/>
+          </a:prstGeom>
+        </p:spPr>
+        <p:txBody>
+          <a:bodyPr vert="horz" lIns="91440" tIns="45720" rIns="91440" bIns="45720" rtlCol="0"/>
+          <a:lstStyle>
+            <a:lvl1pPr algn="r">
+              <a:defRPr sz="1200"/>
+            </a:lvl1pPr>
+          </a:lstStyle>
+          <a:p>
+            <a:fld id="{0F89C1C7-3DCD-1040-A9CF-14679D8B5DDD}" type="datetimeFigureOut">
+              <a:rPr lang="en-US" smtClean="0"/>
+              <a:t>10/17/16</a:t>
+            </a:fld>
+            <a:endParaRPr lang="en-US"/>
+          </a:p>
+        </p:txBody>
+      </p:sp>
+      <p:sp>
+        <p:nvSpPr>
+          <p:cNvPr id="4" name="Slide Image Placeholder 3"/>
+          <p:cNvSpPr>
+            <a:spLocks noGrp="1" noRot="1" noChangeAspect="1"/>
+          </p:cNvSpPr>
+          <p:nvPr>
+            <p:ph type="sldImg" idx="2"/>
+          </p:nvPr>
+        </p:nvSpPr>
+        <p:spPr>
+          <a:xfrm>
+            <a:off x="1143000" y="685800"/>
+            <a:ext cx="4572000" cy="3429000"/>
+          </a:xfrm>
+          <a:prstGeom prst="rect">
+            <a:avLst/>
+          </a:prstGeom>
+          <a:noFill/>
+          <a:ln w="12700">
+            <a:solidFill>
+              <a:prstClr val="black"/>
+            </a:solidFill>
+          </a:ln>
+        </p:spPr>
+        <p:txBody>
+          <a:bodyPr vert="horz" lIns="91440" tIns="45720" rIns="91440" bIns="45720" rtlCol="0" anchor="ctr"/>
+          <a:lstStyle/>
+          <a:p>
+            <a:endParaRPr lang="en-US"/>
+          </a:p>
+        </p:txBody>
+      </p:sp>
+      <p:sp>
+        <p:nvSpPr>
+          <p:cNvPr id="5" name="Notes Placeholder 4"/>
+          <p:cNvSpPr>
+            <a:spLocks noGrp="1"/>
+          </p:cNvSpPr>
+          <p:nvPr>
+            <p:ph type="body" sz="quarter" idx="3"/>
+          </p:nvPr>
+        </p:nvSpPr>
+        <p:spPr>
+          <a:xfrm>
+            <a:off x="685800" y="4343400"/>
+            <a:ext cx="5486400" cy="4114800"/>
+          </a:xfrm>
+          <a:prstGeom prst="rect">
+            <a:avLst/>
+          </a:prstGeom>
+        </p:spPr>
+        <p:txBody>
+          <a:bodyPr vert="horz" lIns="91440" tIns="45720" rIns="91440" bIns="45720" rtlCol="0"/>
+          <a:lstStyle/>
+          <a:p>
+            <a:pPr lvl="0"/>
+            <a:r>
+              <a:rPr lang="en-US" smtClean="0"/>
+              <a:t>Click to edit Master text styles</a:t>
+            </a:r>
+          </a:p>
+          <a:p>
+            <a:pPr lvl="1"/>
+            <a:r>
+              <a:rPr lang="en-US" smtClean="0"/>
+              <a:t>Second level</a:t>
+            </a:r>
+          </a:p>
+          <a:p>
+            <a:pPr lvl="2"/>
+            <a:r>
+              <a:rPr lang="en-US" smtClean="0"/>
+              <a:t>Third level</a:t>
+            </a:r>
+          </a:p>
+          <a:p>
+            <a:pPr lvl="3"/>
+            <a:r>
+              <a:rPr lang="en-US" smtClean="0"/>
+              <a:t>Fourth level</a:t>
+            </a:r>
+          </a:p>
+          <a:p>
+            <a:pPr lvl="4"/>
+            <a:r>
+              <a:rPr lang="en-US" smtClean="0"/>
+              <a:t>Fifth level</a:t>
+            </a:r>
+            <a:endParaRPr lang="en-US"/>
+          </a:p>
+        </p:txBody>
+      </p:sp>
+      <p:sp>
+        <p:nvSpPr>
+          <p:cNvPr id="6" name="Footer Placeholder 5"/>
+          <p:cNvSpPr>
+            <a:spLocks noGrp="1"/>
+          </p:cNvSpPr>
+          <p:nvPr>
+            <p:ph type="ftr" sz="quarter" idx="4"/>
+          </p:nvPr>
+        </p:nvSpPr>
+        <p:spPr>
+          <a:xfrm>
+            <a:off x="0" y="8685213"/>
+            <a:ext cx="2971800" cy="457200"/>
+          </a:xfrm>
+          <a:prstGeom prst="rect">
+            <a:avLst/>
+          </a:prstGeom>
+        </p:spPr>
+        <p:txBody>
+          <a:bodyPr vert="horz" lIns="91440" tIns="45720" rIns="91440" bIns="45720" rtlCol="0" anchor="b"/>
+          <a:lstStyle>
+            <a:lvl1pPr algn="l">
+              <a:defRPr sz="1200"/>
+            </a:lvl1pPr>
+          </a:lstStyle>
+          <a:p>
+            <a:endParaRPr lang="en-US"/>
+          </a:p>
+        </p:txBody>
+      </p:sp>
+      <p:sp>
+        <p:nvSpPr>
+          <p:cNvPr id="7" name="Slide Number Placeholder 6"/>
+          <p:cNvSpPr>
+            <a:spLocks noGrp="1"/>
+          </p:cNvSpPr>
+          <p:nvPr>
+            <p:ph type="sldNum" sz="quarter" idx="5"/>
+          </p:nvPr>
+        </p:nvSpPr>
+        <p:spPr>
+          <a:xfrm>
+            <a:off x="3884613" y="8685213"/>
+            <a:ext cx="2971800" cy="457200"/>
+          </a:xfrm>
+          <a:prstGeom prst="rect">
+            <a:avLst/>
+          </a:prstGeom>
+        </p:spPr>
+        <p:txBody>
+          <a:bodyPr vert="horz" lIns="91440" tIns="45720" rIns="91440" bIns="45720" rtlCol="0" anchor="b"/>
+          <a:lstStyle>
+            <a:lvl1pPr algn="r">
+              <a:defRPr sz="1200"/>
+            </a:lvl1pPr>
+          </a:lstStyle>
+          <a:p>
+            <a:fld id="{BB5E49A5-4136-284D-997B-48E1D791AD67}" type="slidenum">
+              <a:rPr lang="en-US" smtClean="0"/>
+              <a:t>‹#›</a:t>
+            </a:fld>
+            <a:endParaRPr lang="en-US"/>
+          </a:p>
+        </p:txBody>
+      </p:sp>
     </p:spTree>
     <p:extLst>
       <p:ext uri="{BB962C8B-B14F-4D97-AF65-F5344CB8AC3E}">
-        <p14:creationId xmlns:p14="http://schemas.microsoft.com/office/powerpoint/2010/main" val="2480714274"/>
+        <p14:creationId xmlns:p14="http://schemas.microsoft.com/office/powerpoint/2010/main" val="2623252185"/>
       </p:ext>
     </p:extLst>
   </p:cSld>
   <p:clrMap bg1="lt1" tx1="dk1" bg2="lt2" tx2="dk2" accent1="accent1" accent2="accent2" accent3="accent3" accent4="accent4" accent5="accent5" accent6="accent6" hlink="hlink" folHlink="folHlink"/>
   <p:notesStyle>
-    <a:lvl1pPr marL="0" algn="l" defTabSz="914400" rtl="0" eaLnBrk="1" latinLnBrk="0" hangingPunct="1">
+    <a:lvl1pPr marL="0" algn="l" defTabSz="457200" rtl="0" eaLnBrk="1" latinLnBrk="0" hangingPunct="1">
       <a:defRPr sz="1200" kern="1200">
         <a:solidFill>
           <a:schemeClr val="tx1"/>
@@ -182,7 +388,7 @@
         <a:cs typeface="+mn-cs"/>
       </a:defRPr>
     </a:lvl1pPr>
-    <a:lvl2pPr marL="457200" algn="l" defTabSz="914400" rtl="0" eaLnBrk="1" latinLnBrk="0" hangingPunct="1">
+    <a:lvl2pPr marL="457200" algn="l" defTabSz="457200" rtl="0" eaLnBrk="1" latinLnBrk="0" hangingPunct="1">
       <a:defRPr sz="1200" kern="1200">
         <a:solidFill>
           <a:schemeClr val="tx1"/>
@@ -192,7 +398,7 @@
         <a:cs typeface="+mn-cs"/>
       </a:defRPr>
     </a:lvl2pPr>
-    <a:lvl3pPr marL="914400" algn="l" defTabSz="914400" rtl="0" eaLnBrk="1" latinLnBrk="0" hangingPunct="1">
+    <a:lvl3pPr marL="914400" algn="l" defTabSz="457200" rtl="0" eaLnBrk="1" latinLnBrk="0" hangingPunct="1">
       <a:defRPr sz="1200" kern="1200">
         <a:solidFill>
           <a:schemeClr val="tx1"/>
@@ -202,7 +408,7 @@
         <a:cs typeface="+mn-cs"/>
       </a:defRPr>
     </a:lvl3pPr>
-    <a:lvl4pPr marL="1371600" algn="l" defTabSz="914400" rtl="0" eaLnBrk="1" latinLnBrk="0" hangingPunct="1">
+    <a:lvl4pPr marL="1371600" algn="l" defTabSz="457200" rtl="0" eaLnBrk="1" latinLnBrk="0" hangingPunct="1">
       <a:defRPr sz="1200" kern="1200">
         <a:solidFill>
           <a:schemeClr val="tx1"/>
@@ -212,7 +418,7 @@
         <a:cs typeface="+mn-cs"/>
       </a:defRPr>
     </a:lvl4pPr>
-    <a:lvl5pPr marL="1828800" algn="l" defTabSz="914400" rtl="0" eaLnBrk="1" latinLnBrk="0" hangingPunct="1">
+    <a:lvl5pPr marL="1828800" algn="l" defTabSz="457200" rtl="0" eaLnBrk="1" latinLnBrk="0" hangingPunct="1">
       <a:defRPr sz="1200" kern="1200">
         <a:solidFill>
           <a:schemeClr val="tx1"/>
@@ -222,7 +428,7 @@
         <a:cs typeface="+mn-cs"/>
       </a:defRPr>
     </a:lvl5pPr>
-    <a:lvl6pPr marL="2286000" algn="l" defTabSz="914400" rtl="0" eaLnBrk="1" latinLnBrk="0" hangingPunct="1">
+    <a:lvl6pPr marL="2286000" algn="l" defTabSz="457200" rtl="0" eaLnBrk="1" latinLnBrk="0" hangingPunct="1">
       <a:defRPr sz="1200" kern="1200">
         <a:solidFill>
           <a:schemeClr val="tx1"/>
@@ -232,7 +438,7 @@
         <a:cs typeface="+mn-cs"/>
       </a:defRPr>
     </a:lvl6pPr>
-    <a:lvl7pPr marL="2743200" algn="l" defTabSz="914400" rtl="0" eaLnBrk="1" latinLnBrk="0" hangingPunct="1">
+    <a:lvl7pPr marL="2743200" algn="l" defTabSz="457200" rtl="0" eaLnBrk="1" latinLnBrk="0" hangingPunct="1">
       <a:defRPr sz="1200" kern="1200">
         <a:solidFill>
           <a:schemeClr val="tx1"/>
@@ -242,7 +448,7 @@
         <a:cs typeface="+mn-cs"/>
       </a:defRPr>
     </a:lvl7pPr>
-    <a:lvl8pPr marL="3200400" algn="l" defTabSz="914400" rtl="0" eaLnBrk="1" latinLnBrk="0" hangingPunct="1">
+    <a:lvl8pPr marL="3200400" algn="l" defTabSz="457200" rtl="0" eaLnBrk="1" latinLnBrk="0" hangingPunct="1">
       <a:defRPr sz="1200" kern="1200">
         <a:solidFill>
           <a:schemeClr val="tx1"/>
@@ -252,7 +458,7 @@
         <a:cs typeface="+mn-cs"/>
       </a:defRPr>
     </a:lvl8pPr>
-    <a:lvl9pPr marL="3657600" algn="l" defTabSz="914400" rtl="0" eaLnBrk="1" latinLnBrk="0" hangingPunct="1">
+    <a:lvl9pPr marL="3657600" algn="l" defTabSz="457200" rtl="0" eaLnBrk="1" latinLnBrk="0" hangingPunct="1">
       <a:defRPr sz="1200" kern="1200">
         <a:solidFill>
           <a:schemeClr val="tx1"/>
@@ -267,7 +473,7 @@
 </file>
 
 <file path=ppt/notesSlides/notesSlide1.xml><?xml version="1.0" encoding="utf-8"?>
-<p:notes xmlns:a="http://schemas.openxmlformats.org/drawingml/2006/main" xmlns:r="http://schemas.openxmlformats.org/officeDocument/2006/relationships" xmlns:p="http://schemas.openxmlformats.org/presentationml/2006/main">
+<p:notes xmlns:a="http://schemas.openxmlformats.org/drawingml/2006/main" xmlns:p="http://schemas.openxmlformats.org/presentationml/2006/main" xmlns:r="http://schemas.openxmlformats.org/officeDocument/2006/relationships">
   <p:cSld>
     <p:spTree>
       <p:nvGrpSpPr>
@@ -287,7 +493,7 @@
         <p:nvSpPr>
           <p:cNvPr id="2" name="Slide Image Placeholder 1"/>
           <p:cNvSpPr>
-            <a:spLocks noGrp="1" noRot="1" noChangeAspect="1"/>
+            <a:spLocks noGrp="1"/>
           </p:cNvSpPr>
           <p:nvPr>
             <p:ph type="sldImg" idx="2"/>
@@ -302,7 +508,7 @@
             <a:spLocks noGrp="1"/>
           </p:cNvSpPr>
           <p:nvPr>
-            <p:ph type="body" sz="quarter" idx="3"/>
+            <p:ph type="body" idx="3" sz="quarter"/>
           </p:nvPr>
         </p:nvSpPr>
         <p:spPr/>
@@ -311,12 +517,10 @@
           <a:lstStyle/>
           <a:p>
             <a:r>
-              <a:t>SAY: Welcome. In one sentence — BrainSafe AI takes a molecule's chemical structure and predicts how it is likely to act on the brain: can it get in, what does it hit, is it safe, and is it drug-like. Crucially, every prediction is built on real laboratory measurements and comes with an honest confidence estimate and the evidence behind it.</a:t>
-            </a:r>
-          </a:p>
-          <a:p>
-            <a:endParaRPr/>
-          </a:p>
+              <a:t>SAY: Welcome. In one sentence, BrainSafe AI takes a molecule's chemical structure and predicts how it is likely to act on the brain: can it get in, what does it hit, is it safe, and is it drug-like. Crucially, every prediction is built on real laboratory measurements and comes with an honest confidence estimate and the evidence behind it.</a:t>
+            </a:r>
+          </a:p>
+          <a:p/>
           <a:p>
             <a:r>
               <a:t>TECHNICAL TERMS:</a:t>
@@ -332,12 +536,10 @@
               <a:t>- 'Measured data' = results of actual lab experiments, not simulated or assumed values.</a:t>
             </a:r>
           </a:p>
-          <a:p>
-            <a:endParaRPr/>
-          </a:p>
-          <a:p>
-            <a:r>
-              <a:t>Q&amp;A — GENERAL/COMMERCIAL:</a:t>
+          <a:p/>
+          <a:p>
+            <a:r>
+              <a:t>Q&amp;A, GENERAL/COMMERCIAL:</a:t>
             </a:r>
           </a:p>
           <a:p>
@@ -357,15 +559,13 @@
           </a:p>
           <a:p>
             <a:r>
-              <a:t>A: Medicinal chemists, natural-product and drug-repurposing researchers — anyone deciding which molecules are worth testing next for brain conditions.</a:t>
-            </a:r>
-          </a:p>
-          <a:p>
-            <a:endParaRPr/>
-          </a:p>
-          <a:p>
-            <a:r>
-              <a:t>Q&amp;A — EXPERT:</a:t>
+              <a:t>A: Medicinal chemists, natural-product and drug-repurposing researchers, anyone deciding which molecules are worth testing next for brain conditions.</a:t>
+            </a:r>
+          </a:p>
+          <a:p/>
+          <a:p>
+            <a:r>
+              <a:t>Q&amp;A, EXPERT:</a:t>
             </a:r>
           </a:p>
           <a:p>
@@ -375,7 +575,7 @@
           </a:p>
           <a:p>
             <a:r>
-              <a:t>A: An application/resource paper — the contribution is the integration and honest validation, on measured data, not a new algorithm.</a:t>
+              <a:t>A: An application/resource paper, the contribution is the integration and honest validation, on measured data, not a new algorithm.</a:t>
             </a:r>
           </a:p>
         </p:txBody>
@@ -387,7 +587,7 @@
             <a:spLocks noGrp="1"/>
           </p:cNvSpPr>
           <p:nvPr>
-            <p:ph type="sldNum" sz="quarter" idx="5"/>
+            <p:ph type="sldNum" idx="5" sz="quarter"/>
           </p:nvPr>
         </p:nvSpPr>
         <p:spPr/>
@@ -401,7 +601,7 @@
 </file>
 
 <file path=ppt/notesSlides/notesSlide10.xml><?xml version="1.0" encoding="utf-8"?>
-<p:notes xmlns:a="http://schemas.openxmlformats.org/drawingml/2006/main" xmlns:r="http://schemas.openxmlformats.org/officeDocument/2006/relationships" xmlns:p="http://schemas.openxmlformats.org/presentationml/2006/main">
+<p:notes xmlns:a="http://schemas.openxmlformats.org/drawingml/2006/main" xmlns:p="http://schemas.openxmlformats.org/presentationml/2006/main" xmlns:r="http://schemas.openxmlformats.org/officeDocument/2006/relationships">
   <p:cSld>
     <p:spTree>
       <p:nvGrpSpPr>
@@ -421,7 +621,7 @@
         <p:nvSpPr>
           <p:cNvPr id="2" name="Slide Image Placeholder 1"/>
           <p:cNvSpPr>
-            <a:spLocks noGrp="1" noRot="1" noChangeAspect="1"/>
+            <a:spLocks noGrp="1"/>
           </p:cNvSpPr>
           <p:nvPr>
             <p:ph type="sldImg" idx="2"/>
@@ -436,7 +636,7 @@
             <a:spLocks noGrp="1"/>
           </p:cNvSpPr>
           <p:nvPr>
-            <p:ph type="body" sz="quarter" idx="3"/>
+            <p:ph type="body" idx="3" sz="quarter"/>
           </p:nvPr>
         </p:nvSpPr>
         <p:spPr/>
@@ -445,12 +645,10 @@
           <a:lstStyle/>
           <a:p>
             <a:r>
-              <a:t>SAY: For the four receptors we predict strength and use it to rank compounds — useful for prioritisation even when an exact value is hard. The antioxidant model is now trained on real DPPH lab measurements and clearly beats the old text-derived estimate. The druggability score is a transparent rule that correctly separates brain-suitable drugs from things like table sugar.</a:t>
-            </a:r>
-          </a:p>
-          <a:p>
-            <a:endParaRPr/>
-          </a:p>
+              <a:t>SAY: For the four receptors we predict strength and use it to rank compounds, useful for prioritisation even when an exact value is hard. The antioxidant model is now trained on real DPPH lab measurements and clearly beats the old text-derived estimate. The druggability score is a transparent rule that correctly separates brain-suitable drugs from things like table sugar.</a:t>
+            </a:r>
+          </a:p>
+          <a:p/>
           <a:p>
             <a:r>
               <a:t>TECHNICAL TERMS:</a:t>
@@ -471,12 +669,10 @@
               <a:t>- DPPH: standard antioxidant assay.</a:t>
             </a:r>
           </a:p>
-          <a:p>
-            <a:endParaRPr/>
-          </a:p>
-          <a:p>
-            <a:r>
-              <a:t>Q&amp;A — EXPERT:</a:t>
+          <a:p/>
+          <a:p>
+            <a:r>
+              <a:t>Q&amp;A, EXPERT:</a:t>
             </a:r>
           </a:p>
           <a:p>
@@ -486,15 +682,13 @@
           </a:p>
           <a:p>
             <a:r>
-              <a:t>A: Correct and disclosed — pooled cross-lab DPPH and receptor data generalise weakly across time; these are reported as ranking-grade, not absolute predictors.</a:t>
-            </a:r>
-          </a:p>
-          <a:p>
-            <a:endParaRPr/>
-          </a:p>
-          <a:p>
-            <a:r>
-              <a:t>Q&amp;A — GENERAL/COMMERCIAL:</a:t>
+              <a:t>A: Correct and disclosed, pooled cross-lab DPPH and receptor data generalise weakly across time; these are reported as ranking-grade, not absolute predictors.</a:t>
+            </a:r>
+          </a:p>
+          <a:p/>
+          <a:p>
+            <a:r>
+              <a:t>Q&amp;A, GENERAL/COMMERCIAL:</a:t>
             </a:r>
           </a:p>
           <a:p>
@@ -516,7 +710,7 @@
             <a:spLocks noGrp="1"/>
           </p:cNvSpPr>
           <p:nvPr>
-            <p:ph type="sldNum" sz="quarter" idx="5"/>
+            <p:ph type="sldNum" idx="5" sz="quarter"/>
           </p:nvPr>
         </p:nvSpPr>
         <p:spPr/>
@@ -530,7 +724,7 @@
 </file>
 
 <file path=ppt/notesSlides/notesSlide11.xml><?xml version="1.0" encoding="utf-8"?>
-<p:notes xmlns:a="http://schemas.openxmlformats.org/drawingml/2006/main" xmlns:r="http://schemas.openxmlformats.org/officeDocument/2006/relationships" xmlns:p="http://schemas.openxmlformats.org/presentationml/2006/main">
+<p:notes xmlns:a="http://schemas.openxmlformats.org/drawingml/2006/main" xmlns:p="http://schemas.openxmlformats.org/presentationml/2006/main" xmlns:r="http://schemas.openxmlformats.org/officeDocument/2006/relationships">
   <p:cSld>
     <p:spTree>
       <p:nvGrpSpPr>
@@ -550,7 +744,7 @@
         <p:nvSpPr>
           <p:cNvPr id="2" name="Slide Image Placeholder 1"/>
           <p:cNvSpPr>
-            <a:spLocks noGrp="1" noRot="1" noChangeAspect="1"/>
+            <a:spLocks noGrp="1"/>
           </p:cNvSpPr>
           <p:nvPr>
             <p:ph type="sldImg" idx="2"/>
@@ -565,7 +759,7 @@
             <a:spLocks noGrp="1"/>
           </p:cNvSpPr>
           <p:nvPr>
-            <p:ph type="body" sz="quarter" idx="3"/>
+            <p:ph type="body" idx="3" sz="quarter"/>
           </p:nvPr>
         </p:nvSpPr>
         <p:spPr/>
@@ -574,12 +768,10 @@
           <a:lstStyle/>
           <a:p>
             <a:r>
-              <a:t>SAY: A fair worry: is the model just memorising and returning the closest known molecule? We tested exactly that. A nearest-neighbour lookup scores 0.867; a simple linear model 0.808; our ensemble 0.912 — and it wins on every single endpoint. So it genuinely learns patterns, not just look-alikes.</a:t>
-            </a:r>
-          </a:p>
-          <a:p>
-            <a:endParaRPr/>
-          </a:p>
+              <a:t>SAY: A fair worry: is the model just memorising and returning the closest known molecule? We tested exactly that. A nearest-neighbour lookup scores 0.867; a simple linear model 0.808; our ensemble 0.912, and it wins on every single endpoint. So it genuinely learns patterns, not just look-alikes.</a:t>
+            </a:r>
+          </a:p>
+          <a:p/>
           <a:p>
             <a:r>
               <a:t>TECHNICAL TERMS:</a:t>
@@ -587,7 +779,7 @@
           </a:p>
           <a:p>
             <a:r>
-              <a:t>- Nearest-neighbour (kNN-Tanimoto): predict from the most chemically similar known compounds — a 'read-across' baseline.</a:t>
+              <a:t>- Nearest-neighbour (kNN-Tanimoto): predict from the most chemically similar known compounds, a 'read-across' baseline.</a:t>
             </a:r>
           </a:p>
           <a:p>
@@ -595,12 +787,10 @@
               <a:t>- This baseline is the closest analogy to how an LLM's fuzzy recall works, which sets up the next slide.</a:t>
             </a:r>
           </a:p>
-          <a:p>
-            <a:endParaRPr/>
-          </a:p>
-          <a:p>
-            <a:r>
-              <a:t>Q&amp;A — EXPERT:</a:t>
+          <a:p/>
+          <a:p>
+            <a:r>
+              <a:t>Q&amp;A, EXPERT:</a:t>
             </a:r>
           </a:p>
           <a:p>
@@ -610,15 +800,13 @@
           </a:p>
           <a:p>
             <a:r>
-              <a:t>A: Modest but consistent — best on 8/8 under scaffold split, and the point is qualitative: it exceeds pure similarity recall, so performance isn't memorisation.</a:t>
-            </a:r>
-          </a:p>
-          <a:p>
-            <a:endParaRPr/>
-          </a:p>
-          <a:p>
-            <a:r>
-              <a:t>Q&amp;A — GENERAL/COMMERCIAL:</a:t>
+              <a:t>A: Modest but consistent, best on 8/8 under scaffold split, and the point is qualitative: it exceeds pure similarity recall, so performance isn't memorisation.</a:t>
+            </a:r>
+          </a:p>
+          <a:p/>
+          <a:p>
+            <a:r>
+              <a:t>Q&amp;A, GENERAL/COMMERCIAL:</a:t>
             </a:r>
           </a:p>
           <a:p>
@@ -628,7 +816,7 @@
           </a:p>
           <a:p>
             <a:r>
-              <a:t>A: Yes — a search only finds look-alikes; the model generalises to genuinely new structures, with calibrated confidence.</a:t>
+              <a:t>A: Yes, a search only finds look-alikes; the model generalises to genuinely new structures, with calibrated confidence.</a:t>
             </a:r>
           </a:p>
         </p:txBody>
@@ -640,7 +828,7 @@
             <a:spLocks noGrp="1"/>
           </p:cNvSpPr>
           <p:nvPr>
-            <p:ph type="sldNum" sz="quarter" idx="5"/>
+            <p:ph type="sldNum" idx="5" sz="quarter"/>
           </p:nvPr>
         </p:nvSpPr>
         <p:spPr/>
@@ -654,7 +842,7 @@
 </file>
 
 <file path=ppt/notesSlides/notesSlide12.xml><?xml version="1.0" encoding="utf-8"?>
-<p:notes xmlns:a="http://schemas.openxmlformats.org/drawingml/2006/main" xmlns:r="http://schemas.openxmlformats.org/officeDocument/2006/relationships" xmlns:p="http://schemas.openxmlformats.org/presentationml/2006/main">
+<p:notes xmlns:a="http://schemas.openxmlformats.org/drawingml/2006/main" xmlns:p="http://schemas.openxmlformats.org/presentationml/2006/main" xmlns:r="http://schemas.openxmlformats.org/officeDocument/2006/relationships">
   <p:cSld>
     <p:spTree>
       <p:nvGrpSpPr>
@@ -674,7 +862,7 @@
         <p:nvSpPr>
           <p:cNvPr id="2" name="Slide Image Placeholder 1"/>
           <p:cNvSpPr>
-            <a:spLocks noGrp="1" noRot="1" noChangeAspect="1"/>
+            <a:spLocks noGrp="1"/>
           </p:cNvSpPr>
           <p:nvPr>
             <p:ph type="sldImg" idx="2"/>
@@ -689,7 +877,7 @@
             <a:spLocks noGrp="1"/>
           </p:cNvSpPr>
           <p:nvPr>
-            <p:ph type="body" sz="quarter" idx="3"/>
+            <p:ph type="body" idx="3" sz="quarter"/>
           </p:nvPr>
         </p:nvSpPr>
         <p:spPr/>
@@ -698,12 +886,10 @@
           <a:lstStyle/>
           <a:p>
             <a:r>
-              <a:t>SAY: Good science stress-tests its own choices. We asked three sceptical questions and answered each with a re-run, not an opinion. Does the active/inactive cut-off matter? Barely. Does mixing experiment types distort things? By under 0.006. Does it know its limits? Yes — accuracy declines predictably with novelty, which is why the warning flag is calibrated the way it is.</a:t>
-            </a:r>
-          </a:p>
-          <a:p>
-            <a:endParaRPr/>
-          </a:p>
+              <a:t>SAY: Good science stress-tests its own choices. We asked three sceptical questions and answered each with a re-run, not an opinion. Does the active/inactive cut-off matter? Barely. Does mixing experiment types distort things? By under 0.006. Does it know its limits? Yes, accuracy declines predictably with novelty, which is why the warning flag is calibrated the way it is.</a:t>
+            </a:r>
+          </a:p>
+          <a:p/>
           <a:p>
             <a:r>
               <a:t>TECHNICAL TERMS:</a:t>
@@ -719,12 +905,10 @@
               <a:t>- 'Out-of-domain': a molecule unlike anything in training, where predictions are less reliable.</a:t>
             </a:r>
           </a:p>
-          <a:p>
-            <a:endParaRPr/>
-          </a:p>
-          <a:p>
-            <a:r>
-              <a:t>Q&amp;A — EXPERT:</a:t>
+          <a:p/>
+          <a:p>
+            <a:r>
+              <a:t>Q&amp;A, EXPERT:</a:t>
             </a:r>
           </a:p>
           <a:p>
@@ -734,15 +918,13 @@
           </a:p>
           <a:p>
             <a:r>
-              <a:t>A: GSK-3β (the most mixed, 49% IC50), MAO-B and hERG; deltas were +0.006, −0.006 and 0.000 — negligible.</a:t>
-            </a:r>
-          </a:p>
-          <a:p>
-            <a:endParaRPr/>
-          </a:p>
-          <a:p>
-            <a:r>
-              <a:t>Q&amp;A — GENERAL/COMMERCIAL:</a:t>
+              <a:t>A: GSK-3β (the most mixed, 49% IC50), MAO-B and hERG; deltas were +0.006, −0.006 and 0.000, negligible.</a:t>
+            </a:r>
+          </a:p>
+          <a:p/>
+          <a:p>
+            <a:r>
+              <a:t>Q&amp;A, GENERAL/COMMERCIAL:</a:t>
             </a:r>
           </a:p>
           <a:p>
@@ -752,7 +934,7 @@
           </a:p>
           <a:p>
             <a:r>
-              <a:t>A: For unfamiliar molecules it marks the result out-of-domain and widens its confidence — it declines to over-claim.</a:t>
+              <a:t>A: For unfamiliar molecules it marks the result out-of-domain and widens its confidence, it declines to over-claim.</a:t>
             </a:r>
           </a:p>
         </p:txBody>
@@ -764,7 +946,7 @@
             <a:spLocks noGrp="1"/>
           </p:cNvSpPr>
           <p:nvPr>
-            <p:ph type="sldNum" sz="quarter" idx="5"/>
+            <p:ph type="sldNum" idx="5" sz="quarter"/>
           </p:nvPr>
         </p:nvSpPr>
         <p:spPr/>
@@ -778,7 +960,7 @@
 </file>
 
 <file path=ppt/notesSlides/notesSlide13.xml><?xml version="1.0" encoding="utf-8"?>
-<p:notes xmlns:a="http://schemas.openxmlformats.org/drawingml/2006/main" xmlns:r="http://schemas.openxmlformats.org/officeDocument/2006/relationships" xmlns:p="http://schemas.openxmlformats.org/presentationml/2006/main">
+<p:notes xmlns:a="http://schemas.openxmlformats.org/drawingml/2006/main" xmlns:p="http://schemas.openxmlformats.org/presentationml/2006/main" xmlns:r="http://schemas.openxmlformats.org/officeDocument/2006/relationships">
   <p:cSld>
     <p:spTree>
       <p:nvGrpSpPr>
@@ -798,7 +980,7 @@
         <p:nvSpPr>
           <p:cNvPr id="2" name="Slide Image Placeholder 1"/>
           <p:cNvSpPr>
-            <a:spLocks noGrp="1" noRot="1" noChangeAspect="1"/>
+            <a:spLocks noGrp="1"/>
           </p:cNvSpPr>
           <p:nvPr>
             <p:ph type="sldImg" idx="2"/>
@@ -813,7 +995,7 @@
             <a:spLocks noGrp="1"/>
           </p:cNvSpPr>
           <p:nvPr>
-            <p:ph type="body" sz="quarter" idx="3"/>
+            <p:ph type="body" idx="3" sz="quarter"/>
           </p:nvPr>
         </p:nvSpPr>
         <p:spPr/>
@@ -822,12 +1004,10 @@
           <a:lstStyle/>
           <a:p>
             <a:r>
-              <a:t>SAY: The obvious question from a commercial audience: why not just use ChatGPT? So we ran a fair contest — same questions, scored against real data, decided in advance. Two honest findings. One: on well-known drugs the LLMs are genuinely good, sometimes better than us. Two: when we checked the specific evidence they cited — database IDs for the molecules — 45% were fabricated or pointed to a completely different drug (one 'rasagiline' ID was actually a steroid). And for a brand-new, unpublished molecule, all four confidently made up an answer, and disagreed with each other. Our tool cited real measurements every time and said 'uncertain' on the new one.</a:t>
-            </a:r>
-          </a:p>
-          <a:p>
-            <a:endParaRPr/>
-          </a:p>
+              <a:t>SAY: The obvious question from a commercial audience: why not just use ChatGPT? So we ran a fair contest, same questions, scored against real data, decided in advance. Two honest findings. One: on well-known drugs the LLMs are genuinely good, sometimes better than us. Two: when we checked the specific evidence they cited, database IDs for the molecules, 45% were fabricated or pointed to a completely different drug (one 'rasagiline' ID was actually a steroid). And for a brand-new, unpublished molecule, all four confidently made up an answer, and disagreed with each other. Our tool cited real measurements every time and said 'uncertain' on the new one.</a:t>
+            </a:r>
+          </a:p>
+          <a:p/>
           <a:p>
             <a:r>
               <a:t>TECHNICAL TERMS:</a:t>
@@ -848,12 +1028,10 @@
               <a:t>- Confabulation/hallucination: a confident but false answer.</a:t>
             </a:r>
           </a:p>
-          <a:p>
-            <a:endParaRPr/>
-          </a:p>
-          <a:p>
-            <a:r>
-              <a:t>Q&amp;A — EXPERT:</a:t>
+          <a:p/>
+          <a:p>
+            <a:r>
+              <a:t>Q&amp;A, EXPERT:</a:t>
             </a:r>
           </a:p>
           <a:p>
@@ -866,12 +1044,10 @@
               <a:t>A: The prompt is identical for every system including ours, and scored on the same measured-data key with live ChEMBL verification; we even dropped contestable items (e.g. donepezil hERG) to be fair to the LLMs.</a:t>
             </a:r>
           </a:p>
-          <a:p>
-            <a:endParaRPr/>
-          </a:p>
-          <a:p>
-            <a:r>
-              <a:t>Q&amp;A — GENERAL/COMMERCIAL:</a:t>
+          <a:p/>
+          <a:p>
+            <a:r>
+              <a:t>Q&amp;A, GENERAL/COMMERCIAL:</a:t>
             </a:r>
           </a:p>
           <a:p>
@@ -881,7 +1057,7 @@
           </a:p>
           <a:p>
             <a:r>
-              <a:t>A: No — great for summarising known drugs. But for decisions needing traceable evidence or novel chemistry, a grounded tool is essential. They're complementary.</a:t>
+              <a:t>A: No, great for summarising known drugs. But for decisions needing traceable evidence or novel chemistry, a grounded tool is essential. They're complementary.</a:t>
             </a:r>
           </a:p>
         </p:txBody>
@@ -893,7 +1069,7 @@
             <a:spLocks noGrp="1"/>
           </p:cNvSpPr>
           <p:nvPr>
-            <p:ph type="sldNum" sz="quarter" idx="5"/>
+            <p:ph type="sldNum" idx="5" sz="quarter"/>
           </p:nvPr>
         </p:nvSpPr>
         <p:spPr/>
@@ -907,7 +1083,7 @@
 </file>
 
 <file path=ppt/notesSlides/notesSlide14.xml><?xml version="1.0" encoding="utf-8"?>
-<p:notes xmlns:a="http://schemas.openxmlformats.org/drawingml/2006/main" xmlns:r="http://schemas.openxmlformats.org/officeDocument/2006/relationships" xmlns:p="http://schemas.openxmlformats.org/presentationml/2006/main">
+<p:notes xmlns:a="http://schemas.openxmlformats.org/drawingml/2006/main" xmlns:p="http://schemas.openxmlformats.org/presentationml/2006/main" xmlns:r="http://schemas.openxmlformats.org/officeDocument/2006/relationships">
   <p:cSld>
     <p:spTree>
       <p:nvGrpSpPr>
@@ -927,7 +1103,7 @@
         <p:nvSpPr>
           <p:cNvPr id="2" name="Slide Image Placeholder 1"/>
           <p:cNvSpPr>
-            <a:spLocks noGrp="1" noRot="1" noChangeAspect="1"/>
+            <a:spLocks noGrp="1"/>
           </p:cNvSpPr>
           <p:nvPr>
             <p:ph type="sldImg" idx="2"/>
@@ -942,7 +1118,7 @@
             <a:spLocks noGrp="1"/>
           </p:cNvSpPr>
           <p:nvPr>
-            <p:ph type="body" sz="quarter" idx="3"/>
+            <p:ph type="body" idx="3" sz="quarter"/>
           </p:nvPr>
         </p:nvSpPr>
         <p:spPr/>
@@ -954,12 +1130,10 @@
               <a:t>SAY: Put simply, BrainSafe is grounded and auditable by construction. It learns from measured data, gives calibrated probabilities with a confidence range, shows the real evidence behind each answer, warns when it's out of its depth, combines target activity with brain entry, and gives the same answer every time. General LLMs and typical ADMET tools each miss several of these.</a:t>
             </a:r>
           </a:p>
-          <a:p>
-            <a:endParaRPr/>
-          </a:p>
-          <a:p>
-            <a:r>
-              <a:t>Q&amp;A — EXPERT:</a:t>
+          <a:p/>
+          <a:p>
+            <a:r>
+              <a:t>Q&amp;A, EXPERT:</a:t>
             </a:r>
           </a:p>
           <a:p>
@@ -969,15 +1143,13 @@
           </a:p>
           <a:p>
             <a:r>
-              <a:t>A: Yes — deliberately: it returns the actual measured analogue and value, which is verifiable, unlike an LLM's fabricated citation.</a:t>
-            </a:r>
-          </a:p>
-          <a:p>
-            <a:endParaRPr/>
-          </a:p>
-          <a:p>
-            <a:r>
-              <a:t>Q&amp;A — GENERAL/COMMERCIAL:</a:t>
+              <a:t>A: Yes, deliberately: it returns the actual measured analogue and value, which is verifiable, unlike an LLM's fabricated citation.</a:t>
+            </a:r>
+          </a:p>
+          <a:p/>
+          <a:p>
+            <a:r>
+              <a:t>Q&amp;A, GENERAL/COMMERCIAL:</a:t>
             </a:r>
           </a:p>
           <a:p>
@@ -987,7 +1159,7 @@
           </a:p>
           <a:p>
             <a:r>
-              <a:t>A: 'A brain-drug triage tool you can audit — every answer backed by a real measurement, with honest confidence.'</a:t>
+              <a:t>A: 'A brain-drug triage tool you can audit, every answer backed by a real measurement, with honest confidence.'</a:t>
             </a:r>
           </a:p>
         </p:txBody>
@@ -999,7 +1171,7 @@
             <a:spLocks noGrp="1"/>
           </p:cNvSpPr>
           <p:nvPr>
-            <p:ph type="sldNum" sz="quarter" idx="5"/>
+            <p:ph type="sldNum" idx="5" sz="quarter"/>
           </p:nvPr>
         </p:nvSpPr>
         <p:spPr/>
@@ -1013,7 +1185,7 @@
 </file>
 
 <file path=ppt/notesSlides/notesSlide15.xml><?xml version="1.0" encoding="utf-8"?>
-<p:notes xmlns:a="http://schemas.openxmlformats.org/drawingml/2006/main" xmlns:r="http://schemas.openxmlformats.org/officeDocument/2006/relationships" xmlns:p="http://schemas.openxmlformats.org/presentationml/2006/main">
+<p:notes xmlns:a="http://schemas.openxmlformats.org/drawingml/2006/main" xmlns:p="http://schemas.openxmlformats.org/presentationml/2006/main" xmlns:r="http://schemas.openxmlformats.org/officeDocument/2006/relationships">
   <p:cSld>
     <p:spTree>
       <p:nvGrpSpPr>
@@ -1033,7 +1205,7 @@
         <p:nvSpPr>
           <p:cNvPr id="2" name="Slide Image Placeholder 1"/>
           <p:cNvSpPr>
-            <a:spLocks noGrp="1" noRot="1" noChangeAspect="1"/>
+            <a:spLocks noGrp="1"/>
           </p:cNvSpPr>
           <p:nvPr>
             <p:ph type="sldImg" idx="2"/>
@@ -1048,7 +1220,7 @@
             <a:spLocks noGrp="1"/>
           </p:cNvSpPr>
           <p:nvPr>
-            <p:ph type="body" sz="quarter" idx="3"/>
+            <p:ph type="body" idx="3" sz="quarter"/>
           </p:nvPr>
         </p:nvSpPr>
         <p:spPr/>
@@ -1060,9 +1232,7 @@
               <a:t>SAY: Being clear about scope is part of the integrity. It's a triage and hypothesis-generation engine: it helps you decide what to test next, cheaply and transparently. It is explicitly not a clinical or diagnostic tool. It predicts engagement, not direction or efficacy; it hasn't had wet-lab confirmation yet; and it covers one safety axis.</a:t>
             </a:r>
           </a:p>
-          <a:p>
-            <a:endParaRPr/>
-          </a:p>
+          <a:p/>
           <a:p>
             <a:r>
               <a:t>TECHNICAL TERMS:</a:t>
@@ -1078,12 +1248,10 @@
               <a:t>- Engagement vs efficacy: hitting a target vs actually helping a patient.</a:t>
             </a:r>
           </a:p>
-          <a:p>
-            <a:endParaRPr/>
-          </a:p>
-          <a:p>
-            <a:r>
-              <a:t>Q&amp;A — GENERAL/COMMERCIAL:</a:t>
+          <a:p/>
+          <a:p>
+            <a:r>
+              <a:t>Q&amp;A, GENERAL/COMMERCIAL:</a:t>
             </a:r>
           </a:p>
           <a:p>
@@ -1093,7 +1261,7 @@
           </a:p>
           <a:p>
             <a:r>
-              <a:t>A: No — and it never should. It shortlists candidates for scientists to test.</a:t>
+              <a:t>A: No, and it never should. It shortlists candidates for scientists to test.</a:t>
             </a:r>
           </a:p>
           <a:p>
@@ -1103,15 +1271,13 @@
           </a:p>
           <a:p>
             <a:r>
-              <a:t>A: Compound triage for CNS discovery, natural-product screening, and drug-repurposing prioritisation — reducing wasted lab spend.</a:t>
-            </a:r>
-          </a:p>
-          <a:p>
-            <a:endParaRPr/>
-          </a:p>
-          <a:p>
-            <a:r>
-              <a:t>Q&amp;A — EXPERT:</a:t>
+              <a:t>A: Compound triage for CNS discovery, natural-product screening, and drug-repurposing prioritisation, reducing wasted lab spend.</a:t>
+            </a:r>
+          </a:p>
+          <a:p/>
+          <a:p>
+            <a:r>
+              <a:t>Q&amp;A, EXPERT:</a:t>
             </a:r>
           </a:p>
           <a:p>
@@ -1133,7 +1299,7 @@
             <a:spLocks noGrp="1"/>
           </p:cNvSpPr>
           <p:nvPr>
-            <p:ph type="sldNum" sz="quarter" idx="5"/>
+            <p:ph type="sldNum" idx="5" sz="quarter"/>
           </p:nvPr>
         </p:nvSpPr>
         <p:spPr/>
@@ -1147,7 +1313,7 @@
 </file>
 
 <file path=ppt/notesSlides/notesSlide16.xml><?xml version="1.0" encoding="utf-8"?>
-<p:notes xmlns:a="http://schemas.openxmlformats.org/drawingml/2006/main" xmlns:r="http://schemas.openxmlformats.org/officeDocument/2006/relationships" xmlns:p="http://schemas.openxmlformats.org/presentationml/2006/main">
+<p:notes xmlns:a="http://schemas.openxmlformats.org/drawingml/2006/main" xmlns:p="http://schemas.openxmlformats.org/presentationml/2006/main" xmlns:r="http://schemas.openxmlformats.org/officeDocument/2006/relationships">
   <p:cSld>
     <p:spTree>
       <p:nvGrpSpPr>
@@ -1167,7 +1333,7 @@
         <p:nvSpPr>
           <p:cNvPr id="2" name="Slide Image Placeholder 1"/>
           <p:cNvSpPr>
-            <a:spLocks noGrp="1" noRot="1" noChangeAspect="1"/>
+            <a:spLocks noGrp="1"/>
           </p:cNvSpPr>
           <p:nvPr>
             <p:ph type="sldImg" idx="2"/>
@@ -1182,7 +1348,7 @@
             <a:spLocks noGrp="1"/>
           </p:cNvSpPr>
           <p:nvPr>
-            <p:ph type="body" sz="quarter" idx="3"/>
+            <p:ph type="body" idx="3" sz="quarter"/>
           </p:nvPr>
         </p:nvSpPr>
         <p:spPr/>
@@ -1191,15 +1357,13 @@
           <a:lstStyle/>
           <a:p>
             <a:r>
-              <a:t>SAY: To close — we built a brain-effect predictor you can trust because you can check it. 64,474 real measurements, four levels of testing, a confidence promise that holds, and zero fabricated evidence. It matches the best on standard tests, is honest about the hard ones, and every answer traces back to a real experiment. Thank you — happy to take questions.</a:t>
-            </a:r>
-          </a:p>
-          <a:p>
-            <a:endParaRPr/>
-          </a:p>
-          <a:p>
-            <a:r>
-              <a:t>Q&amp;A — EXPERT:</a:t>
+              <a:t>SAY: To close, we built a brain-effect predictor you can trust because you can check it. 64,474 real measurements, four levels of testing, a confidence promise that holds, and zero fabricated evidence. It matches the best on standard tests, is honest about the hard ones, and every answer traces back to a real experiment. Thank you ,  happy to take questions.</a:t>
+            </a:r>
+          </a:p>
+          <a:p/>
+          <a:p>
+            <a:r>
+              <a:t>Q&amp;A, EXPERT:</a:t>
             </a:r>
           </a:p>
           <a:p>
@@ -1212,12 +1376,10 @@
               <a:t>A: Wet-lab prospective validation, more safety anti-targets, and broader target coverage.</a:t>
             </a:r>
           </a:p>
-          <a:p>
-            <a:endParaRPr/>
-          </a:p>
-          <a:p>
-            <a:r>
-              <a:t>Q&amp;A — GENERAL/COMMERCIAL:</a:t>
+          <a:p/>
+          <a:p>
+            <a:r>
+              <a:t>Q&amp;A, GENERAL/COMMERCIAL:</a:t>
             </a:r>
           </a:p>
           <a:p>
@@ -1239,7 +1401,7 @@
             <a:spLocks noGrp="1"/>
           </p:cNvSpPr>
           <p:nvPr>
-            <p:ph type="sldNum" sz="quarter" idx="5"/>
+            <p:ph type="sldNum" idx="5" sz="quarter"/>
           </p:nvPr>
         </p:nvSpPr>
         <p:spPr/>
@@ -1253,7 +1415,7 @@
 </file>
 
 <file path=ppt/notesSlides/notesSlide2.xml><?xml version="1.0" encoding="utf-8"?>
-<p:notes xmlns:a="http://schemas.openxmlformats.org/drawingml/2006/main" xmlns:r="http://schemas.openxmlformats.org/officeDocument/2006/relationships" xmlns:p="http://schemas.openxmlformats.org/presentationml/2006/main">
+<p:notes xmlns:a="http://schemas.openxmlformats.org/drawingml/2006/main" xmlns:p="http://schemas.openxmlformats.org/presentationml/2006/main" xmlns:r="http://schemas.openxmlformats.org/officeDocument/2006/relationships">
   <p:cSld>
     <p:spTree>
       <p:nvGrpSpPr>
@@ -1273,7 +1435,7 @@
         <p:nvSpPr>
           <p:cNvPr id="2" name="Slide Image Placeholder 1"/>
           <p:cNvSpPr>
-            <a:spLocks noGrp="1" noRot="1" noChangeAspect="1"/>
+            <a:spLocks noGrp="1"/>
           </p:cNvSpPr>
           <p:nvPr>
             <p:ph type="sldImg" idx="2"/>
@@ -1288,7 +1450,7 @@
             <a:spLocks noGrp="1"/>
           </p:cNvSpPr>
           <p:nvPr>
-            <p:ph type="body" sz="quarter" idx="3"/>
+            <p:ph type="body" idx="3" sz="quarter"/>
           </p:nvPr>
         </p:nvSpPr>
         <p:spPr/>
@@ -1297,12 +1459,10 @@
           <a:lstStyle/>
           <a:p>
             <a:r>
-              <a:t>SAY: A common misconception is that 'will this help the brain?' is one question. It isn't. A molecule can be a perfect target-blocker and still be useless because it never reaches the brain — or dangerous because it affects the heart. You have to answer all of these together. Today those answers are scattered across separate tools that don't talk to each other.</a:t>
-            </a:r>
-          </a:p>
-          <a:p>
-            <a:endParaRPr/>
-          </a:p>
+              <a:t>SAY: A common misconception is that 'will this help the brain?' is one question. It isn't. A molecule can be a perfect target-blocker and still be useless because it never reaches the brain, or dangerous because it affects the heart. You have to answer all of these together. Today those answers are scattered across separate tools that don't talk to each other.</a:t>
+            </a:r>
+          </a:p>
+          <a:p/>
           <a:p>
             <a:r>
               <a:t>TECHNICAL TERMS:</a:t>
@@ -1320,15 +1480,13 @@
           </a:p>
           <a:p>
             <a:r>
-              <a:t>- ADMET: absorption, distribution, metabolism, excretion, toxicity — the 'developability' properties.</a:t>
-            </a:r>
-          </a:p>
-          <a:p>
-            <a:endParaRPr/>
-          </a:p>
-          <a:p>
-            <a:r>
-              <a:t>Q&amp;A — GENERAL/COMMERCIAL:</a:t>
+              <a:t>- ADMET: absorption, distribution, metabolism, excretion, toxicity, the 'developability' properties.</a:t>
+            </a:r>
+          </a:p>
+          <a:p/>
+          <a:p>
+            <a:r>
+              <a:t>Q&amp;A, GENERAL/COMMERCIAL:</a:t>
             </a:r>
           </a:p>
           <a:p>
@@ -1341,12 +1499,10 @@
               <a:t>A: Most drug candidates fail late and expensively. Catching 'won't reach the brain' or 'heart-safety risk' early saves time and money.</a:t>
             </a:r>
           </a:p>
-          <a:p>
-            <a:endParaRPr/>
-          </a:p>
-          <a:p>
-            <a:r>
-              <a:t>Q&amp;A — EXPERT:</a:t>
+          <a:p/>
+          <a:p>
+            <a:r>
+              <a:t>Q&amp;A, EXPERT:</a:t>
             </a:r>
           </a:p>
           <a:p>
@@ -1356,7 +1512,7 @@
           </a:p>
           <a:p>
             <a:r>
-              <a:t>A: They cover BBB/ADMET well but not measured CNS-target activity, BBB-gated disease synthesis, calibrated uncertainty, or a linked safety axis — that combination is the gap.</a:t>
+              <a:t>A: They cover BBB/ADMET well but not measured CNS-target activity, BBB-gated disease synthesis, calibrated uncertainty, or a linked safety axis, that combination is the gap.</a:t>
             </a:r>
           </a:p>
         </p:txBody>
@@ -1368,7 +1524,7 @@
             <a:spLocks noGrp="1"/>
           </p:cNvSpPr>
           <p:nvPr>
-            <p:ph type="sldNum" sz="quarter" idx="5"/>
+            <p:ph type="sldNum" idx="5" sz="quarter"/>
           </p:nvPr>
         </p:nvSpPr>
         <p:spPr/>
@@ -1382,7 +1538,7 @@
 </file>
 
 <file path=ppt/notesSlides/notesSlide3.xml><?xml version="1.0" encoding="utf-8"?>
-<p:notes xmlns:a="http://schemas.openxmlformats.org/drawingml/2006/main" xmlns:r="http://schemas.openxmlformats.org/officeDocument/2006/relationships" xmlns:p="http://schemas.openxmlformats.org/presentationml/2006/main">
+<p:notes xmlns:a="http://schemas.openxmlformats.org/drawingml/2006/main" xmlns:p="http://schemas.openxmlformats.org/presentationml/2006/main" xmlns:r="http://schemas.openxmlformats.org/officeDocument/2006/relationships">
   <p:cSld>
     <p:spTree>
       <p:nvGrpSpPr>
@@ -1402,7 +1558,7 @@
         <p:nvSpPr>
           <p:cNvPr id="2" name="Slide Image Placeholder 1"/>
           <p:cNvSpPr>
-            <a:spLocks noGrp="1" noRot="1" noChangeAspect="1"/>
+            <a:spLocks noGrp="1"/>
           </p:cNvSpPr>
           <p:nvPr>
             <p:ph type="sldImg" idx="2"/>
@@ -1417,7 +1573,7 @@
             <a:spLocks noGrp="1"/>
           </p:cNvSpPr>
           <p:nvPr>
-            <p:ph type="body" sz="quarter" idx="3"/>
+            <p:ph type="body" idx="3" sz="quarter"/>
           </p:nvPr>
         </p:nvSpPr>
         <p:spPr/>
@@ -1426,12 +1582,10 @@
           <a:lstStyle/>
           <a:p>
             <a:r>
-              <a:t>SAY: We did not invent a new machine-learning algorithm — and that is deliberate. The scientific value here is engineering restraint: taking proven, trusted components and integrating them so the whole is honest and auditable. Three properties make it different from a black box: calibration, evidence-grounding, and brain-gating.</a:t>
-            </a:r>
-          </a:p>
-          <a:p>
-            <a:endParaRPr/>
-          </a:p>
+              <a:t>SAY: We did not invent a new machine-learning algorithm, and that is deliberate. The scientific value here is engineering restraint: taking proven, trusted components and integrating them so the whole is honest and auditable. Three properties make it different from a black box: calibration, evidence-grounding, and brain-gating.</a:t>
+            </a:r>
+          </a:p>
+          <a:p/>
           <a:p>
             <a:r>
               <a:t>TECHNICAL TERMS:</a:t>
@@ -1444,7 +1598,7 @@
           </a:p>
           <a:p>
             <a:r>
-              <a:t>- Confidence range (conformal set): instead of one number, the tool can say 'confidently active' or 'uncertain — both possible', with a mathematical coverage guarantee.</a:t>
+              <a:t>- Confidence range (conformal set): instead of one number, the tool can say 'confidently active' or 'uncertain, both possible', with a mathematical coverage guarantee.</a:t>
             </a:r>
           </a:p>
           <a:p>
@@ -1452,12 +1606,10 @@
               <a:t>- Brain-gating: multiplying target activity by brain-penetration probability, so a target hit that can't reach the brain is down-weighted.</a:t>
             </a:r>
           </a:p>
-          <a:p>
-            <a:endParaRPr/>
-          </a:p>
-          <a:p>
-            <a:r>
-              <a:t>Q&amp;A — EXPERT:</a:t>
+          <a:p/>
+          <a:p>
+            <a:r>
+              <a:t>Q&amp;A, EXPERT:</a:t>
             </a:r>
           </a:p>
           <a:p>
@@ -1467,15 +1619,13 @@
           </a:p>
           <a:p>
             <a:r>
-              <a:t>A: The integrated, calibrated, conformal, BBB-gated, safety-aware, evidence-grounded configuration on measured data — no existing single tool provides it — plus a rigorous multi-regime validation.</a:t>
-            </a:r>
-          </a:p>
-          <a:p>
-            <a:endParaRPr/>
-          </a:p>
-          <a:p>
-            <a:r>
-              <a:t>Q&amp;A — GENERAL/COMMERCIAL:</a:t>
+              <a:t>A: The integrated, calibrated, conformal, BBB-gated, safety-aware, evidence-grounded configuration on measured data, no existing single tool provides it, plus a rigorous multi-regime validation.</a:t>
+            </a:r>
+          </a:p>
+          <a:p/>
+          <a:p>
+            <a:r>
+              <a:t>Q&amp;A, GENERAL/COMMERCIAL:</a:t>
             </a:r>
           </a:p>
           <a:p>
@@ -1485,7 +1635,7 @@
           </a:p>
           <a:p>
             <a:r>
-              <a:t>A: The integration, the curated measured dataset, the honesty layer (calibration + provenance), and validated performance — hard to reproduce casually.</a:t>
+              <a:t>A: The integration, the curated measured dataset, the honesty layer (calibration + provenance), and validated performance, hard to reproduce casually.</a:t>
             </a:r>
           </a:p>
         </p:txBody>
@@ -1497,7 +1647,7 @@
             <a:spLocks noGrp="1"/>
           </p:cNvSpPr>
           <p:nvPr>
-            <p:ph type="sldNum" sz="quarter" idx="5"/>
+            <p:ph type="sldNum" idx="5" sz="quarter"/>
           </p:nvPr>
         </p:nvSpPr>
         <p:spPr/>
@@ -1511,7 +1661,7 @@
 </file>
 
 <file path=ppt/notesSlides/notesSlide4.xml><?xml version="1.0" encoding="utf-8"?>
-<p:notes xmlns:a="http://schemas.openxmlformats.org/drawingml/2006/main" xmlns:r="http://schemas.openxmlformats.org/officeDocument/2006/relationships" xmlns:p="http://schemas.openxmlformats.org/presentationml/2006/main">
+<p:notes xmlns:a="http://schemas.openxmlformats.org/drawingml/2006/main" xmlns:p="http://schemas.openxmlformats.org/presentationml/2006/main" xmlns:r="http://schemas.openxmlformats.org/officeDocument/2006/relationships">
   <p:cSld>
     <p:spTree>
       <p:nvGrpSpPr>
@@ -1531,7 +1681,7 @@
         <p:nvSpPr>
           <p:cNvPr id="2" name="Slide Image Placeholder 1"/>
           <p:cNvSpPr>
-            <a:spLocks noGrp="1" noRot="1" noChangeAspect="1"/>
+            <a:spLocks noGrp="1"/>
           </p:cNvSpPr>
           <p:nvPr>
             <p:ph type="sldImg" idx="2"/>
@@ -1546,7 +1696,7 @@
             <a:spLocks noGrp="1"/>
           </p:cNvSpPr>
           <p:nvPr>
-            <p:ph type="body" sz="quarter" idx="3"/>
+            <p:ph type="body" idx="3" sz="quarter"/>
           </p:nvPr>
         </p:nvSpPr>
         <p:spPr/>
@@ -1555,12 +1705,10 @@
           <a:lstStyle/>
           <a:p>
             <a:r>
-              <a:t>SAY: Everything the tool knows comes from real experiments in public databases — mainly ChEMBL, the standard repository of measured bioactivity, and B3DB for brain penetration. 64,474 measured records in total. This is the single most important integrity point: the foundation is measured, not scraped text.</a:t>
-            </a:r>
-          </a:p>
-          <a:p>
-            <a:endParaRPr/>
-          </a:p>
+              <a:t>SAY: Everything the tool knows comes from real experiments in public databases, mainly ChEMBL, the standard repository of measured bioactivity, and B3DB for brain penetration. 64,474 measured records in total. This is the single most important integrity point: the foundation is measured, not scraped text.</a:t>
+            </a:r>
+          </a:p>
+          <a:p/>
           <a:p>
             <a:r>
               <a:t>TECHNICAL TERMS:</a:t>
@@ -1586,17 +1734,15 @@
               <a:t>- DPPH: a standard lab test of antioxidant (free-radical-scavenging) strength.</a:t>
             </a:r>
           </a:p>
-          <a:p>
-            <a:endParaRPr/>
-          </a:p>
-          <a:p>
-            <a:r>
-              <a:t>Q&amp;A — EXPERT:</a:t>
-            </a:r>
-          </a:p>
-          <a:p>
-            <a:r>
-              <a:t>Q: You pool IC50/Ki/Kd/EC50 — doesn't that mix assays?</a:t>
+          <a:p/>
+          <a:p>
+            <a:r>
+              <a:t>Q&amp;A, EXPERT:</a:t>
+            </a:r>
+          </a:p>
+          <a:p>
+            <a:r>
+              <a:t>Q: You pool IC50/Ki/Kd/EC50, doesn't that mix assays?</a:t>
             </a:r>
           </a:p>
           <a:p>
@@ -1604,12 +1750,10 @@
               <a:t>A: Yes, on the standardised pChEMBL scale; we tested this (later slide): retraining on a single assay type changes AUROC by &lt;=0.006, so pooling is safe.</a:t>
             </a:r>
           </a:p>
-          <a:p>
-            <a:endParaRPr/>
-          </a:p>
-          <a:p>
-            <a:r>
-              <a:t>Q&amp;A — GENERAL/COMMERCIAL:</a:t>
+          <a:p/>
+          <a:p>
+            <a:r>
+              <a:t>Q&amp;A, GENERAL/COMMERCIAL:</a:t>
             </a:r>
           </a:p>
           <a:p>
@@ -1631,7 +1775,7 @@
             <a:spLocks noGrp="1"/>
           </p:cNvSpPr>
           <p:nvPr>
-            <p:ph type="sldNum" sz="quarter" idx="5"/>
+            <p:ph type="sldNum" idx="5" sz="quarter"/>
           </p:nvPr>
         </p:nvSpPr>
         <p:spPr/>
@@ -1645,7 +1789,7 @@
 </file>
 
 <file path=ppt/notesSlides/notesSlide5.xml><?xml version="1.0" encoding="utf-8"?>
-<p:notes xmlns:a="http://schemas.openxmlformats.org/drawingml/2006/main" xmlns:r="http://schemas.openxmlformats.org/officeDocument/2006/relationships" xmlns:p="http://schemas.openxmlformats.org/presentationml/2006/main">
+<p:notes xmlns:a="http://schemas.openxmlformats.org/drawingml/2006/main" xmlns:p="http://schemas.openxmlformats.org/presentationml/2006/main" xmlns:r="http://schemas.openxmlformats.org/officeDocument/2006/relationships">
   <p:cSld>
     <p:spTree>
       <p:nvGrpSpPr>
@@ -1665,7 +1809,7 @@
         <p:nvSpPr>
           <p:cNvPr id="2" name="Slide Image Placeholder 1"/>
           <p:cNvSpPr>
-            <a:spLocks noGrp="1" noRot="1" noChangeAspect="1"/>
+            <a:spLocks noGrp="1"/>
           </p:cNvSpPr>
           <p:nvPr>
             <p:ph type="sldImg" idx="2"/>
@@ -1680,7 +1824,7 @@
             <a:spLocks noGrp="1"/>
           </p:cNvSpPr>
           <p:nvPr>
-            <p:ph type="body" sz="quarter" idx="3"/>
+            <p:ph type="body" idx="3" sz="quarter"/>
           </p:nvPr>
         </p:nvSpPr>
         <p:spPr/>
@@ -1689,12 +1833,10 @@
           <a:lstStyle/>
           <a:p>
             <a:r>
-              <a:t>SAY: The tool outputs a full brain profile: brain entry, several disease-relevant targets, a heart-safety flag, receptor strengths, antioxidant capacity, and drug-likeness. Two of these — druggability and CNS-MPO — are transparent chemistry rules, not machine learning.</a:t>
-            </a:r>
-          </a:p>
-          <a:p>
-            <a:endParaRPr/>
-          </a:p>
+              <a:t>SAY: The tool outputs a full brain profile: brain entry, several disease-relevant targets, a heart-safety flag, receptor strengths, antioxidant capacity, and drug-likeness. Two of these, druggability and CNS-MPO, are transparent chemistry rules, not machine learning.</a:t>
+            </a:r>
+          </a:p>
+          <a:p/>
           <a:p>
             <a:r>
               <a:t>TECHNICAL TERMS:</a:t>
@@ -1707,7 +1849,7 @@
           </a:p>
           <a:p>
             <a:r>
-              <a:t>- hERG: a heart ion-channel; blocking it can cause dangerous arrhythmia — a classic safety red flag.</a:t>
+              <a:t>- hERG: a heart ion-channel; blocking it can cause dangerous arrhythmia, a classic safety red flag.</a:t>
             </a:r>
           </a:p>
           <a:p>
@@ -1725,12 +1867,10 @@
               <a:t>- CNS-MPO: a published 'is this drug-like for the brain?' scoring rule.</a:t>
             </a:r>
           </a:p>
-          <a:p>
-            <a:endParaRPr/>
-          </a:p>
-          <a:p>
-            <a:r>
-              <a:t>Q&amp;A — EXPERT:</a:t>
+          <a:p/>
+          <a:p>
+            <a:r>
+              <a:t>Q&amp;A, EXPERT:</a:t>
             </a:r>
           </a:p>
           <a:p>
@@ -1740,15 +1880,13 @@
           </a:p>
           <a:p>
             <a:r>
-              <a:t>A: 96–98% active-only data makes binary classification degenerate; a pre-set quality gate (MCC&gt;=0.45) routes them to potency regression instead — decided by data, not hand.</a:t>
-            </a:r>
-          </a:p>
-          <a:p>
-            <a:endParaRPr/>
-          </a:p>
-          <a:p>
-            <a:r>
-              <a:t>Q&amp;A — GENERAL/COMMERCIAL:</a:t>
+              <a:t>A: 96–98% active-only data makes binary classification degenerate; a pre-set quality gate (MCC&gt;=0.45) routes them to potency regression instead, decided by data, not hand.</a:t>
+            </a:r>
+          </a:p>
+          <a:p/>
+          <a:p>
+            <a:r>
+              <a:t>Q&amp;A, GENERAL/COMMERCIAL:</a:t>
             </a:r>
           </a:p>
           <a:p>
@@ -1758,7 +1896,7 @@
           </a:p>
           <a:p>
             <a:r>
-              <a:t>A: Yes — the same pipeline extends to any target with enough measured data.</a:t>
+              <a:t>A: Yes, the same pipeline extends to any target with enough measured data.</a:t>
             </a:r>
           </a:p>
         </p:txBody>
@@ -1770,7 +1908,7 @@
             <a:spLocks noGrp="1"/>
           </p:cNvSpPr>
           <p:nvPr>
-            <p:ph type="sldNum" sz="quarter" idx="5"/>
+            <p:ph type="sldNum" idx="5" sz="quarter"/>
           </p:nvPr>
         </p:nvSpPr>
         <p:spPr/>
@@ -1784,7 +1922,7 @@
 </file>
 
 <file path=ppt/notesSlides/notesSlide6.xml><?xml version="1.0" encoding="utf-8"?>
-<p:notes xmlns:a="http://schemas.openxmlformats.org/drawingml/2006/main" xmlns:r="http://schemas.openxmlformats.org/officeDocument/2006/relationships" xmlns:p="http://schemas.openxmlformats.org/presentationml/2006/main">
+<p:notes xmlns:a="http://schemas.openxmlformats.org/drawingml/2006/main" xmlns:p="http://schemas.openxmlformats.org/presentationml/2006/main" xmlns:r="http://schemas.openxmlformats.org/officeDocument/2006/relationships">
   <p:cSld>
     <p:spTree>
       <p:nvGrpSpPr>
@@ -1804,7 +1942,7 @@
         <p:nvSpPr>
           <p:cNvPr id="2" name="Slide Image Placeholder 1"/>
           <p:cNvSpPr>
-            <a:spLocks noGrp="1" noRot="1" noChangeAspect="1"/>
+            <a:spLocks noGrp="1"/>
           </p:cNvSpPr>
           <p:nvPr>
             <p:ph type="sldImg" idx="2"/>
@@ -1819,7 +1957,7 @@
             <a:spLocks noGrp="1"/>
           </p:cNvSpPr>
           <p:nvPr>
-            <p:ph type="body" sz="quarter" idx="3"/>
+            <p:ph type="body" idx="3" sz="quarter"/>
           </p:nvPr>
         </p:nvSpPr>
         <p:spPr/>
@@ -1828,107 +1966,65 @@
           <a:lstStyle/>
           <a:p>
             <a:r>
-              <a:rPr dirty="0"/>
-              <a:t>SAY: Computers can't read a chemical drawing directly, so we convert each molecule into numbers in two ways: a 'fingerprint' that records which small sub-structures are present, and 24 physical properties like size and greasiness. Then three different model types each make a prediction and we average their votes — like a panel of experts rather than one opinion.</a:t>
-            </a:r>
-          </a:p>
-          <a:p>
-            <a:endParaRPr dirty="0"/>
-          </a:p>
-          <a:p>
-            <a:r>
-              <a:rPr dirty="0"/>
+              <a:t>SAY: Computers can't read a chemical drawing directly, so we convert each molecule into numbers in two ways: a 'fingerprint' that records which small sub-structures are present, and 24 physical properties like size and greasiness. Then three different model types each make a prediction and we average their votes, like a panel of experts rather than one opinion.</a:t>
+            </a:r>
+          </a:p>
+          <a:p/>
+          <a:p>
+            <a:r>
               <a:t>TECHNICAL TERMS:</a:t>
             </a:r>
           </a:p>
           <a:p>
             <a:r>
-              <a:rPr dirty="0"/>
               <a:t>- ECFP-4 / Morgan fingerprint: a fixed-length binary code of a molecule's local substructures.</a:t>
             </a:r>
           </a:p>
           <a:p>
             <a:r>
-              <a:rPr dirty="0"/>
-              <a:t>- Descriptor: a computed physical property (molecular weight, </a:t>
-            </a:r>
-            <a:r>
-              <a:rPr dirty="0" err="1"/>
-              <a:t>logP</a:t>
-            </a:r>
-            <a:r>
-              <a:rPr dirty="0"/>
-              <a:t>/greasiness, polar surface area, etc.).</a:t>
-            </a:r>
-          </a:p>
-          <a:p>
-            <a:r>
-              <a:rPr dirty="0"/>
+              <a:t>- Descriptor: a computed physical property (molecular weight, logP/greasiness, polar surface area, etc.).</a:t>
+            </a:r>
+          </a:p>
+          <a:p>
+            <a:r>
               <a:t>- Random Forest / Extra Trees / Gradient Boosting: standard, robust 'tree ensemble' algorithms.</a:t>
             </a:r>
           </a:p>
           <a:p>
             <a:r>
-              <a:rPr dirty="0"/>
               <a:t>- Ensemble: combining several models to reduce error.</a:t>
             </a:r>
           </a:p>
-          <a:p>
-            <a:endParaRPr dirty="0"/>
-          </a:p>
-          <a:p>
-            <a:r>
-              <a:rPr dirty="0"/>
-              <a:t>Q&amp;A — EXPERT:</a:t>
-            </a:r>
-          </a:p>
-          <a:p>
-            <a:r>
-              <a:rPr dirty="0"/>
+          <a:p/>
+          <a:p>
+            <a:r>
+              <a:t>Q&amp;A, EXPERT:</a:t>
+            </a:r>
+          </a:p>
+          <a:p>
+            <a:r>
               <a:t>Q: Why not a graph neural network?</a:t>
             </a:r>
           </a:p>
           <a:p>
             <a:r>
-              <a:rPr dirty="0"/>
-              <a:t>A: On datasets this size, tree ensembles on </a:t>
-            </a:r>
-            <a:r>
-              <a:rPr dirty="0" err="1"/>
-              <a:t>ECFP+descriptors</a:t>
-            </a:r>
-            <a:r>
-              <a:rPr dirty="0"/>
-              <a:t> are competitive, far more interpretable, cheaper, and match the literature baselines; deep nets were unnecessary for the claim. Fixed seed 42, </a:t>
-            </a:r>
-            <a:r>
-              <a:rPr dirty="0" err="1"/>
-              <a:t>RDKit</a:t>
-            </a:r>
-            <a:r>
-              <a:rPr dirty="0"/>
-              <a:t> 2026.03, scikit-learn 1.8.</a:t>
-            </a:r>
-          </a:p>
-          <a:p>
-            <a:endParaRPr dirty="0"/>
-          </a:p>
-          <a:p>
-            <a:r>
-              <a:rPr dirty="0"/>
-              <a:t>Q&amp;A — GENERAL/COMMERCIAL:</a:t>
-            </a:r>
-          </a:p>
-          <a:p>
-            <a:r>
-              <a:rPr dirty="0"/>
+              <a:t>A: On datasets this size, tree ensembles on ECFP+descriptors are competitive, far more interpretable, cheaper, and match the literature baselines; deep nets were unnecessary for the claim. Fixed seed 42, RDKit 2026.03, scikit-learn 1.8.</a:t>
+            </a:r>
+          </a:p>
+          <a:p/>
+          <a:p>
+            <a:r>
+              <a:t>Q&amp;A, GENERAL/COMMERCIAL:</a:t>
+            </a:r>
+          </a:p>
+          <a:p>
+            <a:r>
               <a:t>Q: Does it need a supercomputer?</a:t>
             </a:r>
           </a:p>
           <a:p>
             <a:r>
-              <a:rPr dirty="0"/>
-              <a:t>A: No — it runs on a normal machine, which keeps it cheap and deployable.</a:t>
+              <a:t>A: No, it runs on a normal machine, which keeps it cheap and deployable.</a:t>
             </a:r>
           </a:p>
         </p:txBody>
@@ -1940,7 +2036,7 @@
             <a:spLocks noGrp="1"/>
           </p:cNvSpPr>
           <p:nvPr>
-            <p:ph type="sldNum" sz="quarter" idx="5"/>
+            <p:ph type="sldNum" idx="5" sz="quarter"/>
           </p:nvPr>
         </p:nvSpPr>
         <p:spPr/>
@@ -1954,7 +2050,7 @@
 </file>
 
 <file path=ppt/notesSlides/notesSlide7.xml><?xml version="1.0" encoding="utf-8"?>
-<p:notes xmlns:a="http://schemas.openxmlformats.org/drawingml/2006/main" xmlns:r="http://schemas.openxmlformats.org/officeDocument/2006/relationships" xmlns:p="http://schemas.openxmlformats.org/presentationml/2006/main">
+<p:notes xmlns:a="http://schemas.openxmlformats.org/drawingml/2006/main" xmlns:p="http://schemas.openxmlformats.org/presentationml/2006/main" xmlns:r="http://schemas.openxmlformats.org/officeDocument/2006/relationships">
   <p:cSld>
     <p:spTree>
       <p:nvGrpSpPr>
@@ -1974,7 +2070,7 @@
         <p:nvSpPr>
           <p:cNvPr id="2" name="Slide Image Placeholder 1"/>
           <p:cNvSpPr>
-            <a:spLocks noGrp="1" noRot="1" noChangeAspect="1"/>
+            <a:spLocks noGrp="1"/>
           </p:cNvSpPr>
           <p:nvPr>
             <p:ph type="sldImg" idx="2"/>
@@ -1989,7 +2085,7 @@
             <a:spLocks noGrp="1"/>
           </p:cNvSpPr>
           <p:nvPr>
-            <p:ph type="body" sz="quarter" idx="3"/>
+            <p:ph type="body" idx="3" sz="quarter"/>
           </p:nvPr>
         </p:nvSpPr>
         <p:spPr/>
@@ -2001,9 +2097,7 @@
               <a:t>SAY: The difference between a toy and a trustworthy tool is what happens around the prediction. Four choices matter. First, how we define active vs inactive. Second, a quality gate so weak models never ship. Third, calibration so the numbers mean what they say. Fourth, a confidence range plus a warning when a molecule is outside what the model has seen.</a:t>
             </a:r>
           </a:p>
-          <a:p>
-            <a:endParaRPr/>
-          </a:p>
+          <a:p/>
           <a:p>
             <a:r>
               <a:t>TECHNICAL TERMS:</a:t>
@@ -2034,12 +2128,10 @@
               <a:t>- Applicability domain: the chemical space where the model is trustworthy.</a:t>
             </a:r>
           </a:p>
-          <a:p>
-            <a:endParaRPr/>
-          </a:p>
-          <a:p>
-            <a:r>
-              <a:t>Q&amp;A — EXPERT:</a:t>
+          <a:p/>
+          <a:p>
+            <a:r>
+              <a:t>Q&amp;A, EXPERT:</a:t>
             </a:r>
           </a:p>
           <a:p>
@@ -2049,15 +2141,13 @@
           </a:p>
           <a:p>
             <a:r>
-              <a:t>A: No — we re-labelled at several cuts and retrained; max AUROC spread was 0.109 and the deployed cut ~ the strict cut (robustness slide). The grey-zone drop is empirically justified.</a:t>
-            </a:r>
-          </a:p>
-          <a:p>
-            <a:endParaRPr/>
-          </a:p>
-          <a:p>
-            <a:r>
-              <a:t>Q&amp;A — GENERAL/COMMERCIAL:</a:t>
+              <a:t>A: No, we re-labelled at several cuts and retrained; max AUROC spread was 0.109 and the deployed cut ~ the strict cut (robustness slide). The grey-zone drop is empirically justified.</a:t>
+            </a:r>
+          </a:p>
+          <a:p/>
+          <a:p>
+            <a:r>
+              <a:t>Q&amp;A, GENERAL/COMMERCIAL:</a:t>
             </a:r>
           </a:p>
           <a:p>
@@ -2067,7 +2157,7 @@
           </a:p>
           <a:p>
             <a:r>
-              <a:t>A: The tool flags it as 'out of domain' instead of pretending confidence — a safety feature, not a bug.</a:t>
+              <a:t>A: The tool flags it as 'out of domain' instead of pretending confidence, a safety feature, not a bug.</a:t>
             </a:r>
           </a:p>
         </p:txBody>
@@ -2079,7 +2169,7 @@
             <a:spLocks noGrp="1"/>
           </p:cNvSpPr>
           <p:nvPr>
-            <p:ph type="sldNum" sz="quarter" idx="5"/>
+            <p:ph type="sldNum" idx="5" sz="quarter"/>
           </p:nvPr>
         </p:nvSpPr>
         <p:spPr/>
@@ -2093,7 +2183,7 @@
 </file>
 
 <file path=ppt/notesSlides/notesSlide8.xml><?xml version="1.0" encoding="utf-8"?>
-<p:notes xmlns:a="http://schemas.openxmlformats.org/drawingml/2006/main" xmlns:r="http://schemas.openxmlformats.org/officeDocument/2006/relationships" xmlns:p="http://schemas.openxmlformats.org/presentationml/2006/main">
+<p:notes xmlns:a="http://schemas.openxmlformats.org/drawingml/2006/main" xmlns:p="http://schemas.openxmlformats.org/presentationml/2006/main" xmlns:r="http://schemas.openxmlformats.org/officeDocument/2006/relationships">
   <p:cSld>
     <p:spTree>
       <p:nvGrpSpPr>
@@ -2113,7 +2203,7 @@
         <p:nvSpPr>
           <p:cNvPr id="2" name="Slide Image Placeholder 1"/>
           <p:cNvSpPr>
-            <a:spLocks noGrp="1" noRot="1" noChangeAspect="1"/>
+            <a:spLocks noGrp="1"/>
           </p:cNvSpPr>
           <p:nvPr>
             <p:ph type="sldImg" idx="2"/>
@@ -2128,7 +2218,7 @@
             <a:spLocks noGrp="1"/>
           </p:cNvSpPr>
           <p:nvPr>
-            <p:ph type="body" sz="quarter" idx="3"/>
+            <p:ph type="body" idx="3" sz="quarter"/>
           </p:nvPr>
         </p:nvSpPr>
         <p:spPr/>
@@ -2137,12 +2227,10 @@
           <a:lstStyle/>
           <a:p>
             <a:r>
-              <a:t>SAY: Anyone can score well on an easy test. We ran four, each closer to real life. The 'random' test is the easy one most papers stop at. The toughest — 'temporal' — trains only on older molecules and tests on the newest ones, simulating genuine prospective use. We report all four on purpose.</a:t>
-            </a:r>
-          </a:p>
-          <a:p>
-            <a:endParaRPr/>
-          </a:p>
+              <a:t>SAY: Anyone can score well on an easy test. We ran four, each closer to real life. The 'random' test is the easy one most papers stop at. The toughest, 'temporal', trains only on older molecules and tests on the newest ones, simulating genuine prospective use. We report all four on purpose.</a:t>
+            </a:r>
+          </a:p>
+          <a:p/>
           <a:p>
             <a:r>
               <a:t>TECHNICAL TERMS:</a:t>
@@ -2168,12 +2256,10 @@
               <a:t>- AUROC (next slide): the score used.</a:t>
             </a:r>
           </a:p>
-          <a:p>
-            <a:endParaRPr/>
-          </a:p>
-          <a:p>
-            <a:r>
-              <a:t>Q&amp;A — EXPERT:</a:t>
+          <a:p/>
+          <a:p>
+            <a:r>
+              <a:t>Q&amp;A, EXPERT:</a:t>
             </a:r>
           </a:p>
           <a:p>
@@ -2186,12 +2272,10 @@
               <a:t>A: 71–91% of recent test compounds have unseen scaffolds (covariate shift). Where the recent set is class-balanced (MAO-A) the honest number is 0.61; we surface this rather than hide it.</a:t>
             </a:r>
           </a:p>
-          <a:p>
-            <a:endParaRPr/>
-          </a:p>
-          <a:p>
-            <a:r>
-              <a:t>Q&amp;A — GENERAL/COMMERCIAL:</a:t>
+          <a:p/>
+          <a:p>
+            <a:r>
+              <a:t>Q&amp;A, GENERAL/COMMERCIAL:</a:t>
             </a:r>
           </a:p>
           <a:p>
@@ -2213,7 +2297,7 @@
             <a:spLocks noGrp="1"/>
           </p:cNvSpPr>
           <p:nvPr>
-            <p:ph type="sldNum" sz="quarter" idx="5"/>
+            <p:ph type="sldNum" idx="5" sz="quarter"/>
           </p:nvPr>
         </p:nvSpPr>
         <p:spPr/>
@@ -2227,7 +2311,7 @@
 </file>
 
 <file path=ppt/notesSlides/notesSlide9.xml><?xml version="1.0" encoding="utf-8"?>
-<p:notes xmlns:a="http://schemas.openxmlformats.org/drawingml/2006/main" xmlns:r="http://schemas.openxmlformats.org/officeDocument/2006/relationships" xmlns:p="http://schemas.openxmlformats.org/presentationml/2006/main">
+<p:notes xmlns:a="http://schemas.openxmlformats.org/drawingml/2006/main" xmlns:p="http://schemas.openxmlformats.org/presentationml/2006/main" xmlns:r="http://schemas.openxmlformats.org/officeDocument/2006/relationships">
   <p:cSld>
     <p:spTree>
       <p:nvGrpSpPr>
@@ -2247,7 +2331,7 @@
         <p:nvSpPr>
           <p:cNvPr id="2" name="Slide Image Placeholder 1"/>
           <p:cNvSpPr>
-            <a:spLocks noGrp="1" noRot="1" noChangeAspect="1"/>
+            <a:spLocks noGrp="1"/>
           </p:cNvSpPr>
           <p:nvPr>
             <p:ph type="sldImg" idx="2"/>
@@ -2262,7 +2346,7 @@
             <a:spLocks noGrp="1"/>
           </p:cNvSpPr>
           <p:nvPr>
-            <p:ph type="body" sz="quarter" idx="3"/>
+            <p:ph type="body" idx="3" sz="quarter"/>
           </p:nvPr>
         </p:nvSpPr>
         <p:spPr/>
@@ -2271,12 +2355,10 @@
           <a:lstStyle/>
           <a:p>
             <a:r>
-              <a:t>SAY: On the standard 'random' test the models score 0.94–0.98 — at or above published state of the art. On the harder tests they hold 0.87–0.95, and on the toughest 'future' test they range 0.61–0.92. We show the low numbers too — GSK-3β and MAO-A are the hardest and we flag them as lower-confidence.</a:t>
-            </a:r>
-          </a:p>
-          <a:p>
-            <a:endParaRPr/>
-          </a:p>
+              <a:t>SAY: On the standard 'random' test the models score 0.94–0.98, at or above published state of the art. On the harder tests they hold 0.87–0.95, and on the toughest 'future' test they range 0.61–0.92. We show the low numbers too, GSK-3β and MAO-A are the hardest and we flag them as lower-confidence.</a:t>
+            </a:r>
+          </a:p>
+          <a:p/>
           <a:p>
             <a:r>
               <a:t>TECHNICAL TERMS:</a:t>
@@ -2289,15 +2371,13 @@
           </a:p>
           <a:p>
             <a:r>
-              <a:t>- 'Coverage 0.885–0.905': when the tool gives a 90% confidence set, it is right about 90% of the time — the promise is kept.</a:t>
-            </a:r>
-          </a:p>
-          <a:p>
-            <a:endParaRPr/>
-          </a:p>
-          <a:p>
-            <a:r>
-              <a:t>Q&amp;A — EXPERT:</a:t>
+              <a:t>- 'Coverage 0.885–0.905': when the tool gives a 90% confidence set, it is right about 90% of the time, the promise is kept.</a:t>
+            </a:r>
+          </a:p>
+          <a:p/>
+          <a:p>
+            <a:r>
+              <a:t>Q&amp;A, EXPERT:</a:t>
             </a:r>
           </a:p>
           <a:p>
@@ -2310,12 +2390,10 @@
               <a:t>A: Its recent test set is ~93% active, which inflates AUROC; we note this. Conversely MAO-A's balanced set gives an honest 0.61.</a:t>
             </a:r>
           </a:p>
-          <a:p>
-            <a:endParaRPr/>
-          </a:p>
-          <a:p>
-            <a:r>
-              <a:t>Q&amp;A — GENERAL/COMMERCIAL:</a:t>
+          <a:p/>
+          <a:p>
+            <a:r>
+              <a:t>Q&amp;A, GENERAL/COMMERCIAL:</a:t>
             </a:r>
           </a:p>
           <a:p>
@@ -2325,7 +2403,7 @@
           </a:p>
           <a:p>
             <a:r>
-              <a:t>A: Yes — for this kind of prediction it's strong; and unlike many tools we also tell you when to trust it.</a:t>
+              <a:t>A: Yes, for this kind of prediction it's strong; and unlike many tools we also tell you when to trust it.</a:t>
             </a:r>
           </a:p>
         </p:txBody>
@@ -2337,7 +2415,7 @@
             <a:spLocks noGrp="1"/>
           </p:cNvSpPr>
           <p:nvPr>
-            <p:ph type="sldNum" sz="quarter" idx="5"/>
+            <p:ph type="sldNum" idx="5" sz="quarter"/>
           </p:nvPr>
         </p:nvSpPr>
         <p:spPr/>
@@ -2388,9 +2466,10 @@
           <a:lstStyle/>
           <a:p>
             <a:r>
-              <a:rPr lang="en-US"/>
+              <a:rPr lang="en-US" smtClean="0"/>
               <a:t>Click to edit Master title style</a:t>
             </a:r>
+            <a:endParaRPr lang="en-US"/>
           </a:p>
         </p:txBody>
       </p:sp>
@@ -2506,9 +2585,10 @@
           </a:lstStyle>
           <a:p>
             <a:r>
-              <a:rPr lang="en-US"/>
+              <a:rPr lang="en-US" smtClean="0"/>
               <a:t>Click to edit Master subtitle style</a:t>
             </a:r>
+            <a:endParaRPr lang="en-US"/>
           </a:p>
         </p:txBody>
       </p:sp>
@@ -2529,7 +2609,7 @@
           <a:p>
             <a:fld id="{5BCAD085-E8A6-8845-BD4E-CB4CCA059FC4}" type="datetimeFigureOut">
               <a:rPr lang="en-US" smtClean="0"/>
-              <a:t>7/18/2026</a:t>
+              <a:t>1/27/13</a:t>
             </a:fld>
             <a:endParaRPr lang="en-US"/>
           </a:p>
@@ -2623,9 +2703,10 @@
           <a:lstStyle/>
           <a:p>
             <a:r>
-              <a:rPr lang="en-US"/>
+              <a:rPr lang="en-US" smtClean="0"/>
               <a:t>Click to edit Master title style</a:t>
             </a:r>
+            <a:endParaRPr lang="en-US"/>
           </a:p>
         </p:txBody>
       </p:sp>
@@ -2646,37 +2727,38 @@
           <a:p>
             <a:pPr lvl="0"/>
             <a:r>
-              <a:rPr lang="en-US"/>
+              <a:rPr lang="en-US" smtClean="0"/>
               <a:t>Click to edit Master text styles</a:t>
             </a:r>
           </a:p>
           <a:p>
             <a:pPr lvl="1"/>
             <a:r>
-              <a:rPr lang="en-US"/>
+              <a:rPr lang="en-US" smtClean="0"/>
               <a:t>Second level</a:t>
             </a:r>
           </a:p>
           <a:p>
             <a:pPr lvl="2"/>
             <a:r>
-              <a:rPr lang="en-US"/>
+              <a:rPr lang="en-US" smtClean="0"/>
               <a:t>Third level</a:t>
             </a:r>
           </a:p>
           <a:p>
             <a:pPr lvl="3"/>
             <a:r>
-              <a:rPr lang="en-US"/>
+              <a:rPr lang="en-US" smtClean="0"/>
               <a:t>Fourth level</a:t>
             </a:r>
           </a:p>
           <a:p>
             <a:pPr lvl="4"/>
             <a:r>
-              <a:rPr lang="en-US"/>
+              <a:rPr lang="en-US" smtClean="0"/>
               <a:t>Fifth level</a:t>
             </a:r>
+            <a:endParaRPr lang="en-US"/>
           </a:p>
         </p:txBody>
       </p:sp>
@@ -2697,7 +2779,7 @@
           <a:p>
             <a:fld id="{5BCAD085-E8A6-8845-BD4E-CB4CCA059FC4}" type="datetimeFigureOut">
               <a:rPr lang="en-US" smtClean="0"/>
-              <a:t>7/18/2026</a:t>
+              <a:t>1/27/13</a:t>
             </a:fld>
             <a:endParaRPr lang="en-US"/>
           </a:p>
@@ -2796,9 +2878,10 @@
           <a:lstStyle/>
           <a:p>
             <a:r>
-              <a:rPr lang="en-US"/>
+              <a:rPr lang="en-US" smtClean="0"/>
               <a:t>Click to edit Master title style</a:t>
             </a:r>
+            <a:endParaRPr lang="en-US"/>
           </a:p>
         </p:txBody>
       </p:sp>
@@ -2824,37 +2907,38 @@
           <a:p>
             <a:pPr lvl="0"/>
             <a:r>
-              <a:rPr lang="en-US"/>
+              <a:rPr lang="en-US" smtClean="0"/>
               <a:t>Click to edit Master text styles</a:t>
             </a:r>
           </a:p>
           <a:p>
             <a:pPr lvl="1"/>
             <a:r>
-              <a:rPr lang="en-US"/>
+              <a:rPr lang="en-US" smtClean="0"/>
               <a:t>Second level</a:t>
             </a:r>
           </a:p>
           <a:p>
             <a:pPr lvl="2"/>
             <a:r>
-              <a:rPr lang="en-US"/>
+              <a:rPr lang="en-US" smtClean="0"/>
               <a:t>Third level</a:t>
             </a:r>
           </a:p>
           <a:p>
             <a:pPr lvl="3"/>
             <a:r>
-              <a:rPr lang="en-US"/>
+              <a:rPr lang="en-US" smtClean="0"/>
               <a:t>Fourth level</a:t>
             </a:r>
           </a:p>
           <a:p>
             <a:pPr lvl="4"/>
             <a:r>
-              <a:rPr lang="en-US"/>
+              <a:rPr lang="en-US" smtClean="0"/>
               <a:t>Fifth level</a:t>
             </a:r>
+            <a:endParaRPr lang="en-US"/>
           </a:p>
         </p:txBody>
       </p:sp>
@@ -2875,7 +2959,7 @@
           <a:p>
             <a:fld id="{5BCAD085-E8A6-8845-BD4E-CB4CCA059FC4}" type="datetimeFigureOut">
               <a:rPr lang="en-US" smtClean="0"/>
-              <a:t>7/18/2026</a:t>
+              <a:t>1/27/13</a:t>
             </a:fld>
             <a:endParaRPr lang="en-US"/>
           </a:p>
@@ -2969,9 +3053,10 @@
           <a:lstStyle/>
           <a:p>
             <a:r>
-              <a:rPr lang="en-US"/>
+              <a:rPr lang="en-US" smtClean="0"/>
               <a:t>Click to edit Master title style</a:t>
             </a:r>
+            <a:endParaRPr lang="en-US"/>
           </a:p>
         </p:txBody>
       </p:sp>
@@ -2992,37 +3077,38 @@
           <a:p>
             <a:pPr lvl="0"/>
             <a:r>
-              <a:rPr lang="en-US"/>
+              <a:rPr lang="en-US" smtClean="0"/>
               <a:t>Click to edit Master text styles</a:t>
             </a:r>
           </a:p>
           <a:p>
             <a:pPr lvl="1"/>
             <a:r>
-              <a:rPr lang="en-US"/>
+              <a:rPr lang="en-US" smtClean="0"/>
               <a:t>Second level</a:t>
             </a:r>
           </a:p>
           <a:p>
             <a:pPr lvl="2"/>
             <a:r>
-              <a:rPr lang="en-US"/>
+              <a:rPr lang="en-US" smtClean="0"/>
               <a:t>Third level</a:t>
             </a:r>
           </a:p>
           <a:p>
             <a:pPr lvl="3"/>
             <a:r>
-              <a:rPr lang="en-US"/>
+              <a:rPr lang="en-US" smtClean="0"/>
               <a:t>Fourth level</a:t>
             </a:r>
           </a:p>
           <a:p>
             <a:pPr lvl="4"/>
             <a:r>
-              <a:rPr lang="en-US"/>
+              <a:rPr lang="en-US" smtClean="0"/>
               <a:t>Fifth level</a:t>
             </a:r>
+            <a:endParaRPr lang="en-US"/>
           </a:p>
         </p:txBody>
       </p:sp>
@@ -3043,7 +3129,7 @@
           <a:p>
             <a:fld id="{5BCAD085-E8A6-8845-BD4E-CB4CCA059FC4}" type="datetimeFigureOut">
               <a:rPr lang="en-US" smtClean="0"/>
-              <a:t>7/18/2026</a:t>
+              <a:t>1/27/13</a:t>
             </a:fld>
             <a:endParaRPr lang="en-US"/>
           </a:p>
@@ -3146,9 +3232,10 @@
           </a:lstStyle>
           <a:p>
             <a:r>
-              <a:rPr lang="en-US"/>
+              <a:rPr lang="en-US" smtClean="0"/>
               <a:t>Click to edit Master title style</a:t>
             </a:r>
+            <a:endParaRPr lang="en-US"/>
           </a:p>
         </p:txBody>
       </p:sp>
@@ -3265,7 +3352,7 @@
           <a:p>
             <a:pPr lvl="0"/>
             <a:r>
-              <a:rPr lang="en-US"/>
+              <a:rPr lang="en-US" smtClean="0"/>
               <a:t>Click to edit Master text styles</a:t>
             </a:r>
           </a:p>
@@ -3288,7 +3375,7 @@
           <a:p>
             <a:fld id="{5BCAD085-E8A6-8845-BD4E-CB4CCA059FC4}" type="datetimeFigureOut">
               <a:rPr lang="en-US" smtClean="0"/>
-              <a:t>7/18/2026</a:t>
+              <a:t>1/27/13</a:t>
             </a:fld>
             <a:endParaRPr lang="en-US"/>
           </a:p>
@@ -3382,9 +3469,10 @@
           <a:lstStyle/>
           <a:p>
             <a:r>
-              <a:rPr lang="en-US"/>
+              <a:rPr lang="en-US" smtClean="0"/>
               <a:t>Click to edit Master title style</a:t>
             </a:r>
+            <a:endParaRPr lang="en-US"/>
           </a:p>
         </p:txBody>
       </p:sp>
@@ -3438,37 +3526,38 @@
           <a:p>
             <a:pPr lvl="0"/>
             <a:r>
-              <a:rPr lang="en-US"/>
+              <a:rPr lang="en-US" smtClean="0"/>
               <a:t>Click to edit Master text styles</a:t>
             </a:r>
           </a:p>
           <a:p>
             <a:pPr lvl="1"/>
             <a:r>
-              <a:rPr lang="en-US"/>
+              <a:rPr lang="en-US" smtClean="0"/>
               <a:t>Second level</a:t>
             </a:r>
           </a:p>
           <a:p>
             <a:pPr lvl="2"/>
             <a:r>
-              <a:rPr lang="en-US"/>
+              <a:rPr lang="en-US" smtClean="0"/>
               <a:t>Third level</a:t>
             </a:r>
           </a:p>
           <a:p>
             <a:pPr lvl="3"/>
             <a:r>
-              <a:rPr lang="en-US"/>
+              <a:rPr lang="en-US" smtClean="0"/>
               <a:t>Fourth level</a:t>
             </a:r>
           </a:p>
           <a:p>
             <a:pPr lvl="4"/>
             <a:r>
-              <a:rPr lang="en-US"/>
+              <a:rPr lang="en-US" smtClean="0"/>
               <a:t>Fifth level</a:t>
             </a:r>
+            <a:endParaRPr lang="en-US"/>
           </a:p>
         </p:txBody>
       </p:sp>
@@ -3522,37 +3611,38 @@
           <a:p>
             <a:pPr lvl="0"/>
             <a:r>
-              <a:rPr lang="en-US"/>
+              <a:rPr lang="en-US" smtClean="0"/>
               <a:t>Click to edit Master text styles</a:t>
             </a:r>
           </a:p>
           <a:p>
             <a:pPr lvl="1"/>
             <a:r>
-              <a:rPr lang="en-US"/>
+              <a:rPr lang="en-US" smtClean="0"/>
               <a:t>Second level</a:t>
             </a:r>
           </a:p>
           <a:p>
             <a:pPr lvl="2"/>
             <a:r>
-              <a:rPr lang="en-US"/>
+              <a:rPr lang="en-US" smtClean="0"/>
               <a:t>Third level</a:t>
             </a:r>
           </a:p>
           <a:p>
             <a:pPr lvl="3"/>
             <a:r>
-              <a:rPr lang="en-US"/>
+              <a:rPr lang="en-US" smtClean="0"/>
               <a:t>Fourth level</a:t>
             </a:r>
           </a:p>
           <a:p>
             <a:pPr lvl="4"/>
             <a:r>
-              <a:rPr lang="en-US"/>
+              <a:rPr lang="en-US" smtClean="0"/>
               <a:t>Fifth level</a:t>
             </a:r>
+            <a:endParaRPr lang="en-US"/>
           </a:p>
         </p:txBody>
       </p:sp>
@@ -3573,7 +3663,7 @@
           <a:p>
             <a:fld id="{5BCAD085-E8A6-8845-BD4E-CB4CCA059FC4}" type="datetimeFigureOut">
               <a:rPr lang="en-US" smtClean="0"/>
-              <a:t>7/18/2026</a:t>
+              <a:t>1/27/13</a:t>
             </a:fld>
             <a:endParaRPr lang="en-US"/>
           </a:p>
@@ -3671,9 +3761,10 @@
           </a:lstStyle>
           <a:p>
             <a:r>
-              <a:rPr lang="en-US"/>
+              <a:rPr lang="en-US" smtClean="0"/>
               <a:t>Click to edit Master title style</a:t>
             </a:r>
+            <a:endParaRPr lang="en-US"/>
           </a:p>
         </p:txBody>
       </p:sp>
@@ -3736,7 +3827,7 @@
           <a:p>
             <a:pPr lvl="0"/>
             <a:r>
-              <a:rPr lang="en-US"/>
+              <a:rPr lang="en-US" smtClean="0"/>
               <a:t>Click to edit Master text styles</a:t>
             </a:r>
           </a:p>
@@ -3792,37 +3883,38 @@
           <a:p>
             <a:pPr lvl="0"/>
             <a:r>
-              <a:rPr lang="en-US"/>
+              <a:rPr lang="en-US" smtClean="0"/>
               <a:t>Click to edit Master text styles</a:t>
             </a:r>
           </a:p>
           <a:p>
             <a:pPr lvl="1"/>
             <a:r>
-              <a:rPr lang="en-US"/>
+              <a:rPr lang="en-US" smtClean="0"/>
               <a:t>Second level</a:t>
             </a:r>
           </a:p>
           <a:p>
             <a:pPr lvl="2"/>
             <a:r>
-              <a:rPr lang="en-US"/>
+              <a:rPr lang="en-US" smtClean="0"/>
               <a:t>Third level</a:t>
             </a:r>
           </a:p>
           <a:p>
             <a:pPr lvl="3"/>
             <a:r>
-              <a:rPr lang="en-US"/>
+              <a:rPr lang="en-US" smtClean="0"/>
               <a:t>Fourth level</a:t>
             </a:r>
           </a:p>
           <a:p>
             <a:pPr lvl="4"/>
             <a:r>
-              <a:rPr lang="en-US"/>
+              <a:rPr lang="en-US" smtClean="0"/>
               <a:t>Fifth level</a:t>
             </a:r>
+            <a:endParaRPr lang="en-US"/>
           </a:p>
         </p:txBody>
       </p:sp>
@@ -3885,7 +3977,7 @@
           <a:p>
             <a:pPr lvl="0"/>
             <a:r>
-              <a:rPr lang="en-US"/>
+              <a:rPr lang="en-US" smtClean="0"/>
               <a:t>Click to edit Master text styles</a:t>
             </a:r>
           </a:p>
@@ -3941,37 +4033,38 @@
           <a:p>
             <a:pPr lvl="0"/>
             <a:r>
-              <a:rPr lang="en-US"/>
+              <a:rPr lang="en-US" smtClean="0"/>
               <a:t>Click to edit Master text styles</a:t>
             </a:r>
           </a:p>
           <a:p>
             <a:pPr lvl="1"/>
             <a:r>
-              <a:rPr lang="en-US"/>
+              <a:rPr lang="en-US" smtClean="0"/>
               <a:t>Second level</a:t>
             </a:r>
           </a:p>
           <a:p>
             <a:pPr lvl="2"/>
             <a:r>
-              <a:rPr lang="en-US"/>
+              <a:rPr lang="en-US" smtClean="0"/>
               <a:t>Third level</a:t>
             </a:r>
           </a:p>
           <a:p>
             <a:pPr lvl="3"/>
             <a:r>
-              <a:rPr lang="en-US"/>
+              <a:rPr lang="en-US" smtClean="0"/>
               <a:t>Fourth level</a:t>
             </a:r>
           </a:p>
           <a:p>
             <a:pPr lvl="4"/>
             <a:r>
-              <a:rPr lang="en-US"/>
+              <a:rPr lang="en-US" smtClean="0"/>
               <a:t>Fifth level</a:t>
             </a:r>
+            <a:endParaRPr lang="en-US"/>
           </a:p>
         </p:txBody>
       </p:sp>
@@ -3992,7 +4085,7 @@
           <a:p>
             <a:fld id="{5BCAD085-E8A6-8845-BD4E-CB4CCA059FC4}" type="datetimeFigureOut">
               <a:rPr lang="en-US" smtClean="0"/>
-              <a:t>7/18/2026</a:t>
+              <a:t>1/27/13</a:t>
             </a:fld>
             <a:endParaRPr lang="en-US"/>
           </a:p>
@@ -4086,9 +4179,10 @@
           <a:lstStyle/>
           <a:p>
             <a:r>
-              <a:rPr lang="en-US"/>
+              <a:rPr lang="en-US" smtClean="0"/>
               <a:t>Click to edit Master title style</a:t>
             </a:r>
+            <a:endParaRPr lang="en-US"/>
           </a:p>
         </p:txBody>
       </p:sp>
@@ -4109,7 +4203,7 @@
           <a:p>
             <a:fld id="{5BCAD085-E8A6-8845-BD4E-CB4CCA059FC4}" type="datetimeFigureOut">
               <a:rPr lang="en-US" smtClean="0"/>
-              <a:t>7/18/2026</a:t>
+              <a:t>1/27/13</a:t>
             </a:fld>
             <a:endParaRPr lang="en-US"/>
           </a:p>
@@ -4204,7 +4298,7 @@
           <a:p>
             <a:fld id="{5BCAD085-E8A6-8845-BD4E-CB4CCA059FC4}" type="datetimeFigureOut">
               <a:rPr lang="en-US" smtClean="0"/>
-              <a:t>7/18/2026</a:t>
+              <a:t>1/27/13</a:t>
             </a:fld>
             <a:endParaRPr lang="en-US"/>
           </a:p>
@@ -4307,9 +4401,10 @@
           </a:lstStyle>
           <a:p>
             <a:r>
-              <a:rPr lang="en-US"/>
+              <a:rPr lang="en-US" smtClean="0"/>
               <a:t>Click to edit Master title style</a:t>
             </a:r>
+            <a:endParaRPr lang="en-US"/>
           </a:p>
         </p:txBody>
       </p:sp>
@@ -4363,37 +4458,38 @@
           <a:p>
             <a:pPr lvl="0"/>
             <a:r>
-              <a:rPr lang="en-US"/>
+              <a:rPr lang="en-US" smtClean="0"/>
               <a:t>Click to edit Master text styles</a:t>
             </a:r>
           </a:p>
           <a:p>
             <a:pPr lvl="1"/>
             <a:r>
-              <a:rPr lang="en-US"/>
+              <a:rPr lang="en-US" smtClean="0"/>
               <a:t>Second level</a:t>
             </a:r>
           </a:p>
           <a:p>
             <a:pPr lvl="2"/>
             <a:r>
-              <a:rPr lang="en-US"/>
+              <a:rPr lang="en-US" smtClean="0"/>
               <a:t>Third level</a:t>
             </a:r>
           </a:p>
           <a:p>
             <a:pPr lvl="3"/>
             <a:r>
-              <a:rPr lang="en-US"/>
+              <a:rPr lang="en-US" smtClean="0"/>
               <a:t>Fourth level</a:t>
             </a:r>
           </a:p>
           <a:p>
             <a:pPr lvl="4"/>
             <a:r>
-              <a:rPr lang="en-US"/>
+              <a:rPr lang="en-US" smtClean="0"/>
               <a:t>Fifth level</a:t>
             </a:r>
+            <a:endParaRPr lang="en-US"/>
           </a:p>
         </p:txBody>
       </p:sp>
@@ -4456,7 +4552,7 @@
           <a:p>
             <a:pPr lvl="0"/>
             <a:r>
-              <a:rPr lang="en-US"/>
+              <a:rPr lang="en-US" smtClean="0"/>
               <a:t>Click to edit Master text styles</a:t>
             </a:r>
           </a:p>
@@ -4479,7 +4575,7 @@
           <a:p>
             <a:fld id="{5BCAD085-E8A6-8845-BD4E-CB4CCA059FC4}" type="datetimeFigureOut">
               <a:rPr lang="en-US" smtClean="0"/>
-              <a:t>7/18/2026</a:t>
+              <a:t>1/27/13</a:t>
             </a:fld>
             <a:endParaRPr lang="en-US"/>
           </a:p>
@@ -4582,9 +4678,10 @@
           </a:lstStyle>
           <a:p>
             <a:r>
-              <a:rPr lang="en-US"/>
+              <a:rPr lang="en-US" smtClean="0"/>
               <a:t>Click to edit Master title style</a:t>
             </a:r>
+            <a:endParaRPr lang="en-US"/>
           </a:p>
         </p:txBody>
       </p:sp>
@@ -4708,7 +4805,7 @@
           <a:p>
             <a:pPr lvl="0"/>
             <a:r>
-              <a:rPr lang="en-US"/>
+              <a:rPr lang="en-US" smtClean="0"/>
               <a:t>Click to edit Master text styles</a:t>
             </a:r>
           </a:p>
@@ -4731,7 +4828,7 @@
           <a:p>
             <a:fld id="{5BCAD085-E8A6-8845-BD4E-CB4CCA059FC4}" type="datetimeFigureOut">
               <a:rPr lang="en-US" smtClean="0"/>
-              <a:t>7/18/2026</a:t>
+              <a:t>1/27/13</a:t>
             </a:fld>
             <a:endParaRPr lang="en-US"/>
           </a:p>
@@ -4840,9 +4937,10 @@
           <a:lstStyle/>
           <a:p>
             <a:r>
-              <a:rPr lang="en-US"/>
+              <a:rPr lang="en-US" smtClean="0"/>
               <a:t>Click to edit Master title style</a:t>
             </a:r>
+            <a:endParaRPr lang="en-US"/>
           </a:p>
         </p:txBody>
       </p:sp>
@@ -4873,37 +4971,38 @@
           <a:p>
             <a:pPr lvl="0"/>
             <a:r>
-              <a:rPr lang="en-US"/>
+              <a:rPr lang="en-US" smtClean="0"/>
               <a:t>Click to edit Master text styles</a:t>
             </a:r>
           </a:p>
           <a:p>
             <a:pPr lvl="1"/>
             <a:r>
-              <a:rPr lang="en-US"/>
+              <a:rPr lang="en-US" smtClean="0"/>
               <a:t>Second level</a:t>
             </a:r>
           </a:p>
           <a:p>
             <a:pPr lvl="2"/>
             <a:r>
-              <a:rPr lang="en-US"/>
+              <a:rPr lang="en-US" smtClean="0"/>
               <a:t>Third level</a:t>
             </a:r>
           </a:p>
           <a:p>
             <a:pPr lvl="3"/>
             <a:r>
-              <a:rPr lang="en-US"/>
+              <a:rPr lang="en-US" smtClean="0"/>
               <a:t>Fourth level</a:t>
             </a:r>
           </a:p>
           <a:p>
             <a:pPr lvl="4"/>
             <a:r>
-              <a:rPr lang="en-US"/>
+              <a:rPr lang="en-US" smtClean="0"/>
               <a:t>Fifth level</a:t>
             </a:r>
+            <a:endParaRPr lang="en-US"/>
           </a:p>
         </p:txBody>
       </p:sp>
@@ -4942,7 +5041,7 @@
           <a:p>
             <a:fld id="{5BCAD085-E8A6-8845-BD4E-CB4CCA059FC4}" type="datetimeFigureOut">
               <a:rPr lang="en-US" smtClean="0"/>
-              <a:t>7/18/2026</a:t>
+              <a:t>1/27/13</a:t>
             </a:fld>
             <a:endParaRPr lang="en-US"/>
           </a:p>
@@ -5301,7 +5400,7 @@
 </file>
 
 <file path=ppt/slides/slide1.xml><?xml version="1.0" encoding="utf-8"?>
-<p:sld xmlns:a="http://schemas.openxmlformats.org/drawingml/2006/main" xmlns:r="http://schemas.openxmlformats.org/officeDocument/2006/relationships" xmlns:p="http://schemas.openxmlformats.org/presentationml/2006/main">
+<p:sld xmlns:a="http://schemas.openxmlformats.org/drawingml/2006/main" xmlns:p="http://schemas.openxmlformats.org/presentationml/2006/main" xmlns:r="http://schemas.openxmlformats.org/officeDocument/2006/relationships">
   <p:cSld>
     <p:bg>
       <p:bgPr>
@@ -5317,14 +5416,7 @@
         <p:cNvGrpSpPr/>
         <p:nvPr/>
       </p:nvGrpSpPr>
-      <p:grpSpPr>
-        <a:xfrm>
-          <a:off x="0" y="0"/>
-          <a:ext cx="0" cy="0"/>
-          <a:chOff x="0" y="0"/>
-          <a:chExt cx="0" cy="0"/>
-        </a:xfrm>
-      </p:grpSpPr>
+      <p:grpSpPr/>
       <p:sp>
         <p:nvSpPr>
           <p:cNvPr id="2" name="Rectangle 1"/>
@@ -5366,7 +5458,6 @@
           <a:lstStyle/>
           <a:p>
             <a:pPr algn="ctr"/>
-            <a:endParaRPr/>
           </a:p>
         </p:txBody>
       </p:sp>
@@ -5497,7 +5588,7 @@
                 </a:solidFill>
                 <a:latin typeface="Georgia"/>
               </a:rPr>
-              <a:t>Predicting a molecule's effect on the brain —</a:t>
+              <a:t>Predicting a molecule's effect on the brain</a:t>
             </a:r>
           </a:p>
           <a:p>
@@ -5558,7 +5649,7 @@
                 </a:solidFill>
                 <a:latin typeface="Calibri"/>
               </a:rPr>
-              <a:t>An evidence-grounded, calibrated, safety-aware predictor of central-nervous-system activity — built entirely on measured laboratory data, not guesswork.</a:t>
+              <a:t>An evidence-grounded, calibrated, safety-aware predictor of central-nervous-system activity, built entirely on measured laboratory data, not guesswork.</a:t>
             </a:r>
           </a:p>
         </p:txBody>
@@ -5614,7 +5705,7 @@
 </file>
 
 <file path=ppt/slides/slide10.xml><?xml version="1.0" encoding="utf-8"?>
-<p:sld xmlns:a="http://schemas.openxmlformats.org/drawingml/2006/main" xmlns:r="http://schemas.openxmlformats.org/officeDocument/2006/relationships" xmlns:p="http://schemas.openxmlformats.org/presentationml/2006/main">
+<p:sld xmlns:a="http://schemas.openxmlformats.org/drawingml/2006/main" xmlns:p="http://schemas.openxmlformats.org/presentationml/2006/main" xmlns:r="http://schemas.openxmlformats.org/officeDocument/2006/relationships">
   <p:cSld>
     <p:bg>
       <p:bgPr>
@@ -5630,14 +5721,7 @@
         <p:cNvGrpSpPr/>
         <p:nvPr/>
       </p:nvGrpSpPr>
-      <p:grpSpPr>
-        <a:xfrm>
-          <a:off x="0" y="0"/>
-          <a:ext cx="0" cy="0"/>
-          <a:chOff x="0" y="0"/>
-          <a:chExt cx="0" cy="0"/>
-        </a:xfrm>
-      </p:grpSpPr>
+      <p:grpSpPr/>
       <p:sp>
         <p:nvSpPr>
           <p:cNvPr id="2" name="TextBox 1"/>
@@ -5646,7 +5730,7 @@
         </p:nvSpPr>
         <p:spPr>
           <a:xfrm>
-            <a:off x="753160" y="691382"/>
+            <a:off x="822960" y="502920"/>
             <a:ext cx="10515600" cy="365760"/>
           </a:xfrm>
           <a:prstGeom prst="rect">
@@ -5669,13 +5753,13 @@
               </a:spcAft>
             </a:pPr>
             <a:r>
-              <a:rPr sz="1200" b="1" i="0" dirty="0">
+              <a:rPr sz="1200" b="1" i="0">
                 <a:solidFill>
                   <a:srgbClr val="0072B2"/>
                 </a:solidFill>
                 <a:latin typeface="Consolas"/>
               </a:rPr>
-              <a:t>09 · RESULTS — STRENGTH &amp; DRUG-LIKENESS</a:t>
+              <a:t>09 · RESULTS, STRENGTH &amp; DRUG-LIKENESS</a:t>
             </a:r>
           </a:p>
         </p:txBody>
@@ -5721,7 +5805,6 @@
           <a:lstStyle/>
           <a:p>
             <a:pPr algn="ctr"/>
-            <a:endParaRPr/>
           </a:p>
         </p:txBody>
       </p:sp>
@@ -5786,39 +5869,15 @@
                 <a:tableStyleId>{5C22544A-7EE6-4342-B048-85BDC9FD1C3A}</a:tableStyleId>
               </a:tblPr>
               <a:tblGrid>
-                <a:gridCol w="1744393">
-                  <a:extLst>
-                    <a:ext uri="{9D8B030D-6E8A-4147-A177-3AD203B41FA5}">
-                      <a16:colId xmlns:a16="http://schemas.microsoft.com/office/drawing/2014/main" val="20000"/>
-                    </a:ext>
-                  </a:extLst>
-                </a:gridCol>
-                <a:gridCol w="1308295">
-                  <a:extLst>
-                    <a:ext uri="{9D8B030D-6E8A-4147-A177-3AD203B41FA5}">
-                      <a16:colId xmlns:a16="http://schemas.microsoft.com/office/drawing/2014/main" val="20001"/>
-                    </a:ext>
-                  </a:extLst>
-                </a:gridCol>
-                <a:gridCol w="1308295">
-                  <a:extLst>
-                    <a:ext uri="{9D8B030D-6E8A-4147-A177-3AD203B41FA5}">
-                      <a16:colId xmlns:a16="http://schemas.microsoft.com/office/drawing/2014/main" val="20002"/>
-                    </a:ext>
-                  </a:extLst>
-                </a:gridCol>
-                <a:gridCol w="1308295">
-                  <a:extLst>
-                    <a:ext uri="{9D8B030D-6E8A-4147-A177-3AD203B41FA5}">
-                      <a16:colId xmlns:a16="http://schemas.microsoft.com/office/drawing/2014/main" val="20003"/>
-                    </a:ext>
-                  </a:extLst>
-                </a:gridCol>
+                <a:gridCol w="1744393"/>
+                <a:gridCol w="1308295"/>
+                <a:gridCol w="1308295"/>
+                <a:gridCol w="1308295"/>
               </a:tblGrid>
               <a:tr h="365760">
                 <a:tc>
                   <a:txBody>
-                    <a:bodyPr/>
+                    <a:bodyPr wrap="square"/>
                     <a:lstStyle/>
                     <a:p>
                       <a:pPr algn="l"/>
@@ -5841,7 +5900,7 @@
                 </a:tc>
                 <a:tc>
                   <a:txBody>
-                    <a:bodyPr/>
+                    <a:bodyPr wrap="square"/>
                     <a:lstStyle/>
                     <a:p>
                       <a:pPr algn="ctr"/>
@@ -5864,7 +5923,7 @@
                 </a:tc>
                 <a:tc>
                   <a:txBody>
-                    <a:bodyPr/>
+                    <a:bodyPr wrap="square"/>
                     <a:lstStyle/>
                     <a:p>
                       <a:pPr algn="ctr"/>
@@ -5887,7 +5946,7 @@
                 </a:tc>
                 <a:tc>
                   <a:txBody>
-                    <a:bodyPr/>
+                    <a:bodyPr wrap="square"/>
                     <a:lstStyle/>
                     <a:p>
                       <a:pPr algn="ctr"/>
@@ -5908,16 +5967,11 @@
                     </a:solidFill>
                   </a:tcPr>
                 </a:tc>
-                <a:extLst>
-                  <a:ext uri="{0D108BD9-81ED-4DB2-BD59-A6C34878D82A}">
-                    <a16:rowId xmlns:a16="http://schemas.microsoft.com/office/drawing/2014/main" val="10000"/>
-                  </a:ext>
-                </a:extLst>
               </a:tr>
               <a:tr h="365760">
                 <a:tc>
                   <a:txBody>
-                    <a:bodyPr/>
+                    <a:bodyPr wrap="square"/>
                     <a:lstStyle/>
                     <a:p>
                       <a:pPr algn="l"/>
@@ -5940,7 +5994,7 @@
                 </a:tc>
                 <a:tc>
                   <a:txBody>
-                    <a:bodyPr/>
+                    <a:bodyPr wrap="square"/>
                     <a:lstStyle/>
                     <a:p>
                       <a:pPr algn="ctr"/>
@@ -5963,7 +6017,7 @@
                 </a:tc>
                 <a:tc>
                   <a:txBody>
-                    <a:bodyPr/>
+                    <a:bodyPr wrap="square"/>
                     <a:lstStyle/>
                     <a:p>
                       <a:pPr algn="ctr"/>
@@ -5986,7 +6040,7 @@
                 </a:tc>
                 <a:tc>
                   <a:txBody>
-                    <a:bodyPr/>
+                    <a:bodyPr wrap="square"/>
                     <a:lstStyle/>
                     <a:p>
                       <a:pPr algn="ctr"/>
@@ -6007,16 +6061,11 @@
                     </a:solidFill>
                   </a:tcPr>
                 </a:tc>
-                <a:extLst>
-                  <a:ext uri="{0D108BD9-81ED-4DB2-BD59-A6C34878D82A}">
-                    <a16:rowId xmlns:a16="http://schemas.microsoft.com/office/drawing/2014/main" val="10001"/>
-                  </a:ext>
-                </a:extLst>
               </a:tr>
               <a:tr h="365760">
                 <a:tc>
                   <a:txBody>
-                    <a:bodyPr/>
+                    <a:bodyPr wrap="square"/>
                     <a:lstStyle/>
                     <a:p>
                       <a:pPr algn="l"/>
@@ -6039,7 +6088,7 @@
                 </a:tc>
                 <a:tc>
                   <a:txBody>
-                    <a:bodyPr/>
+                    <a:bodyPr wrap="square"/>
                     <a:lstStyle/>
                     <a:p>
                       <a:pPr algn="ctr"/>
@@ -6062,7 +6111,7 @@
                 </a:tc>
                 <a:tc>
                   <a:txBody>
-                    <a:bodyPr/>
+                    <a:bodyPr wrap="square"/>
                     <a:lstStyle/>
                     <a:p>
                       <a:pPr algn="ctr"/>
@@ -6085,7 +6134,7 @@
                 </a:tc>
                 <a:tc>
                   <a:txBody>
-                    <a:bodyPr/>
+                    <a:bodyPr wrap="square"/>
                     <a:lstStyle/>
                     <a:p>
                       <a:pPr algn="ctr"/>
@@ -6106,16 +6155,11 @@
                     </a:solidFill>
                   </a:tcPr>
                 </a:tc>
-                <a:extLst>
-                  <a:ext uri="{0D108BD9-81ED-4DB2-BD59-A6C34878D82A}">
-                    <a16:rowId xmlns:a16="http://schemas.microsoft.com/office/drawing/2014/main" val="10002"/>
-                  </a:ext>
-                </a:extLst>
               </a:tr>
               <a:tr h="365760">
                 <a:tc>
                   <a:txBody>
-                    <a:bodyPr/>
+                    <a:bodyPr wrap="square"/>
                     <a:lstStyle/>
                     <a:p>
                       <a:pPr algn="l"/>
@@ -6138,7 +6182,7 @@
                 </a:tc>
                 <a:tc>
                   <a:txBody>
-                    <a:bodyPr/>
+                    <a:bodyPr wrap="square"/>
                     <a:lstStyle/>
                     <a:p>
                       <a:pPr algn="ctr"/>
@@ -6161,7 +6205,7 @@
                 </a:tc>
                 <a:tc>
                   <a:txBody>
-                    <a:bodyPr/>
+                    <a:bodyPr wrap="square"/>
                     <a:lstStyle/>
                     <a:p>
                       <a:pPr algn="ctr"/>
@@ -6184,7 +6228,7 @@
                 </a:tc>
                 <a:tc>
                   <a:txBody>
-                    <a:bodyPr/>
+                    <a:bodyPr wrap="square"/>
                     <a:lstStyle/>
                     <a:p>
                       <a:pPr algn="ctr"/>
@@ -6205,16 +6249,11 @@
                     </a:solidFill>
                   </a:tcPr>
                 </a:tc>
-                <a:extLst>
-                  <a:ext uri="{0D108BD9-81ED-4DB2-BD59-A6C34878D82A}">
-                    <a16:rowId xmlns:a16="http://schemas.microsoft.com/office/drawing/2014/main" val="10003"/>
-                  </a:ext>
-                </a:extLst>
               </a:tr>
               <a:tr h="365760">
                 <a:tc>
                   <a:txBody>
-                    <a:bodyPr/>
+                    <a:bodyPr wrap="square"/>
                     <a:lstStyle/>
                     <a:p>
                       <a:pPr algn="l"/>
@@ -6237,7 +6276,7 @@
                 </a:tc>
                 <a:tc>
                   <a:txBody>
-                    <a:bodyPr/>
+                    <a:bodyPr wrap="square"/>
                     <a:lstStyle/>
                     <a:p>
                       <a:pPr algn="ctr"/>
@@ -6260,7 +6299,7 @@
                 </a:tc>
                 <a:tc>
                   <a:txBody>
-                    <a:bodyPr/>
+                    <a:bodyPr wrap="square"/>
                     <a:lstStyle/>
                     <a:p>
                       <a:pPr algn="ctr"/>
@@ -6283,7 +6322,7 @@
                 </a:tc>
                 <a:tc>
                   <a:txBody>
-                    <a:bodyPr/>
+                    <a:bodyPr wrap="square"/>
                     <a:lstStyle/>
                     <a:p>
                       <a:pPr algn="ctr"/>
@@ -6304,11 +6343,6 @@
                     </a:solidFill>
                   </a:tcPr>
                 </a:tc>
-                <a:extLst>
-                  <a:ext uri="{0D108BD9-81ED-4DB2-BD59-A6C34878D82A}">
-                    <a16:rowId xmlns:a16="http://schemas.microsoft.com/office/drawing/2014/main" val="10004"/>
-                  </a:ext>
-                </a:extLst>
               </a:tr>
             </a:tbl>
           </a:graphicData>
@@ -6359,7 +6393,6 @@
           <a:lstStyle/>
           <a:p>
             <a:pPr algn="ctr"/>
-            <a:endParaRPr/>
           </a:p>
         </p:txBody>
       </p:sp>
@@ -6404,7 +6437,6 @@
           <a:lstStyle/>
           <a:p>
             <a:pPr algn="ctr"/>
-            <a:endParaRPr/>
           </a:p>
         </p:txBody>
       </p:sp>
@@ -6522,7 +6554,7 @@
                 </a:solidFill>
                 <a:latin typeface="Calibri"/>
               </a:rPr>
-              <a:t>Druggability score — CNS drugs vs polar non-drugs</a:t>
+              <a:t>Druggability score, CNS drugs vs polar non-drugs</a:t>
             </a:r>
           </a:p>
         </p:txBody>
@@ -6610,7 +6642,6 @@
           <a:lstStyle/>
           <a:p>
             <a:pPr algn="ctr"/>
-            <a:endParaRPr/>
           </a:p>
         </p:txBody>
       </p:sp>
@@ -6655,7 +6686,6 @@
           <a:lstStyle/>
           <a:p>
             <a:pPr algn="ctr"/>
-            <a:endParaRPr/>
           </a:p>
         </p:txBody>
       </p:sp>
@@ -6784,7 +6814,6 @@
           <a:lstStyle/>
           <a:p>
             <a:pPr algn="ctr"/>
-            <a:endParaRPr/>
           </a:p>
         </p:txBody>
       </p:sp>
@@ -6829,7 +6858,6 @@
           <a:lstStyle/>
           <a:p>
             <a:pPr algn="ctr"/>
-            <a:endParaRPr/>
           </a:p>
         </p:txBody>
       </p:sp>
@@ -6958,7 +6986,6 @@
           <a:lstStyle/>
           <a:p>
             <a:pPr algn="ctr"/>
-            <a:endParaRPr/>
           </a:p>
         </p:txBody>
       </p:sp>
@@ -7003,7 +7030,6 @@
           <a:lstStyle/>
           <a:p>
             <a:pPr algn="ctr"/>
-            <a:endParaRPr/>
           </a:p>
         </p:txBody>
       </p:sp>
@@ -7132,7 +7158,6 @@
           <a:lstStyle/>
           <a:p>
             <a:pPr algn="ctr"/>
-            <a:endParaRPr/>
           </a:p>
         </p:txBody>
       </p:sp>
@@ -7177,7 +7202,6 @@
           <a:lstStyle/>
           <a:p>
             <a:pPr algn="ctr"/>
-            <a:endParaRPr/>
           </a:p>
         </p:txBody>
       </p:sp>
@@ -7266,7 +7290,6 @@
           <a:lstStyle/>
           <a:p>
             <a:pPr algn="ctr"/>
-            <a:endParaRPr/>
           </a:p>
         </p:txBody>
       </p:sp>
@@ -7311,7 +7334,6 @@
           <a:lstStyle/>
           <a:p>
             <a:pPr algn="ctr"/>
-            <a:endParaRPr/>
           </a:p>
         </p:txBody>
       </p:sp>
@@ -7358,7 +7380,7 @@
                 </a:solidFill>
                 <a:latin typeface="Calibri"/>
               </a:rPr>
-              <a:t>R² and Spearman measure how closely predicted strength tracks the real measured strength (1.0 = perfect ordering). For druggability, higher = more drug-like for the brain — caffeine and donepezil score high; table sugar and a cholesterol drug (not brain-aimed) score low, as expected.</a:t>
+              <a:t>R² and Spearman measure how closely predicted strength tracks the real measured strength (1.0 = perfect ordering). For druggability, higher = more drug-like for the brain, caffeine and donepezil score high; table sugar and a cholesterol drug (not brain-aimed) score low, as expected.</a:t>
             </a:r>
           </a:p>
         </p:txBody>
@@ -7372,7 +7394,7 @@
 </file>
 
 <file path=ppt/slides/slide11.xml><?xml version="1.0" encoding="utf-8"?>
-<p:sld xmlns:a="http://schemas.openxmlformats.org/drawingml/2006/main" xmlns:r="http://schemas.openxmlformats.org/officeDocument/2006/relationships" xmlns:p="http://schemas.openxmlformats.org/presentationml/2006/main">
+<p:sld xmlns:a="http://schemas.openxmlformats.org/drawingml/2006/main" xmlns:p="http://schemas.openxmlformats.org/presentationml/2006/main" xmlns:r="http://schemas.openxmlformats.org/officeDocument/2006/relationships">
   <p:cSld>
     <p:bg>
       <p:bgPr>
@@ -7388,14 +7410,7 @@
         <p:cNvGrpSpPr/>
         <p:nvPr/>
       </p:nvGrpSpPr>
-      <p:grpSpPr>
-        <a:xfrm>
-          <a:off x="0" y="0"/>
-          <a:ext cx="0" cy="0"/>
-          <a:chOff x="0" y="0"/>
-          <a:chExt cx="0" cy="0"/>
-        </a:xfrm>
-      </p:grpSpPr>
+      <p:grpSpPr/>
       <p:sp>
         <p:nvSpPr>
           <p:cNvPr id="2" name="TextBox 1"/>
@@ -7404,7 +7419,7 @@
         </p:nvSpPr>
         <p:spPr>
           <a:xfrm>
-            <a:off x="732220" y="593660"/>
+            <a:off x="822960" y="502920"/>
             <a:ext cx="10515600" cy="365760"/>
           </a:xfrm>
           <a:prstGeom prst="rect">
@@ -7427,7 +7442,7 @@
               </a:spcAft>
             </a:pPr>
             <a:r>
-              <a:rPr sz="1200" b="1" i="0" dirty="0">
+              <a:rPr sz="1200" b="1" i="0">
                 <a:solidFill>
                   <a:srgbClr val="56B4E9"/>
                 </a:solidFill>
@@ -7479,7 +7494,6 @@
           <a:lstStyle/>
           <a:p>
             <a:pPr algn="ctr"/>
-            <a:endParaRPr/>
           </a:p>
         </p:txBody>
       </p:sp>
@@ -7514,7 +7528,7 @@
               </a:spcAft>
             </a:pPr>
             <a:r>
-              <a:rPr sz="3300" b="1" i="0" dirty="0">
+              <a:rPr sz="3300" b="1" i="0">
                 <a:solidFill>
                   <a:srgbClr val="FFFFFF"/>
                 </a:solidFill>
@@ -7650,7 +7664,6 @@
           <a:lstStyle/>
           <a:p>
             <a:pPr algn="ctr"/>
-            <a:endParaRPr/>
           </a:p>
         </p:txBody>
       </p:sp>
@@ -7695,7 +7708,6 @@
           <a:lstStyle/>
           <a:p>
             <a:pPr algn="ctr"/>
-            <a:endParaRPr/>
           </a:p>
         </p:txBody>
       </p:sp>
@@ -7824,7 +7836,6 @@
           <a:lstStyle/>
           <a:p>
             <a:pPr algn="ctr"/>
-            <a:endParaRPr/>
           </a:p>
         </p:txBody>
       </p:sp>
@@ -7869,7 +7880,6 @@
           <a:lstStyle/>
           <a:p>
             <a:pPr algn="ctr"/>
-            <a:endParaRPr/>
           </a:p>
         </p:txBody>
       </p:sp>
@@ -7998,7 +8008,6 @@
           <a:lstStyle/>
           <a:p>
             <a:pPr algn="ctr"/>
-            <a:endParaRPr/>
           </a:p>
         </p:txBody>
       </p:sp>
@@ -8043,7 +8052,6 @@
           <a:lstStyle/>
           <a:p>
             <a:pPr algn="ctr"/>
-            <a:endParaRPr/>
           </a:p>
         </p:txBody>
       </p:sp>
@@ -8189,7 +8197,7 @@
                 </a:solidFill>
                 <a:latin typeface="Calibri"/>
               </a:rPr>
-              <a:t>Beating a pure 'look up the most similar molecule' method is the key check that it has learned real structure–activity patterns — not just memorised look-alikes. This is also why it behaves differently from an LLM (next).</a:t>
+              <a:t>Beating a pure 'look up the most similar molecule' method is the key check that it has learned real structure–activity patterns, not just memorised look-alikes. This is also why it behaves differently from an LLM (next).</a:t>
             </a:r>
           </a:p>
         </p:txBody>
@@ -8203,7 +8211,7 @@
 </file>
 
 <file path=ppt/slides/slide12.xml><?xml version="1.0" encoding="utf-8"?>
-<p:sld xmlns:a="http://schemas.openxmlformats.org/drawingml/2006/main" xmlns:r="http://schemas.openxmlformats.org/officeDocument/2006/relationships" xmlns:p="http://schemas.openxmlformats.org/presentationml/2006/main">
+<p:sld xmlns:a="http://schemas.openxmlformats.org/drawingml/2006/main" xmlns:p="http://schemas.openxmlformats.org/presentationml/2006/main" xmlns:r="http://schemas.openxmlformats.org/officeDocument/2006/relationships">
   <p:cSld>
     <p:bg>
       <p:bgPr>
@@ -8219,14 +8227,7 @@
         <p:cNvGrpSpPr/>
         <p:nvPr/>
       </p:nvGrpSpPr>
-      <p:grpSpPr>
-        <a:xfrm>
-          <a:off x="0" y="0"/>
-          <a:ext cx="0" cy="0"/>
-          <a:chOff x="0" y="0"/>
-          <a:chExt cx="0" cy="0"/>
-        </a:xfrm>
-      </p:grpSpPr>
+      <p:grpSpPr/>
       <p:sp>
         <p:nvSpPr>
           <p:cNvPr id="2" name="TextBox 1"/>
@@ -8235,7 +8236,7 @@
         </p:nvSpPr>
         <p:spPr>
           <a:xfrm>
-            <a:off x="753160" y="663461"/>
+            <a:off x="822960" y="502920"/>
             <a:ext cx="10515600" cy="365760"/>
           </a:xfrm>
           <a:prstGeom prst="rect">
@@ -8258,7 +8259,7 @@
               </a:spcAft>
             </a:pPr>
             <a:r>
-              <a:rPr sz="1200" b="1" i="0" dirty="0">
+              <a:rPr sz="1200" b="1" i="0">
                 <a:solidFill>
                   <a:srgbClr val="0072B2"/>
                 </a:solidFill>
@@ -8310,7 +8311,6 @@
           <a:lstStyle/>
           <a:p>
             <a:pPr algn="ctr"/>
-            <a:endParaRPr/>
           </a:p>
         </p:txBody>
       </p:sp>
@@ -8351,7 +8351,7 @@
                 </a:solidFill>
                 <a:latin typeface="Georgia"/>
               </a:rPr>
-              <a:t>Three known risks — measured, not just mentioned</a:t>
+              <a:t>Three known risks, measured, not just mentioned</a:t>
             </a:r>
           </a:p>
         </p:txBody>
@@ -8401,7 +8401,6 @@
           <a:lstStyle/>
           <a:p>
             <a:pPr algn="ctr"/>
-            <a:endParaRPr/>
           </a:p>
         </p:txBody>
       </p:sp>
@@ -8446,7 +8445,6 @@
           <a:lstStyle/>
           <a:p>
             <a:pPr algn="ctr"/>
-            <a:endParaRPr/>
           </a:p>
         </p:txBody>
       </p:sp>
@@ -8556,7 +8554,6 @@
           <a:lstStyle/>
           <a:p>
             <a:pPr algn="ctr"/>
-            <a:endParaRPr/>
           </a:p>
         </p:txBody>
       </p:sp>
@@ -8601,7 +8598,6 @@
           <a:lstStyle/>
           <a:p>
             <a:pPr algn="ctr"/>
-            <a:endParaRPr/>
           </a:p>
         </p:txBody>
       </p:sp>
@@ -8661,7 +8657,7 @@
                 </a:solidFill>
                 <a:latin typeface="Calibri"/>
               </a:rPr>
-              <a:t>Retraining on one experiment type only vs the mix changed scores by ≤ 0.006 — mixing is safe on the common scale.</a:t>
+              <a:t>Retraining on one experiment type only vs the mix changed scores by ≤ 0.006, mixing is safe on the common scale.</a:t>
             </a:r>
           </a:p>
         </p:txBody>
@@ -8711,7 +8707,6 @@
           <a:lstStyle/>
           <a:p>
             <a:pPr algn="ctr"/>
-            <a:endParaRPr/>
           </a:p>
         </p:txBody>
       </p:sp>
@@ -8756,7 +8751,6 @@
           <a:lstStyle/>
           <a:p>
             <a:pPr algn="ctr"/>
-            <a:endParaRPr/>
           </a:p>
         </p:txBody>
       </p:sp>
@@ -8864,7 +8858,6 @@
           <a:lstStyle/>
           <a:p>
             <a:pPr algn="ctr"/>
-            <a:endParaRPr/>
           </a:p>
         </p:txBody>
       </p:sp>
@@ -8909,7 +8902,6 @@
           <a:lstStyle/>
           <a:p>
             <a:pPr algn="ctr"/>
-            <a:endParaRPr/>
           </a:p>
         </p:txBody>
       </p:sp>
@@ -8956,7 +8948,7 @@
                 </a:solidFill>
                 <a:latin typeface="Calibri"/>
               </a:rPr>
-              <a:t>instead of just listing caveats, we re-ran the whole pipeline to put a number on each risk. All three came back reassuring — and where the model is weak (very novel molecules), it warns you rather than guessing confidently.</a:t>
+              <a:t>instead of just listing caveats, we re-ran the whole pipeline to put a number on each risk. All three came back reassuring, and where the model is weak (very novel molecules), it warns you rather than guessing confidently.</a:t>
             </a:r>
           </a:p>
         </p:txBody>
@@ -8970,7 +8962,7 @@
 </file>
 
 <file path=ppt/slides/slide13.xml><?xml version="1.0" encoding="utf-8"?>
-<p:sld xmlns:a="http://schemas.openxmlformats.org/drawingml/2006/main" xmlns:r="http://schemas.openxmlformats.org/officeDocument/2006/relationships" xmlns:p="http://schemas.openxmlformats.org/presentationml/2006/main">
+<p:sld xmlns:a="http://schemas.openxmlformats.org/drawingml/2006/main" xmlns:p="http://schemas.openxmlformats.org/presentationml/2006/main" xmlns:r="http://schemas.openxmlformats.org/officeDocument/2006/relationships">
   <p:cSld>
     <p:bg>
       <p:bgPr>
@@ -8986,14 +8978,7 @@
         <p:cNvGrpSpPr/>
         <p:nvPr/>
       </p:nvGrpSpPr>
-      <p:grpSpPr>
-        <a:xfrm>
-          <a:off x="0" y="0"/>
-          <a:ext cx="0" cy="0"/>
-          <a:chOff x="0" y="0"/>
-          <a:chExt cx="0" cy="0"/>
-        </a:xfrm>
-      </p:grpSpPr>
+      <p:grpSpPr/>
       <p:sp>
         <p:nvSpPr>
           <p:cNvPr id="2" name="TextBox 1"/>
@@ -9002,7 +8987,7 @@
         </p:nvSpPr>
         <p:spPr>
           <a:xfrm>
-            <a:off x="760139" y="656481"/>
+            <a:off x="822960" y="502920"/>
             <a:ext cx="10515600" cy="365760"/>
           </a:xfrm>
           <a:prstGeom prst="rect">
@@ -9025,7 +9010,7 @@
               </a:spcAft>
             </a:pPr>
             <a:r>
-              <a:rPr sz="1200" b="1" i="0" dirty="0">
+              <a:rPr sz="1200" b="1" i="0">
                 <a:solidFill>
                   <a:srgbClr val="56B4E9"/>
                 </a:solidFill>
@@ -9077,7 +9062,6 @@
           <a:lstStyle/>
           <a:p>
             <a:pPr algn="ctr"/>
-            <a:endParaRPr/>
           </a:p>
         </p:txBody>
       </p:sp>
@@ -9090,7 +9074,7 @@
         <p:spPr>
           <a:xfrm>
             <a:off x="822960" y="868680"/>
-            <a:ext cx="10515600" cy="1107996"/>
+            <a:ext cx="10515600" cy="1188720"/>
           </a:xfrm>
           <a:prstGeom prst="rect">
             <a:avLst/>
@@ -9112,31 +9096,13 @@
               </a:spcAft>
             </a:pPr>
             <a:r>
-              <a:rPr sz="3300" b="1" i="0" dirty="0">
+              <a:rPr sz="3300" b="1" i="0">
                 <a:solidFill>
                   <a:srgbClr val="FFFFFF"/>
                 </a:solidFill>
                 <a:latin typeface="Georgia"/>
               </a:rPr>
-              <a:t>We ran a fair, pre-registered contest</a:t>
-            </a:r>
-            <a:r>
-              <a:rPr lang="en-US" sz="3300" b="1" dirty="0">
-                <a:solidFill>
-                  <a:srgbClr val="FFFFFF"/>
-                </a:solidFill>
-                <a:latin typeface="Georgia"/>
-              </a:rPr>
-              <a:t>,</a:t>
-            </a:r>
-            <a:r>
-              <a:rPr sz="3300" b="1" i="0" dirty="0">
-                <a:solidFill>
-                  <a:srgbClr val="FFFFFF"/>
-                </a:solidFill>
-                <a:latin typeface="Georgia"/>
-              </a:rPr>
-              <a:t> here's what happened</a:t>
+              <a:t>We ran a fair, pre-registered contest, here's what happened</a:t>
             </a:r>
           </a:p>
         </p:txBody>
@@ -9147,16 +9113,10 @@
           <p:cNvGraphicFramePr>
             <a:graphicFrameLocks noGrp="1"/>
           </p:cNvGraphicFramePr>
-          <p:nvPr>
-            <p:extLst>
-              <p:ext uri="{D42A27DB-BD31-4B8C-83A1-F6EECF244321}">
-                <p14:modId xmlns:p14="http://schemas.microsoft.com/office/powerpoint/2010/main" val="1658282364"/>
-              </p:ext>
-            </p:extLst>
-          </p:nvPr>
+          <p:nvPr/>
         </p:nvGraphicFramePr>
         <p:xfrm>
-          <a:off x="822262" y="2162556"/>
+          <a:off x="822960" y="1828800"/>
           <a:ext cx="6949436" cy="2194560"/>
         </p:xfrm>
         <a:graphic>
@@ -9166,46 +9126,16 @@
                 <a:tableStyleId>{5C22544A-7EE6-4342-B048-85BDC9FD1C3A}</a:tableStyleId>
               </a:tblPr>
               <a:tblGrid>
-                <a:gridCol w="1845944">
-                  <a:extLst>
-                    <a:ext uri="{9D8B030D-6E8A-4147-A177-3AD203B41FA5}">
-                      <a16:colId xmlns:a16="http://schemas.microsoft.com/office/drawing/2014/main" val="20000"/>
-                    </a:ext>
-                  </a:extLst>
-                </a:gridCol>
-                <a:gridCol w="977264">
-                  <a:extLst>
-                    <a:ext uri="{9D8B030D-6E8A-4147-A177-3AD203B41FA5}">
-                      <a16:colId xmlns:a16="http://schemas.microsoft.com/office/drawing/2014/main" val="20001"/>
-                    </a:ext>
-                  </a:extLst>
-                </a:gridCol>
-                <a:gridCol w="977264">
-                  <a:extLst>
-                    <a:ext uri="{9D8B030D-6E8A-4147-A177-3AD203B41FA5}">
-                      <a16:colId xmlns:a16="http://schemas.microsoft.com/office/drawing/2014/main" val="20002"/>
-                    </a:ext>
-                  </a:extLst>
-                </a:gridCol>
-                <a:gridCol w="1737360">
-                  <a:extLst>
-                    <a:ext uri="{9D8B030D-6E8A-4147-A177-3AD203B41FA5}">
-                      <a16:colId xmlns:a16="http://schemas.microsoft.com/office/drawing/2014/main" val="20003"/>
-                    </a:ext>
-                  </a:extLst>
-                </a:gridCol>
-                <a:gridCol w="1411604">
-                  <a:extLst>
-                    <a:ext uri="{9D8B030D-6E8A-4147-A177-3AD203B41FA5}">
-                      <a16:colId xmlns:a16="http://schemas.microsoft.com/office/drawing/2014/main" val="20004"/>
-                    </a:ext>
-                  </a:extLst>
-                </a:gridCol>
+                <a:gridCol w="1845944"/>
+                <a:gridCol w="977264"/>
+                <a:gridCol w="977264"/>
+                <a:gridCol w="1737360"/>
+                <a:gridCol w="1411604"/>
               </a:tblGrid>
               <a:tr h="365760">
                 <a:tc>
                   <a:txBody>
-                    <a:bodyPr/>
+                    <a:bodyPr wrap="square"/>
                     <a:lstStyle/>
                     <a:p>
                       <a:pPr algn="l"/>
@@ -9228,7 +9158,7 @@
                 </a:tc>
                 <a:tc>
                   <a:txBody>
-                    <a:bodyPr/>
+                    <a:bodyPr wrap="square"/>
                     <a:lstStyle/>
                     <a:p>
                       <a:pPr algn="ctr"/>
@@ -9251,7 +9181,7 @@
                 </a:tc>
                 <a:tc>
                   <a:txBody>
-                    <a:bodyPr/>
+                    <a:bodyPr wrap="square"/>
                     <a:lstStyle/>
                     <a:p>
                       <a:pPr algn="ctr"/>
@@ -9274,7 +9204,7 @@
                 </a:tc>
                 <a:tc>
                   <a:txBody>
-                    <a:bodyPr/>
+                    <a:bodyPr wrap="square"/>
                     <a:lstStyle/>
                     <a:p>
                       <a:pPr algn="ctr"/>
@@ -9297,7 +9227,7 @@
                 </a:tc>
                 <a:tc>
                   <a:txBody>
-                    <a:bodyPr/>
+                    <a:bodyPr wrap="square"/>
                     <a:lstStyle/>
                     <a:p>
                       <a:pPr algn="ctr"/>
@@ -9318,16 +9248,11 @@
                     </a:solidFill>
                   </a:tcPr>
                 </a:tc>
-                <a:extLst>
-                  <a:ext uri="{0D108BD9-81ED-4DB2-BD59-A6C34878D82A}">
-                    <a16:rowId xmlns:a16="http://schemas.microsoft.com/office/drawing/2014/main" val="10000"/>
-                  </a:ext>
-                </a:extLst>
               </a:tr>
               <a:tr h="365760">
                 <a:tc>
                   <a:txBody>
-                    <a:bodyPr/>
+                    <a:bodyPr wrap="square"/>
                     <a:lstStyle/>
                     <a:p>
                       <a:pPr algn="l"/>
@@ -9350,12 +9275,12 @@
                 </a:tc>
                 <a:tc>
                   <a:txBody>
-                    <a:bodyPr/>
+                    <a:bodyPr wrap="square"/>
                     <a:lstStyle/>
                     <a:p>
                       <a:pPr algn="ctr"/>
                       <a:r>
-                        <a:rPr sz="1200" b="0" dirty="0">
+                        <a:rPr sz="1200" b="0">
                           <a:solidFill>
                             <a:srgbClr val="16222F"/>
                           </a:solidFill>
@@ -9373,7 +9298,7 @@
                 </a:tc>
                 <a:tc>
                   <a:txBody>
-                    <a:bodyPr/>
+                    <a:bodyPr wrap="square"/>
                     <a:lstStyle/>
                     <a:p>
                       <a:pPr algn="ctr"/>
@@ -9396,7 +9321,7 @@
                 </a:tc>
                 <a:tc>
                   <a:txBody>
-                    <a:bodyPr/>
+                    <a:bodyPr wrap="square"/>
                     <a:lstStyle/>
                     <a:p>
                       <a:pPr algn="ctr"/>
@@ -9419,12 +9344,12 @@
                 </a:tc>
                 <a:tc>
                   <a:txBody>
-                    <a:bodyPr/>
+                    <a:bodyPr wrap="square"/>
                     <a:lstStyle/>
                     <a:p>
                       <a:pPr algn="ctr"/>
                       <a:r>
-                        <a:rPr sz="1200" b="1" dirty="0">
+                        <a:rPr sz="1200" b="1">
                           <a:solidFill>
                             <a:srgbClr val="009E73"/>
                           </a:solidFill>
@@ -9440,16 +9365,11 @@
                     </a:solidFill>
                   </a:tcPr>
                 </a:tc>
-                <a:extLst>
-                  <a:ext uri="{0D108BD9-81ED-4DB2-BD59-A6C34878D82A}">
-                    <a16:rowId xmlns:a16="http://schemas.microsoft.com/office/drawing/2014/main" val="10001"/>
-                  </a:ext>
-                </a:extLst>
               </a:tr>
               <a:tr h="365760">
                 <a:tc>
                   <a:txBody>
-                    <a:bodyPr/>
+                    <a:bodyPr wrap="square"/>
                     <a:lstStyle/>
                     <a:p>
                       <a:pPr algn="l"/>
@@ -9472,7 +9392,7 @@
                 </a:tc>
                 <a:tc>
                   <a:txBody>
-                    <a:bodyPr/>
+                    <a:bodyPr wrap="square"/>
                     <a:lstStyle/>
                     <a:p>
                       <a:pPr algn="ctr"/>
@@ -9495,7 +9415,7 @@
                 </a:tc>
                 <a:tc>
                   <a:txBody>
-                    <a:bodyPr/>
+                    <a:bodyPr wrap="square"/>
                     <a:lstStyle/>
                     <a:p>
                       <a:pPr algn="ctr"/>
@@ -9518,7 +9438,7 @@
                 </a:tc>
                 <a:tc>
                   <a:txBody>
-                    <a:bodyPr/>
+                    <a:bodyPr wrap="square"/>
                     <a:lstStyle/>
                     <a:p>
                       <a:pPr algn="ctr"/>
@@ -9541,7 +9461,7 @@
                 </a:tc>
                 <a:tc>
                   <a:txBody>
-                    <a:bodyPr/>
+                    <a:bodyPr wrap="square"/>
                     <a:lstStyle/>
                     <a:p>
                       <a:pPr algn="ctr"/>
@@ -9562,16 +9482,11 @@
                     </a:solidFill>
                   </a:tcPr>
                 </a:tc>
-                <a:extLst>
-                  <a:ext uri="{0D108BD9-81ED-4DB2-BD59-A6C34878D82A}">
-                    <a16:rowId xmlns:a16="http://schemas.microsoft.com/office/drawing/2014/main" val="10002"/>
-                  </a:ext>
-                </a:extLst>
               </a:tr>
               <a:tr h="365760">
                 <a:tc>
                   <a:txBody>
-                    <a:bodyPr/>
+                    <a:bodyPr wrap="square"/>
                     <a:lstStyle/>
                     <a:p>
                       <a:pPr algn="l"/>
@@ -9594,7 +9509,7 @@
                 </a:tc>
                 <a:tc>
                   <a:txBody>
-                    <a:bodyPr/>
+                    <a:bodyPr wrap="square"/>
                     <a:lstStyle/>
                     <a:p>
                       <a:pPr algn="ctr"/>
@@ -9617,7 +9532,7 @@
                 </a:tc>
                 <a:tc>
                   <a:txBody>
-                    <a:bodyPr/>
+                    <a:bodyPr wrap="square"/>
                     <a:lstStyle/>
                     <a:p>
                       <a:pPr algn="ctr"/>
@@ -9640,7 +9555,7 @@
                 </a:tc>
                 <a:tc>
                   <a:txBody>
-                    <a:bodyPr/>
+                    <a:bodyPr wrap="square"/>
                     <a:lstStyle/>
                     <a:p>
                       <a:pPr algn="ctr"/>
@@ -9663,7 +9578,7 @@
                 </a:tc>
                 <a:tc>
                   <a:txBody>
-                    <a:bodyPr/>
+                    <a:bodyPr wrap="square"/>
                     <a:lstStyle/>
                     <a:p>
                       <a:pPr algn="ctr"/>
@@ -9684,16 +9599,11 @@
                     </a:solidFill>
                   </a:tcPr>
                 </a:tc>
-                <a:extLst>
-                  <a:ext uri="{0D108BD9-81ED-4DB2-BD59-A6C34878D82A}">
-                    <a16:rowId xmlns:a16="http://schemas.microsoft.com/office/drawing/2014/main" val="10003"/>
-                  </a:ext>
-                </a:extLst>
               </a:tr>
               <a:tr h="365760">
                 <a:tc>
                   <a:txBody>
-                    <a:bodyPr/>
+                    <a:bodyPr wrap="square"/>
                     <a:lstStyle/>
                     <a:p>
                       <a:pPr algn="l"/>
@@ -9716,7 +9626,7 @@
                 </a:tc>
                 <a:tc>
                   <a:txBody>
-                    <a:bodyPr/>
+                    <a:bodyPr wrap="square"/>
                     <a:lstStyle/>
                     <a:p>
                       <a:pPr algn="ctr"/>
@@ -9739,7 +9649,7 @@
                 </a:tc>
                 <a:tc>
                   <a:txBody>
-                    <a:bodyPr/>
+                    <a:bodyPr wrap="square"/>
                     <a:lstStyle/>
                     <a:p>
                       <a:pPr algn="ctr"/>
@@ -9762,7 +9672,7 @@
                 </a:tc>
                 <a:tc>
                   <a:txBody>
-                    <a:bodyPr/>
+                    <a:bodyPr wrap="square"/>
                     <a:lstStyle/>
                     <a:p>
                       <a:pPr algn="ctr"/>
@@ -9785,7 +9695,7 @@
                 </a:tc>
                 <a:tc>
                   <a:txBody>
-                    <a:bodyPr/>
+                    <a:bodyPr wrap="square"/>
                     <a:lstStyle/>
                     <a:p>
                       <a:pPr algn="ctr"/>
@@ -9806,16 +9716,11 @@
                     </a:solidFill>
                   </a:tcPr>
                 </a:tc>
-                <a:extLst>
-                  <a:ext uri="{0D108BD9-81ED-4DB2-BD59-A6C34878D82A}">
-                    <a16:rowId xmlns:a16="http://schemas.microsoft.com/office/drawing/2014/main" val="10004"/>
-                  </a:ext>
-                </a:extLst>
               </a:tr>
               <a:tr h="365760">
                 <a:tc>
                   <a:txBody>
-                    <a:bodyPr/>
+                    <a:bodyPr wrap="square"/>
                     <a:lstStyle/>
                     <a:p>
                       <a:pPr algn="l"/>
@@ -9838,7 +9743,7 @@
                 </a:tc>
                 <a:tc>
                   <a:txBody>
-                    <a:bodyPr/>
+                    <a:bodyPr wrap="square"/>
                     <a:lstStyle/>
                     <a:p>
                       <a:pPr algn="ctr"/>
@@ -9861,7 +9766,7 @@
                 </a:tc>
                 <a:tc>
                   <a:txBody>
-                    <a:bodyPr/>
+                    <a:bodyPr wrap="square"/>
                     <a:lstStyle/>
                     <a:p>
                       <a:pPr algn="ctr"/>
@@ -9884,7 +9789,7 @@
                 </a:tc>
                 <a:tc>
                   <a:txBody>
-                    <a:bodyPr/>
+                    <a:bodyPr wrap="square"/>
                     <a:lstStyle/>
                     <a:p>
                       <a:pPr algn="ctr"/>
@@ -9907,12 +9812,12 @@
                 </a:tc>
                 <a:tc>
                   <a:txBody>
-                    <a:bodyPr/>
+                    <a:bodyPr wrap="square"/>
                     <a:lstStyle/>
                     <a:p>
                       <a:pPr algn="ctr"/>
                       <a:r>
-                        <a:rPr sz="1200" b="1" dirty="0">
+                        <a:rPr sz="1200" b="1">
                           <a:solidFill>
                             <a:srgbClr val="D55500"/>
                           </a:solidFill>
@@ -9928,11 +9833,6 @@
                     </a:solidFill>
                   </a:tcPr>
                 </a:tc>
-                <a:extLst>
-                  <a:ext uri="{0D108BD9-81ED-4DB2-BD59-A6C34878D82A}">
-                    <a16:rowId xmlns:a16="http://schemas.microsoft.com/office/drawing/2014/main" val="10005"/>
-                  </a:ext>
-                </a:extLst>
               </a:tr>
             </a:tbl>
           </a:graphicData>
@@ -9946,8 +9846,8 @@
         </p:nvSpPr>
         <p:spPr>
           <a:xfrm>
-            <a:off x="7940040" y="2148840"/>
-            <a:ext cx="3429000" cy="1923604"/>
+            <a:off x="8001000" y="1828800"/>
+            <a:ext cx="3429000" cy="3840480"/>
           </a:xfrm>
           <a:prstGeom prst="rect">
             <a:avLst/>
@@ -9966,7 +9866,7 @@
               </a:spcAft>
             </a:pPr>
             <a:r>
-              <a:rPr sz="1300" b="1" dirty="0">
+              <a:rPr sz="1300" b="1">
                 <a:solidFill>
                   <a:srgbClr val="56B4E9"/>
                 </a:solidFill>
@@ -9975,22 +9875,13 @@
               <a:t>On famous drugs, the LLMs are strong</a:t>
             </a:r>
             <a:r>
-              <a:rPr lang="en-US" sz="1300" dirty="0">
+              <a:rPr sz="1300" b="0">
                 <a:solidFill>
                   <a:srgbClr val="EAF1F7"/>
                 </a:solidFill>
                 <a:latin typeface="Calibri"/>
               </a:rPr>
-              <a:t>: </a:t>
-            </a:r>
-            <a:r>
-              <a:rPr sz="1300" b="0" dirty="0">
-                <a:solidFill>
-                  <a:srgbClr val="EAF1F7"/>
-                </a:solidFill>
-                <a:latin typeface="Calibri"/>
-              </a:rPr>
-              <a:t> several match or beat us. We say so plainly.</a:t>
+              <a:t>, several match or beat us. We say so plainly.</a:t>
             </a:r>
           </a:p>
           <a:p>
@@ -10000,7 +9891,7 @@
               </a:spcAft>
             </a:pPr>
             <a:r>
-              <a:rPr sz="1300" b="1" dirty="0">
+              <a:rPr sz="1300" b="1">
                 <a:solidFill>
                   <a:srgbClr val="D55500"/>
                 </a:solidFill>
@@ -10009,22 +9900,13 @@
               <a:t>But 45% of the specific evidence IDs they cited were fake or pointed to the wrong drug</a:t>
             </a:r>
             <a:r>
-              <a:rPr lang="en-US" sz="1300" dirty="0">
+              <a:rPr sz="1300" b="0">
                 <a:solidFill>
                   <a:srgbClr val="EAF1F7"/>
                 </a:solidFill>
                 <a:latin typeface="Calibri"/>
               </a:rPr>
-              <a:t>:</a:t>
-            </a:r>
-            <a:r>
-              <a:rPr sz="1300" b="0" dirty="0">
-                <a:solidFill>
-                  <a:srgbClr val="EAF1F7"/>
-                </a:solidFill>
-                <a:latin typeface="Calibri"/>
-              </a:rPr>
-              <a:t> a cited 'rasagiline' ID was actually a steroid; a 'rivastigmine' ID was vitamin B6.</a:t>
+              <a:t>, a cited 'rasagiline' ID was actually a steroid; a 'rivastigmine' ID was vitamin B6.</a:t>
             </a:r>
           </a:p>
           <a:p>
@@ -10034,7 +9916,7 @@
               </a:spcAft>
             </a:pPr>
             <a:r>
-              <a:rPr sz="1300" b="1" dirty="0">
+              <a:rPr sz="1300" b="1">
                 <a:solidFill>
                   <a:srgbClr val="D55500"/>
                 </a:solidFill>
@@ -10043,13 +9925,13 @@
               <a:t>All four invented</a:t>
             </a:r>
             <a:r>
-              <a:rPr sz="1300" b="0" dirty="0">
+              <a:rPr sz="1300" b="0">
                 <a:solidFill>
                   <a:srgbClr val="EAF1F7"/>
                 </a:solidFill>
                 <a:latin typeface="Calibri"/>
               </a:rPr>
-              <a:t> a target and potency for an unpublished molecule  and disagreed.</a:t>
+              <a:t> a target and potency for an unpublished molecule, and disagreed.</a:t>
             </a:r>
           </a:p>
         </p:txBody>
@@ -10097,7 +9979,7 @@
                 </a:solidFill>
                 <a:latin typeface="Calibri"/>
               </a:rPr>
-              <a:t>They can't be trusted for verifiable evidence or for genuinely new molecules — exactly where discovery happens. BrainSafe grounds every answer in a real measurement.</a:t>
+              <a:t>They can't be trusted for verifiable evidence or for genuinely new molecules, exactly where discovery happens. BrainSafe grounds every answer in a real measurement.</a:t>
             </a:r>
           </a:p>
         </p:txBody>
@@ -10111,7 +9993,7 @@
 </file>
 
 <file path=ppt/slides/slide14.xml><?xml version="1.0" encoding="utf-8"?>
-<p:sld xmlns:a="http://schemas.openxmlformats.org/drawingml/2006/main" xmlns:r="http://schemas.openxmlformats.org/officeDocument/2006/relationships" xmlns:p="http://schemas.openxmlformats.org/presentationml/2006/main">
+<p:sld xmlns:a="http://schemas.openxmlformats.org/drawingml/2006/main" xmlns:p="http://schemas.openxmlformats.org/presentationml/2006/main" xmlns:r="http://schemas.openxmlformats.org/officeDocument/2006/relationships">
   <p:cSld>
     <p:bg>
       <p:bgPr>
@@ -10127,14 +10009,7 @@
         <p:cNvGrpSpPr/>
         <p:nvPr/>
       </p:nvGrpSpPr>
-      <p:grpSpPr>
-        <a:xfrm>
-          <a:off x="0" y="0"/>
-          <a:ext cx="0" cy="0"/>
-          <a:chOff x="0" y="0"/>
-          <a:chExt cx="0" cy="0"/>
-        </a:xfrm>
-      </p:grpSpPr>
+      <p:grpSpPr/>
       <p:sp>
         <p:nvSpPr>
           <p:cNvPr id="2" name="TextBox 1"/>
@@ -10143,7 +10018,7 @@
         </p:nvSpPr>
         <p:spPr>
           <a:xfrm>
-            <a:off x="822960" y="608076"/>
+            <a:off x="822960" y="502920"/>
             <a:ext cx="10515600" cy="365760"/>
           </a:xfrm>
           <a:prstGeom prst="rect">
@@ -10218,7 +10093,6 @@
           <a:lstStyle/>
           <a:p>
             <a:pPr algn="ctr"/>
-            <a:endParaRPr/>
           </a:p>
         </p:txBody>
       </p:sp>
@@ -10283,39 +10157,15 @@
                 <a:tableStyleId>{5C22544A-7EE6-4342-B048-85BDC9FD1C3A}</a:tableStyleId>
               </a:tblPr>
               <a:tblGrid>
-                <a:gridCol w="4296522">
-                  <a:extLst>
-                    <a:ext uri="{9D8B030D-6E8A-4147-A177-3AD203B41FA5}">
-                      <a16:colId xmlns:a16="http://schemas.microsoft.com/office/drawing/2014/main" val="20000"/>
-                    </a:ext>
-                  </a:extLst>
-                </a:gridCol>
-                <a:gridCol w="2148261">
-                  <a:extLst>
-                    <a:ext uri="{9D8B030D-6E8A-4147-A177-3AD203B41FA5}">
-                      <a16:colId xmlns:a16="http://schemas.microsoft.com/office/drawing/2014/main" val="20001"/>
-                    </a:ext>
-                  </a:extLst>
-                </a:gridCol>
-                <a:gridCol w="1879728">
-                  <a:extLst>
-                    <a:ext uri="{9D8B030D-6E8A-4147-A177-3AD203B41FA5}">
-                      <a16:colId xmlns:a16="http://schemas.microsoft.com/office/drawing/2014/main" val="20002"/>
-                    </a:ext>
-                  </a:extLst>
-                </a:gridCol>
-                <a:gridCol w="2282527">
-                  <a:extLst>
-                    <a:ext uri="{9D8B030D-6E8A-4147-A177-3AD203B41FA5}">
-                      <a16:colId xmlns:a16="http://schemas.microsoft.com/office/drawing/2014/main" val="20003"/>
-                    </a:ext>
-                  </a:extLst>
-                </a:gridCol>
+                <a:gridCol w="4296522"/>
+                <a:gridCol w="2148261"/>
+                <a:gridCol w="1879728"/>
+                <a:gridCol w="2282527"/>
               </a:tblGrid>
               <a:tr h="420624">
                 <a:tc>
                   <a:txBody>
-                    <a:bodyPr/>
+                    <a:bodyPr wrap="square"/>
                     <a:lstStyle/>
                     <a:p>
                       <a:pPr algn="l"/>
@@ -10338,7 +10188,7 @@
                 </a:tc>
                 <a:tc>
                   <a:txBody>
-                    <a:bodyPr/>
+                    <a:bodyPr wrap="square"/>
                     <a:lstStyle/>
                     <a:p>
                       <a:pPr algn="ctr"/>
@@ -10361,7 +10211,7 @@
                 </a:tc>
                 <a:tc>
                   <a:txBody>
-                    <a:bodyPr/>
+                    <a:bodyPr wrap="square"/>
                     <a:lstStyle/>
                     <a:p>
                       <a:pPr algn="ctr"/>
@@ -10384,7 +10234,7 @@
                 </a:tc>
                 <a:tc>
                   <a:txBody>
-                    <a:bodyPr/>
+                    <a:bodyPr wrap="square"/>
                     <a:lstStyle/>
                     <a:p>
                       <a:pPr algn="ctr"/>
@@ -10405,16 +10255,11 @@
                     </a:solidFill>
                   </a:tcPr>
                 </a:tc>
-                <a:extLst>
-                  <a:ext uri="{0D108BD9-81ED-4DB2-BD59-A6C34878D82A}">
-                    <a16:rowId xmlns:a16="http://schemas.microsoft.com/office/drawing/2014/main" val="10000"/>
-                  </a:ext>
-                </a:extLst>
               </a:tr>
               <a:tr h="420624">
                 <a:tc>
                   <a:txBody>
-                    <a:bodyPr/>
+                    <a:bodyPr wrap="square"/>
                     <a:lstStyle/>
                     <a:p>
                       <a:pPr algn="l"/>
@@ -10437,7 +10282,7 @@
                 </a:tc>
                 <a:tc>
                   <a:txBody>
-                    <a:bodyPr/>
+                    <a:bodyPr wrap="square"/>
                     <a:lstStyle/>
                     <a:p>
                       <a:pPr algn="ctr"/>
@@ -10448,7 +10293,7 @@
                           </a:solidFill>
                           <a:latin typeface="Consolas"/>
                         </a:rPr>
-                        <a:t>yes — 64,474</a:t>
+                        <a:t>yes, 64,474</a:t>
                       </a:r>
                     </a:p>
                   </a:txBody>
@@ -10460,7 +10305,7 @@
                 </a:tc>
                 <a:tc>
                   <a:txBody>
-                    <a:bodyPr/>
+                    <a:bodyPr wrap="square"/>
                     <a:lstStyle/>
                     <a:p>
                       <a:pPr algn="ctr"/>
@@ -10483,7 +10328,7 @@
                 </a:tc>
                 <a:tc>
                   <a:txBody>
-                    <a:bodyPr/>
+                    <a:bodyPr wrap="square"/>
                     <a:lstStyle/>
                     <a:p>
                       <a:pPr algn="ctr"/>
@@ -10504,16 +10349,11 @@
                     </a:solidFill>
                   </a:tcPr>
                 </a:tc>
-                <a:extLst>
-                  <a:ext uri="{0D108BD9-81ED-4DB2-BD59-A6C34878D82A}">
-                    <a16:rowId xmlns:a16="http://schemas.microsoft.com/office/drawing/2014/main" val="10001"/>
-                  </a:ext>
-                </a:extLst>
               </a:tr>
               <a:tr h="420624">
                 <a:tc>
                   <a:txBody>
-                    <a:bodyPr/>
+                    <a:bodyPr wrap="square"/>
                     <a:lstStyle/>
                     <a:p>
                       <a:pPr algn="l"/>
@@ -10536,7 +10376,7 @@
                 </a:tc>
                 <a:tc>
                   <a:txBody>
-                    <a:bodyPr/>
+                    <a:bodyPr wrap="square"/>
                     <a:lstStyle/>
                     <a:p>
                       <a:pPr algn="ctr"/>
@@ -10559,7 +10399,7 @@
                 </a:tc>
                 <a:tc>
                   <a:txBody>
-                    <a:bodyPr/>
+                    <a:bodyPr wrap="square"/>
                     <a:lstStyle/>
                     <a:p>
                       <a:pPr algn="ctr"/>
@@ -10582,7 +10422,7 @@
                 </a:tc>
                 <a:tc>
                   <a:txBody>
-                    <a:bodyPr/>
+                    <a:bodyPr wrap="square"/>
                     <a:lstStyle/>
                     <a:p>
                       <a:pPr algn="ctr"/>
@@ -10603,16 +10443,11 @@
                     </a:solidFill>
                   </a:tcPr>
                 </a:tc>
-                <a:extLst>
-                  <a:ext uri="{0D108BD9-81ED-4DB2-BD59-A6C34878D82A}">
-                    <a16:rowId xmlns:a16="http://schemas.microsoft.com/office/drawing/2014/main" val="10002"/>
-                  </a:ext>
-                </a:extLst>
               </a:tr>
               <a:tr h="420624">
                 <a:tc>
                   <a:txBody>
-                    <a:bodyPr/>
+                    <a:bodyPr wrap="square"/>
                     <a:lstStyle/>
                     <a:p>
                       <a:pPr algn="l"/>
@@ -10635,7 +10470,7 @@
                 </a:tc>
                 <a:tc>
                   <a:txBody>
-                    <a:bodyPr/>
+                    <a:bodyPr wrap="square"/>
                     <a:lstStyle/>
                     <a:p>
                       <a:pPr algn="ctr"/>
@@ -10658,7 +10493,7 @@
                 </a:tc>
                 <a:tc>
                   <a:txBody>
-                    <a:bodyPr/>
+                    <a:bodyPr wrap="square"/>
                     <a:lstStyle/>
                     <a:p>
                       <a:pPr algn="ctr"/>
@@ -10681,7 +10516,7 @@
                 </a:tc>
                 <a:tc>
                   <a:txBody>
-                    <a:bodyPr/>
+                    <a:bodyPr wrap="square"/>
                     <a:lstStyle/>
                     <a:p>
                       <a:pPr algn="ctr"/>
@@ -10702,16 +10537,11 @@
                     </a:solidFill>
                   </a:tcPr>
                 </a:tc>
-                <a:extLst>
-                  <a:ext uri="{0D108BD9-81ED-4DB2-BD59-A6C34878D82A}">
-                    <a16:rowId xmlns:a16="http://schemas.microsoft.com/office/drawing/2014/main" val="10003"/>
-                  </a:ext>
-                </a:extLst>
               </a:tr>
               <a:tr h="420624">
                 <a:tc>
                   <a:txBody>
-                    <a:bodyPr/>
+                    <a:bodyPr wrap="square"/>
                     <a:lstStyle/>
                     <a:p>
                       <a:pPr algn="l"/>
@@ -10734,7 +10564,7 @@
                 </a:tc>
                 <a:tc>
                   <a:txBody>
-                    <a:bodyPr/>
+                    <a:bodyPr wrap="square"/>
                     <a:lstStyle/>
                     <a:p>
                       <a:pPr algn="ctr"/>
@@ -10757,7 +10587,7 @@
                 </a:tc>
                 <a:tc>
                   <a:txBody>
-                    <a:bodyPr/>
+                    <a:bodyPr wrap="square"/>
                     <a:lstStyle/>
                     <a:p>
                       <a:pPr algn="ctr"/>
@@ -10768,7 +10598,7 @@
                           </a:solidFill>
                           <a:latin typeface="Consolas"/>
                         </a:rPr>
-                        <a:t>no — invents</a:t>
+                        <a:t>no, invents</a:t>
                       </a:r>
                     </a:p>
                   </a:txBody>
@@ -10780,7 +10610,7 @@
                 </a:tc>
                 <a:tc>
                   <a:txBody>
-                    <a:bodyPr/>
+                    <a:bodyPr wrap="square"/>
                     <a:lstStyle/>
                     <a:p>
                       <a:pPr algn="ctr"/>
@@ -10801,16 +10631,11 @@
                     </a:solidFill>
                   </a:tcPr>
                 </a:tc>
-                <a:extLst>
-                  <a:ext uri="{0D108BD9-81ED-4DB2-BD59-A6C34878D82A}">
-                    <a16:rowId xmlns:a16="http://schemas.microsoft.com/office/drawing/2014/main" val="10004"/>
-                  </a:ext>
-                </a:extLst>
               </a:tr>
               <a:tr h="420624">
                 <a:tc>
                   <a:txBody>
-                    <a:bodyPr/>
+                    <a:bodyPr wrap="square"/>
                     <a:lstStyle/>
                     <a:p>
                       <a:pPr algn="l"/>
@@ -10833,7 +10658,7 @@
                 </a:tc>
                 <a:tc>
                   <a:txBody>
-                    <a:bodyPr/>
+                    <a:bodyPr wrap="square"/>
                     <a:lstStyle/>
                     <a:p>
                       <a:pPr algn="ctr"/>
@@ -10856,7 +10681,7 @@
                 </a:tc>
                 <a:tc>
                   <a:txBody>
-                    <a:bodyPr/>
+                    <a:bodyPr wrap="square"/>
                     <a:lstStyle/>
                     <a:p>
                       <a:pPr algn="ctr"/>
@@ -10879,7 +10704,7 @@
                 </a:tc>
                 <a:tc>
                   <a:txBody>
-                    <a:bodyPr/>
+                    <a:bodyPr wrap="square"/>
                     <a:lstStyle/>
                     <a:p>
                       <a:pPr algn="ctr"/>
@@ -10900,16 +10725,11 @@
                     </a:solidFill>
                   </a:tcPr>
                 </a:tc>
-                <a:extLst>
-                  <a:ext uri="{0D108BD9-81ED-4DB2-BD59-A6C34878D82A}">
-                    <a16:rowId xmlns:a16="http://schemas.microsoft.com/office/drawing/2014/main" val="10005"/>
-                  </a:ext>
-                </a:extLst>
               </a:tr>
               <a:tr h="420624">
                 <a:tc>
                   <a:txBody>
-                    <a:bodyPr/>
+                    <a:bodyPr wrap="square"/>
                     <a:lstStyle/>
                     <a:p>
                       <a:pPr algn="l"/>
@@ -10932,7 +10752,7 @@
                 </a:tc>
                 <a:tc>
                   <a:txBody>
-                    <a:bodyPr/>
+                    <a:bodyPr wrap="square"/>
                     <a:lstStyle/>
                     <a:p>
                       <a:pPr algn="ctr"/>
@@ -10955,7 +10775,7 @@
                 </a:tc>
                 <a:tc>
                   <a:txBody>
-                    <a:bodyPr/>
+                    <a:bodyPr wrap="square"/>
                     <a:lstStyle/>
                     <a:p>
                       <a:pPr algn="ctr"/>
@@ -10978,7 +10798,7 @@
                 </a:tc>
                 <a:tc>
                   <a:txBody>
-                    <a:bodyPr/>
+                    <a:bodyPr wrap="square"/>
                     <a:lstStyle/>
                     <a:p>
                       <a:pPr algn="ctr"/>
@@ -10999,16 +10819,11 @@
                     </a:solidFill>
                   </a:tcPr>
                 </a:tc>
-                <a:extLst>
-                  <a:ext uri="{0D108BD9-81ED-4DB2-BD59-A6C34878D82A}">
-                    <a16:rowId xmlns:a16="http://schemas.microsoft.com/office/drawing/2014/main" val="10006"/>
-                  </a:ext>
-                </a:extLst>
               </a:tr>
               <a:tr h="420624">
                 <a:tc>
                   <a:txBody>
-                    <a:bodyPr/>
+                    <a:bodyPr wrap="square"/>
                     <a:lstStyle/>
                     <a:p>
                       <a:pPr algn="l"/>
@@ -11031,7 +10846,7 @@
                 </a:tc>
                 <a:tc>
                   <a:txBody>
-                    <a:bodyPr/>
+                    <a:bodyPr wrap="square"/>
                     <a:lstStyle/>
                     <a:p>
                       <a:pPr algn="ctr"/>
@@ -11054,7 +10869,7 @@
                 </a:tc>
                 <a:tc>
                   <a:txBody>
-                    <a:bodyPr/>
+                    <a:bodyPr wrap="square"/>
                     <a:lstStyle/>
                     <a:p>
                       <a:pPr algn="ctr"/>
@@ -11077,7 +10892,7 @@
                 </a:tc>
                 <a:tc>
                   <a:txBody>
-                    <a:bodyPr/>
+                    <a:bodyPr wrap="square"/>
                     <a:lstStyle/>
                     <a:p>
                       <a:pPr algn="ctr"/>
@@ -11098,11 +10913,6 @@
                     </a:solidFill>
                   </a:tcPr>
                 </a:tc>
-                <a:extLst>
-                  <a:ext uri="{0D108BD9-81ED-4DB2-BD59-A6C34878D82A}">
-                    <a16:rowId xmlns:a16="http://schemas.microsoft.com/office/drawing/2014/main" val="10007"/>
-                  </a:ext>
-                </a:extLst>
               </a:tr>
             </a:tbl>
           </a:graphicData>
@@ -11117,7 +10927,7 @@
 </file>
 
 <file path=ppt/slides/slide15.xml><?xml version="1.0" encoding="utf-8"?>
-<p:sld xmlns:a="http://schemas.openxmlformats.org/drawingml/2006/main" xmlns:r="http://schemas.openxmlformats.org/officeDocument/2006/relationships" xmlns:p="http://schemas.openxmlformats.org/presentationml/2006/main">
+<p:sld xmlns:a="http://schemas.openxmlformats.org/drawingml/2006/main" xmlns:p="http://schemas.openxmlformats.org/presentationml/2006/main" xmlns:r="http://schemas.openxmlformats.org/officeDocument/2006/relationships">
   <p:cSld>
     <p:bg>
       <p:bgPr>
@@ -11133,14 +10943,7 @@
         <p:cNvGrpSpPr/>
         <p:nvPr/>
       </p:nvGrpSpPr>
-      <p:grpSpPr>
-        <a:xfrm>
-          <a:off x="0" y="0"/>
-          <a:ext cx="0" cy="0"/>
-          <a:chOff x="0" y="0"/>
-          <a:chExt cx="0" cy="0"/>
-        </a:xfrm>
-      </p:grpSpPr>
+      <p:grpSpPr/>
       <p:sp>
         <p:nvSpPr>
           <p:cNvPr id="2" name="TextBox 1"/>
@@ -11149,7 +10952,7 @@
         </p:nvSpPr>
         <p:spPr>
           <a:xfrm>
-            <a:off x="788060" y="663463"/>
+            <a:off x="822960" y="502920"/>
             <a:ext cx="10515600" cy="365760"/>
           </a:xfrm>
           <a:prstGeom prst="rect">
@@ -11172,7 +10975,7 @@
               </a:spcAft>
             </a:pPr>
             <a:r>
-              <a:rPr sz="1200" b="1" i="0" dirty="0">
+              <a:rPr sz="1200" b="1" i="0">
                 <a:solidFill>
                   <a:srgbClr val="0072B2"/>
                 </a:solidFill>
@@ -11224,7 +11027,6 @@
           <a:lstStyle/>
           <a:p>
             <a:pPr algn="ctr"/>
-            <a:endParaRPr/>
           </a:p>
         </p:txBody>
       </p:sp>
@@ -11237,7 +11039,7 @@
         <p:spPr>
           <a:xfrm>
             <a:off x="822960" y="868680"/>
-            <a:ext cx="10515600" cy="600164"/>
+            <a:ext cx="10515600" cy="1188720"/>
           </a:xfrm>
           <a:prstGeom prst="rect">
             <a:avLst/>
@@ -11259,31 +11061,13 @@
               </a:spcAft>
             </a:pPr>
             <a:r>
-              <a:rPr sz="3300" b="1" i="0" dirty="0">
+              <a:rPr sz="3300" b="1" i="0">
                 <a:solidFill>
                   <a:srgbClr val="16222F"/>
                 </a:solidFill>
                 <a:latin typeface="Georgia"/>
               </a:rPr>
-              <a:t>A research triage engine</a:t>
-            </a:r>
-            <a:r>
-              <a:rPr lang="en-US" sz="3300" b="1" i="0" dirty="0">
-                <a:solidFill>
-                  <a:srgbClr val="16222F"/>
-                </a:solidFill>
-                <a:latin typeface="Georgia"/>
-              </a:rPr>
-              <a:t>,</a:t>
-            </a:r>
-            <a:r>
-              <a:rPr sz="3300" b="1" i="0" dirty="0">
-                <a:solidFill>
-                  <a:srgbClr val="16222F"/>
-                </a:solidFill>
-                <a:latin typeface="Georgia"/>
-              </a:rPr>
-              <a:t> not a clinical oracle</a:t>
+              <a:t>A research triage engine, not a clinical oracle</a:t>
             </a:r>
           </a:p>
         </p:txBody>
@@ -11333,7 +11117,6 @@
           <a:lstStyle/>
           <a:p>
             <a:pPr algn="ctr"/>
-            <a:endParaRPr/>
           </a:p>
         </p:txBody>
       </p:sp>
@@ -11378,7 +11161,6 @@
           <a:lstStyle/>
           <a:p>
             <a:pPr algn="ctr"/>
-            <a:endParaRPr/>
           </a:p>
         </p:txBody>
       </p:sp>
@@ -11391,7 +11173,7 @@
         <p:spPr>
           <a:xfrm>
             <a:off x="1051560" y="2103120"/>
-            <a:ext cx="4846320" cy="1672253"/>
+            <a:ext cx="4846320" cy="3200400"/>
           </a:xfrm>
           <a:prstGeom prst="rect">
             <a:avLst/>
@@ -11413,7 +11195,7 @@
               </a:spcAft>
             </a:pPr>
             <a:r>
-              <a:rPr sz="1600" b="1" i="0" dirty="0">
+              <a:rPr sz="1600" b="1" i="0">
                 <a:solidFill>
                   <a:srgbClr val="009E73"/>
                 </a:solidFill>
@@ -11429,7 +11211,7 @@
               </a:spcAft>
             </a:pPr>
             <a:r>
-              <a:rPr sz="1300" b="1" dirty="0">
+              <a:rPr sz="1300" b="1">
                 <a:solidFill>
                   <a:srgbClr val="009E73"/>
                 </a:solidFill>
@@ -11438,13 +11220,13 @@
               <a:t>▪  </a:t>
             </a:r>
             <a:r>
-              <a:rPr sz="1300" b="0" dirty="0">
+              <a:rPr sz="1300" b="0">
                 <a:solidFill>
                   <a:srgbClr val="16222F"/>
                 </a:solidFill>
                 <a:latin typeface="Calibri"/>
               </a:rPr>
-              <a:t>Prioritizing which molecules to test next for brain conditions (natural products, flavonoids, repurposing).</a:t>
+              <a:t>Prioritising which molecules to test next for brain conditions (natural products, flavonoids, repurposing).</a:t>
             </a:r>
           </a:p>
           <a:p>
@@ -11454,7 +11236,7 @@
               </a:spcAft>
             </a:pPr>
             <a:r>
-              <a:rPr sz="1300" b="1" dirty="0">
+              <a:rPr sz="1300" b="1">
                 <a:solidFill>
                   <a:srgbClr val="009E73"/>
                 </a:solidFill>
@@ -11463,7 +11245,7 @@
               <a:t>▪  </a:t>
             </a:r>
             <a:r>
-              <a:rPr sz="1300" b="0" dirty="0">
+              <a:rPr sz="1300" b="0">
                 <a:solidFill>
                   <a:srgbClr val="16222F"/>
                 </a:solidFill>
@@ -11479,7 +11261,7 @@
               </a:spcAft>
             </a:pPr>
             <a:r>
-              <a:rPr sz="1300" b="1" dirty="0">
+              <a:rPr sz="1300" b="1">
                 <a:solidFill>
                   <a:srgbClr val="009E73"/>
                 </a:solidFill>
@@ -11488,7 +11270,7 @@
               <a:t>▪  </a:t>
             </a:r>
             <a:r>
-              <a:rPr sz="1300" b="0" dirty="0">
+              <a:rPr sz="1300" b="0">
                 <a:solidFill>
                   <a:srgbClr val="16222F"/>
                 </a:solidFill>
@@ -11544,7 +11326,6 @@
           <a:lstStyle/>
           <a:p>
             <a:pPr algn="ctr"/>
-            <a:endParaRPr/>
           </a:p>
         </p:txBody>
       </p:sp>
@@ -11589,7 +11370,6 @@
           <a:lstStyle/>
           <a:p>
             <a:pPr algn="ctr"/>
-            <a:endParaRPr/>
           </a:p>
         </p:txBody>
       </p:sp>
@@ -11602,7 +11382,7 @@
         <p:spPr>
           <a:xfrm>
             <a:off x="6492240" y="2103120"/>
-            <a:ext cx="4709160" cy="2349361"/>
+            <a:ext cx="4709160" cy="3200400"/>
           </a:xfrm>
           <a:prstGeom prst="rect">
             <a:avLst/>
@@ -11624,7 +11404,7 @@
               </a:spcAft>
             </a:pPr>
             <a:r>
-              <a:rPr sz="1600" b="1" i="0" dirty="0">
+              <a:rPr sz="1600" b="1" i="0">
                 <a:solidFill>
                   <a:srgbClr val="D55500"/>
                 </a:solidFill>
@@ -11640,7 +11420,7 @@
               </a:spcAft>
             </a:pPr>
             <a:r>
-              <a:rPr sz="1300" b="1" dirty="0">
+              <a:rPr sz="1300" b="1">
                 <a:solidFill>
                   <a:srgbClr val="D55500"/>
                 </a:solidFill>
@@ -11649,31 +11429,13 @@
               <a:t>▪  </a:t>
             </a:r>
             <a:r>
-              <a:rPr sz="1300" b="0" dirty="0">
+              <a:rPr sz="1300" b="0">
                 <a:solidFill>
                   <a:srgbClr val="16222F"/>
                 </a:solidFill>
                 <a:latin typeface="Calibri"/>
               </a:rPr>
-              <a:t>Predicts whether a molecule engages a target</a:t>
-            </a:r>
-            <a:r>
-              <a:rPr lang="en-US" sz="1300" b="0" dirty="0">
-                <a:solidFill>
-                  <a:srgbClr val="16222F"/>
-                </a:solidFill>
-                <a:latin typeface="Calibri"/>
-              </a:rPr>
-              <a:t>,</a:t>
-            </a:r>
-            <a:r>
-              <a:rPr sz="1300" b="0" dirty="0">
-                <a:solidFill>
-                  <a:srgbClr val="16222F"/>
-                </a:solidFill>
-                <a:latin typeface="Calibri"/>
-              </a:rPr>
-              <a:t> not whether it activates or blocks it.</a:t>
+              <a:t>Predicts whether a molecule engages a target, not whether it activates or blocks it.</a:t>
             </a:r>
           </a:p>
           <a:p>
@@ -11683,7 +11445,7 @@
               </a:spcAft>
             </a:pPr>
             <a:r>
-              <a:rPr sz="1300" b="1" dirty="0">
+              <a:rPr sz="1300" b="1">
                 <a:solidFill>
                   <a:srgbClr val="D55500"/>
                 </a:solidFill>
@@ -11692,7 +11454,7 @@
               <a:t>▪  </a:t>
             </a:r>
             <a:r>
-              <a:rPr sz="1300" b="0" dirty="0">
+              <a:rPr sz="1300" b="0">
                 <a:solidFill>
                   <a:srgbClr val="16222F"/>
                 </a:solidFill>
@@ -11708,7 +11470,7 @@
               </a:spcAft>
             </a:pPr>
             <a:r>
-              <a:rPr sz="1300" b="1" dirty="0">
+              <a:rPr sz="1300" b="1">
                 <a:solidFill>
                   <a:srgbClr val="D55500"/>
                 </a:solidFill>
@@ -11717,7 +11479,7 @@
               <a:t>▪  </a:t>
             </a:r>
             <a:r>
-              <a:rPr sz="1300" b="0" dirty="0">
+              <a:rPr sz="1300" b="0">
                 <a:solidFill>
                   <a:srgbClr val="16222F"/>
                 </a:solidFill>
@@ -11733,7 +11495,7 @@
               </a:spcAft>
             </a:pPr>
             <a:r>
-              <a:rPr sz="1300" b="1" dirty="0">
+              <a:rPr sz="1300" b="1">
                 <a:solidFill>
                   <a:srgbClr val="D55500"/>
                 </a:solidFill>
@@ -11742,31 +11504,13 @@
               <a:t>▪  </a:t>
             </a:r>
             <a:r>
-              <a:rPr sz="1300" b="0" dirty="0">
+              <a:rPr sz="1300" b="0">
                 <a:solidFill>
                   <a:srgbClr val="16222F"/>
                 </a:solidFill>
                 <a:latin typeface="Calibri"/>
               </a:rPr>
-              <a:t>One heart-safety target (</a:t>
-            </a:r>
-            <a:r>
-              <a:rPr sz="1300" b="0" dirty="0" err="1">
-                <a:solidFill>
-                  <a:srgbClr val="16222F"/>
-                </a:solidFill>
-                <a:latin typeface="Calibri"/>
-              </a:rPr>
-              <a:t>hERG</a:t>
-            </a:r>
-            <a:r>
-              <a:rPr sz="1300" b="0" dirty="0">
-                <a:solidFill>
-                  <a:srgbClr val="16222F"/>
-                </a:solidFill>
-                <a:latin typeface="Calibri"/>
-              </a:rPr>
-              <a:t>); other safety risks are out of scope.</a:t>
+              <a:t>One heart-safety target (hERG); other safety risks are out of scope.</a:t>
             </a:r>
           </a:p>
         </p:txBody>
@@ -11780,7 +11524,7 @@
 </file>
 
 <file path=ppt/slides/slide16.xml><?xml version="1.0" encoding="utf-8"?>
-<p:sld xmlns:a="http://schemas.openxmlformats.org/drawingml/2006/main" xmlns:r="http://schemas.openxmlformats.org/officeDocument/2006/relationships" xmlns:p="http://schemas.openxmlformats.org/presentationml/2006/main">
+<p:sld xmlns:a="http://schemas.openxmlformats.org/drawingml/2006/main" xmlns:p="http://schemas.openxmlformats.org/presentationml/2006/main" xmlns:r="http://schemas.openxmlformats.org/officeDocument/2006/relationships">
   <p:cSld>
     <p:bg>
       <p:bgPr>
@@ -11796,14 +11540,7 @@
         <p:cNvGrpSpPr/>
         <p:nvPr/>
       </p:nvGrpSpPr>
-      <p:grpSpPr>
-        <a:xfrm>
-          <a:off x="0" y="0"/>
-          <a:ext cx="0" cy="0"/>
-          <a:chOff x="0" y="0"/>
-          <a:chExt cx="0" cy="0"/>
-        </a:xfrm>
-      </p:grpSpPr>
+      <p:grpSpPr/>
       <p:sp>
         <p:nvSpPr>
           <p:cNvPr id="2" name="Rectangle 1"/>
@@ -11845,7 +11582,6 @@
           <a:lstStyle/>
           <a:p>
             <a:pPr algn="ctr"/>
-            <a:endParaRPr/>
           </a:p>
         </p:txBody>
       </p:sp>
@@ -11984,7 +11720,6 @@
           <a:lstStyle/>
           <a:p>
             <a:pPr algn="ctr"/>
-            <a:endParaRPr/>
           </a:p>
         </p:txBody>
       </p:sp>
@@ -12094,7 +11829,6 @@
           <a:lstStyle/>
           <a:p>
             <a:pPr algn="ctr"/>
-            <a:endParaRPr/>
           </a:p>
         </p:txBody>
       </p:sp>
@@ -12204,7 +11938,6 @@
           <a:lstStyle/>
           <a:p>
             <a:pPr algn="ctr"/>
-            <a:endParaRPr/>
           </a:p>
         </p:txBody>
       </p:sp>
@@ -12314,7 +12047,6 @@
           <a:lstStyle/>
           <a:p>
             <a:pPr algn="ctr"/>
-            <a:endParaRPr/>
           </a:p>
         </p:txBody>
       </p:sp>
@@ -12416,7 +12148,7 @@
                 </a:solidFill>
                 <a:latin typeface="Calibri"/>
               </a:rPr>
-              <a:t>A calibrated, evidence-grounded, brain-entry-gated predictor built entirely on measured public data — state-of-the-art-grade on like-for-like tests, fully transparent on the hard ones, and every claim traceable to a real measurement.</a:t>
+              <a:t>A calibrated, evidence-grounded, brain-entry-gated predictor built entirely on measured public data, state-of-the-art-grade on like-for-like tests, fully transparent on the hard ones, and every claim traceable to a real measurement.</a:t>
             </a:r>
           </a:p>
         </p:txBody>
@@ -12452,7 +12184,7 @@
               </a:spcAft>
             </a:pPr>
             <a:r>
-              <a:rPr sz="1250" b="1" i="0" dirty="0">
+              <a:rPr sz="1250" b="1" i="0">
                 <a:solidFill>
                   <a:srgbClr val="56B4E9"/>
                 </a:solidFill>
@@ -12472,7 +12204,7 @@
 </file>
 
 <file path=ppt/slides/slide2.xml><?xml version="1.0" encoding="utf-8"?>
-<p:sld xmlns:a="http://schemas.openxmlformats.org/drawingml/2006/main" xmlns:r="http://schemas.openxmlformats.org/officeDocument/2006/relationships" xmlns:p="http://schemas.openxmlformats.org/presentationml/2006/main">
+<p:sld xmlns:a="http://schemas.openxmlformats.org/drawingml/2006/main" xmlns:p="http://schemas.openxmlformats.org/presentationml/2006/main" xmlns:r="http://schemas.openxmlformats.org/officeDocument/2006/relationships">
   <p:cSld>
     <p:bg>
       <p:bgPr>
@@ -12488,14 +12220,7 @@
         <p:cNvGrpSpPr/>
         <p:nvPr/>
       </p:nvGrpSpPr>
-      <p:grpSpPr>
-        <a:xfrm>
-          <a:off x="0" y="0"/>
-          <a:ext cx="0" cy="0"/>
-          <a:chOff x="0" y="0"/>
-          <a:chExt cx="0" cy="0"/>
-        </a:xfrm>
-      </p:grpSpPr>
+      <p:grpSpPr/>
       <p:sp>
         <p:nvSpPr>
           <p:cNvPr id="2" name="TextBox 1"/>
@@ -12504,7 +12229,7 @@
         </p:nvSpPr>
         <p:spPr>
           <a:xfrm>
-            <a:off x="822960" y="606617"/>
+            <a:off x="822960" y="502920"/>
             <a:ext cx="10515600" cy="365760"/>
           </a:xfrm>
           <a:prstGeom prst="rect">
@@ -12527,7 +12252,7 @@
               </a:spcAft>
             </a:pPr>
             <a:r>
-              <a:rPr sz="1200" b="1" i="0" dirty="0">
+              <a:rPr sz="1200" b="1" i="0">
                 <a:solidFill>
                   <a:srgbClr val="0072B2"/>
                 </a:solidFill>
@@ -12579,7 +12304,6 @@
           <a:lstStyle/>
           <a:p>
             <a:pPr algn="ctr"/>
-            <a:endParaRPr/>
           </a:p>
         </p:txBody>
       </p:sp>
@@ -12614,7 +12338,7 @@
               </a:spcAft>
             </a:pPr>
             <a:r>
-              <a:rPr sz="3300" b="1" i="0" dirty="0">
+              <a:rPr sz="3300" b="1" i="0">
                 <a:solidFill>
                   <a:srgbClr val="16222F"/>
                 </a:solidFill>
@@ -12837,7 +12561,6 @@
           <a:lstStyle/>
           <a:p>
             <a:pPr algn="ctr"/>
-            <a:endParaRPr/>
           </a:p>
         </p:txBody>
       </p:sp>
@@ -12945,7 +12668,6 @@
           <a:lstStyle/>
           <a:p>
             <a:pPr algn="ctr"/>
-            <a:endParaRPr/>
           </a:p>
         </p:txBody>
       </p:sp>
@@ -12990,7 +12712,6 @@
           <a:lstStyle/>
           <a:p>
             <a:pPr algn="ctr"/>
-            <a:endParaRPr/>
           </a:p>
         </p:txBody>
       </p:sp>
@@ -13037,7 +12758,7 @@
                 </a:solidFill>
                 <a:latin typeface="Calibri"/>
               </a:rPr>
-              <a:t>the blood–brain barrier is the brain's security gate — most molecules can't pass. A compound has to clear that gate AND hit the right target AND be safe. Answering these one-at-a-time, in different tools, is slow and error-prone.</a:t>
+              <a:t>the blood–brain barrier is the brain's security gate, most molecules can't pass. A compound has to clear that gate AND hit the right target AND be safe. Answering these one-at-a-time, in different tools, is slow and error-prone.</a:t>
             </a:r>
           </a:p>
         </p:txBody>
@@ -13051,7 +12772,7 @@
 </file>
 
 <file path=ppt/slides/slide3.xml><?xml version="1.0" encoding="utf-8"?>
-<p:sld xmlns:a="http://schemas.openxmlformats.org/drawingml/2006/main" xmlns:r="http://schemas.openxmlformats.org/officeDocument/2006/relationships" xmlns:p="http://schemas.openxmlformats.org/presentationml/2006/main">
+<p:sld xmlns:a="http://schemas.openxmlformats.org/drawingml/2006/main" xmlns:p="http://schemas.openxmlformats.org/presentationml/2006/main" xmlns:r="http://schemas.openxmlformats.org/officeDocument/2006/relationships">
   <p:cSld>
     <p:bg>
       <p:bgPr>
@@ -13067,14 +12788,7 @@
         <p:cNvGrpSpPr/>
         <p:nvPr/>
       </p:nvGrpSpPr>
-      <p:grpSpPr>
-        <a:xfrm>
-          <a:off x="0" y="0"/>
-          <a:ext cx="0" cy="0"/>
-          <a:chOff x="0" y="0"/>
-          <a:chExt cx="0" cy="0"/>
-        </a:xfrm>
-      </p:grpSpPr>
+      <p:grpSpPr/>
       <p:sp>
         <p:nvSpPr>
           <p:cNvPr id="2" name="TextBox 1"/>
@@ -13083,7 +12797,7 @@
         </p:nvSpPr>
         <p:spPr>
           <a:xfrm>
-            <a:off x="728690" y="606617"/>
+            <a:off x="822960" y="502920"/>
             <a:ext cx="10515600" cy="365760"/>
           </a:xfrm>
           <a:prstGeom prst="rect">
@@ -13106,7 +12820,7 @@
               </a:spcAft>
             </a:pPr>
             <a:r>
-              <a:rPr sz="1200" b="1" i="0" dirty="0">
+              <a:rPr sz="1200" b="1" i="0">
                 <a:solidFill>
                   <a:srgbClr val="56B4E9"/>
                 </a:solidFill>
@@ -13158,7 +12872,6 @@
           <a:lstStyle/>
           <a:p>
             <a:pPr algn="ctr"/>
-            <a:endParaRPr/>
           </a:p>
         </p:txBody>
       </p:sp>
@@ -13171,7 +12884,7 @@
         <p:spPr>
           <a:xfrm>
             <a:off x="822960" y="868680"/>
-            <a:ext cx="10515600" cy="1107996"/>
+            <a:ext cx="10515600" cy="1188720"/>
           </a:xfrm>
           <a:prstGeom prst="rect">
             <a:avLst/>
@@ -13193,13 +12906,13 @@
               </a:spcAft>
             </a:pPr>
             <a:r>
-              <a:rPr sz="3300" b="1" i="0" dirty="0">
+              <a:rPr sz="3300" b="1" i="0">
                 <a:solidFill>
                   <a:srgbClr val="FFFFFF"/>
                 </a:solidFill>
                 <a:latin typeface="Georgia"/>
               </a:rPr>
-              <a:t>The innovation is the integration  not a new algorithm</a:t>
+              <a:t>The innovation is the integration, not a new algorithm</a:t>
             </a:r>
           </a:p>
         </p:txBody>
@@ -13212,7 +12925,7 @@
         </p:nvSpPr>
         <p:spPr>
           <a:xfrm>
-            <a:off x="822960" y="2113018"/>
+            <a:off x="822960" y="1783080"/>
             <a:ext cx="10424160" cy="914400"/>
           </a:xfrm>
           <a:prstGeom prst="rect">
@@ -13241,7 +12954,7 @@
                 </a:solidFill>
                 <a:latin typeface="Calibri"/>
               </a:rPr>
-              <a:t>Each individual piece is well established. Combining them into one transparent, measured-data brain profiler — that is the contribution.</a:t>
+              <a:t>Each individual piece is well established. Combining them into one transparent, measured-data brain profiler, that is the contribution.</a:t>
             </a:r>
           </a:p>
         </p:txBody>
@@ -13291,7 +13004,6 @@
           <a:lstStyle/>
           <a:p>
             <a:pPr algn="ctr"/>
-            <a:endParaRPr/>
           </a:p>
         </p:txBody>
       </p:sp>
@@ -13336,7 +13048,6 @@
           <a:lstStyle/>
           <a:p>
             <a:pPr algn="ctr"/>
-            <a:endParaRPr/>
           </a:p>
         </p:txBody>
       </p:sp>
@@ -13396,7 +13107,7 @@
                 </a:solidFill>
                 <a:latin typeface="Calibri"/>
               </a:rPr>
-              <a:t>Every probability is honest — a '90%' really behaves like 9-in-10 — and comes with a guaranteed confidence range.</a:t>
+              <a:t>Every probability is honest, a '90%' really behaves like 9-in-10, and comes with a guaranteed confidence range.</a:t>
             </a:r>
           </a:p>
         </p:txBody>
@@ -13446,7 +13157,6 @@
           <a:lstStyle/>
           <a:p>
             <a:pPr algn="ctr"/>
-            <a:endParaRPr/>
           </a:p>
         </p:txBody>
       </p:sp>
@@ -13491,7 +13201,6 @@
           <a:lstStyle/>
           <a:p>
             <a:pPr algn="ctr"/>
-            <a:endParaRPr/>
           </a:p>
         </p:txBody>
       </p:sp>
@@ -13551,7 +13260,7 @@
                 </a:solidFill>
                 <a:latin typeface="Calibri"/>
               </a:rPr>
-              <a:t>Every answer shows the nearest real, measured molecule it is based on — you can check the receipt.</a:t>
+              <a:t>Every answer shows the nearest real, measured molecule it is based on, you can check the receipt.</a:t>
             </a:r>
           </a:p>
         </p:txBody>
@@ -13601,7 +13310,6 @@
           <a:lstStyle/>
           <a:p>
             <a:pPr algn="ctr"/>
-            <a:endParaRPr/>
           </a:p>
         </p:txBody>
       </p:sp>
@@ -13646,7 +13354,6 @@
           <a:lstStyle/>
           <a:p>
             <a:pPr algn="ctr"/>
-            <a:endParaRPr/>
           </a:p>
         </p:txBody>
       </p:sp>
@@ -13720,7 +13427,7 @@
 </file>
 
 <file path=ppt/slides/slide4.xml><?xml version="1.0" encoding="utf-8"?>
-<p:sld xmlns:a="http://schemas.openxmlformats.org/drawingml/2006/main" xmlns:r="http://schemas.openxmlformats.org/officeDocument/2006/relationships" xmlns:p="http://schemas.openxmlformats.org/presentationml/2006/main">
+<p:sld xmlns:a="http://schemas.openxmlformats.org/drawingml/2006/main" xmlns:p="http://schemas.openxmlformats.org/presentationml/2006/main" xmlns:r="http://schemas.openxmlformats.org/officeDocument/2006/relationships">
   <p:cSld>
     <p:bg>
       <p:bgPr>
@@ -13736,14 +13443,7 @@
         <p:cNvGrpSpPr/>
         <p:nvPr/>
       </p:nvGrpSpPr>
-      <p:grpSpPr>
-        <a:xfrm>
-          <a:off x="0" y="0"/>
-          <a:ext cx="0" cy="0"/>
-          <a:chOff x="0" y="0"/>
-          <a:chExt cx="0" cy="0"/>
-        </a:xfrm>
-      </p:grpSpPr>
+      <p:grpSpPr/>
       <p:sp>
         <p:nvSpPr>
           <p:cNvPr id="2" name="TextBox 1"/>
@@ -13752,7 +13452,7 @@
         </p:nvSpPr>
         <p:spPr>
           <a:xfrm>
-            <a:off x="738117" y="597190"/>
+            <a:off x="822960" y="502920"/>
             <a:ext cx="10515600" cy="365760"/>
           </a:xfrm>
           <a:prstGeom prst="rect">
@@ -13827,7 +13527,6 @@
           <a:lstStyle/>
           <a:p>
             <a:pPr algn="ctr"/>
-            <a:endParaRPr/>
           </a:p>
         </p:txBody>
       </p:sp>
@@ -13868,7 +13567,7 @@
                 </a:solidFill>
                 <a:latin typeface="Georgia"/>
               </a:rPr>
-              <a:t>64,474 measured records — every one a real experiment</a:t>
+              <a:t>64,474 measured records, every one a real experiment</a:t>
             </a:r>
           </a:p>
         </p:txBody>
@@ -13892,32 +13591,14 @@
                 <a:tableStyleId>{5C22544A-7EE6-4342-B048-85BDC9FD1C3A}</a:tableStyleId>
               </a:tblPr>
               <a:tblGrid>
-                <a:gridCol w="2291899">
-                  <a:extLst>
-                    <a:ext uri="{9D8B030D-6E8A-4147-A177-3AD203B41FA5}">
-                      <a16:colId xmlns:a16="http://schemas.microsoft.com/office/drawing/2014/main" val="20000"/>
-                    </a:ext>
-                  </a:extLst>
-                </a:gridCol>
-                <a:gridCol w="3274141">
-                  <a:extLst>
-                    <a:ext uri="{9D8B030D-6E8A-4147-A177-3AD203B41FA5}">
-                      <a16:colId xmlns:a16="http://schemas.microsoft.com/office/drawing/2014/main" val="20001"/>
-                    </a:ext>
-                  </a:extLst>
-                </a:gridCol>
-                <a:gridCol w="1200518">
-                  <a:extLst>
-                    <a:ext uri="{9D8B030D-6E8A-4147-A177-3AD203B41FA5}">
-                      <a16:colId xmlns:a16="http://schemas.microsoft.com/office/drawing/2014/main" val="20002"/>
-                    </a:ext>
-                  </a:extLst>
-                </a:gridCol>
+                <a:gridCol w="2291899"/>
+                <a:gridCol w="3274141"/>
+                <a:gridCol w="1200518"/>
               </a:tblGrid>
               <a:tr h="310896">
                 <a:tc>
                   <a:txBody>
-                    <a:bodyPr/>
+                    <a:bodyPr wrap="square"/>
                     <a:lstStyle/>
                     <a:p>
                       <a:pPr algn="l"/>
@@ -13940,7 +13621,7 @@
                 </a:tc>
                 <a:tc>
                   <a:txBody>
-                    <a:bodyPr/>
+                    <a:bodyPr wrap="square"/>
                     <a:lstStyle/>
                     <a:p>
                       <a:pPr algn="ctr"/>
@@ -13963,7 +13644,7 @@
                 </a:tc>
                 <a:tc>
                   <a:txBody>
-                    <a:bodyPr/>
+                    <a:bodyPr wrap="square"/>
                     <a:lstStyle/>
                     <a:p>
                       <a:pPr algn="ctr"/>
@@ -13984,16 +13665,11 @@
                     </a:solidFill>
                   </a:tcPr>
                 </a:tc>
-                <a:extLst>
-                  <a:ext uri="{0D108BD9-81ED-4DB2-BD59-A6C34878D82A}">
-                    <a16:rowId xmlns:a16="http://schemas.microsoft.com/office/drawing/2014/main" val="10000"/>
-                  </a:ext>
-                </a:extLst>
               </a:tr>
               <a:tr h="310896">
                 <a:tc>
                   <a:txBody>
-                    <a:bodyPr/>
+                    <a:bodyPr wrap="square"/>
                     <a:lstStyle/>
                     <a:p>
                       <a:pPr algn="l"/>
@@ -14016,7 +13692,7 @@
                 </a:tc>
                 <a:tc>
                   <a:txBody>
-                    <a:bodyPr/>
+                    <a:bodyPr wrap="square"/>
                     <a:lstStyle/>
                     <a:p>
                       <a:pPr algn="ctr"/>
@@ -14039,7 +13715,7 @@
                 </a:tc>
                 <a:tc>
                   <a:txBody>
-                    <a:bodyPr/>
+                    <a:bodyPr wrap="square"/>
                     <a:lstStyle/>
                     <a:p>
                       <a:pPr algn="ctr"/>
@@ -14060,16 +13736,11 @@
                     </a:solidFill>
                   </a:tcPr>
                 </a:tc>
-                <a:extLst>
-                  <a:ext uri="{0D108BD9-81ED-4DB2-BD59-A6C34878D82A}">
-                    <a16:rowId xmlns:a16="http://schemas.microsoft.com/office/drawing/2014/main" val="10001"/>
-                  </a:ext>
-                </a:extLst>
               </a:tr>
               <a:tr h="310896">
                 <a:tc>
                   <a:txBody>
-                    <a:bodyPr/>
+                    <a:bodyPr wrap="square"/>
                     <a:lstStyle/>
                     <a:p>
                       <a:pPr algn="l"/>
@@ -14092,7 +13763,7 @@
                 </a:tc>
                 <a:tc>
                   <a:txBody>
-                    <a:bodyPr/>
+                    <a:bodyPr wrap="square"/>
                     <a:lstStyle/>
                     <a:p>
                       <a:pPr algn="ctr"/>
@@ -14115,7 +13786,7 @@
                 </a:tc>
                 <a:tc>
                   <a:txBody>
-                    <a:bodyPr/>
+                    <a:bodyPr wrap="square"/>
                     <a:lstStyle/>
                     <a:p>
                       <a:pPr algn="ctr"/>
@@ -14136,16 +13807,11 @@
                     </a:solidFill>
                   </a:tcPr>
                 </a:tc>
-                <a:extLst>
-                  <a:ext uri="{0D108BD9-81ED-4DB2-BD59-A6C34878D82A}">
-                    <a16:rowId xmlns:a16="http://schemas.microsoft.com/office/drawing/2014/main" val="10002"/>
-                  </a:ext>
-                </a:extLst>
               </a:tr>
               <a:tr h="310896">
                 <a:tc>
                   <a:txBody>
-                    <a:bodyPr/>
+                    <a:bodyPr wrap="square"/>
                     <a:lstStyle/>
                     <a:p>
                       <a:pPr algn="l"/>
@@ -14168,7 +13834,7 @@
                 </a:tc>
                 <a:tc>
                   <a:txBody>
-                    <a:bodyPr/>
+                    <a:bodyPr wrap="square"/>
                     <a:lstStyle/>
                     <a:p>
                       <a:pPr algn="ctr"/>
@@ -14191,7 +13857,7 @@
                 </a:tc>
                 <a:tc>
                   <a:txBody>
-                    <a:bodyPr/>
+                    <a:bodyPr wrap="square"/>
                     <a:lstStyle/>
                     <a:p>
                       <a:pPr algn="ctr"/>
@@ -14212,16 +13878,11 @@
                     </a:solidFill>
                   </a:tcPr>
                 </a:tc>
-                <a:extLst>
-                  <a:ext uri="{0D108BD9-81ED-4DB2-BD59-A6C34878D82A}">
-                    <a16:rowId xmlns:a16="http://schemas.microsoft.com/office/drawing/2014/main" val="10003"/>
-                  </a:ext>
-                </a:extLst>
               </a:tr>
               <a:tr h="310896">
                 <a:tc>
                   <a:txBody>
-                    <a:bodyPr/>
+                    <a:bodyPr wrap="square"/>
                     <a:lstStyle/>
                     <a:p>
                       <a:pPr algn="l"/>
@@ -14244,7 +13905,7 @@
                 </a:tc>
                 <a:tc>
                   <a:txBody>
-                    <a:bodyPr/>
+                    <a:bodyPr wrap="square"/>
                     <a:lstStyle/>
                     <a:p>
                       <a:pPr algn="ctr"/>
@@ -14267,7 +13928,7 @@
                 </a:tc>
                 <a:tc>
                   <a:txBody>
-                    <a:bodyPr/>
+                    <a:bodyPr wrap="square"/>
                     <a:lstStyle/>
                     <a:p>
                       <a:pPr algn="ctr"/>
@@ -14288,16 +13949,11 @@
                     </a:solidFill>
                   </a:tcPr>
                 </a:tc>
-                <a:extLst>
-                  <a:ext uri="{0D108BD9-81ED-4DB2-BD59-A6C34878D82A}">
-                    <a16:rowId xmlns:a16="http://schemas.microsoft.com/office/drawing/2014/main" val="10004"/>
-                  </a:ext>
-                </a:extLst>
               </a:tr>
               <a:tr h="310896">
                 <a:tc>
                   <a:txBody>
-                    <a:bodyPr/>
+                    <a:bodyPr wrap="square"/>
                     <a:lstStyle/>
                     <a:p>
                       <a:pPr algn="l"/>
@@ -14320,11 +13976,19 @@
                 </a:tc>
                 <a:tc>
                   <a:txBody>
-                    <a:bodyPr/>
+                    <a:bodyPr wrap="square"/>
                     <a:lstStyle/>
                     <a:p>
                       <a:pPr algn="ctr"/>
-                      <a:endParaRPr/>
+                      <a:r>
+                        <a:rPr sz="1150" b="1">
+                          <a:solidFill>
+                            <a:srgbClr val="16222F"/>
+                          </a:solidFill>
+                          <a:latin typeface="Consolas"/>
+                        </a:rPr>
+                        <a:t/>
+                      </a:r>
                     </a:p>
                   </a:txBody>
                   <a:tcPr marL="73152" marR="73152" marT="18288" marB="18288" anchor="ctr">
@@ -14335,7 +13999,7 @@
                 </a:tc>
                 <a:tc>
                   <a:txBody>
-                    <a:bodyPr/>
+                    <a:bodyPr wrap="square"/>
                     <a:lstStyle/>
                     <a:p>
                       <a:pPr algn="ctr"/>
@@ -14356,11 +14020,6 @@
                     </a:solidFill>
                   </a:tcPr>
                 </a:tc>
-                <a:extLst>
-                  <a:ext uri="{0D108BD9-81ED-4DB2-BD59-A6C34878D82A}">
-                    <a16:rowId xmlns:a16="http://schemas.microsoft.com/office/drawing/2014/main" val="10005"/>
-                  </a:ext>
-                </a:extLst>
               </a:tr>
             </a:tbl>
           </a:graphicData>
@@ -14409,7 +14068,7 @@
                 </a:solidFill>
                 <a:latin typeface="Calibri"/>
               </a:rPr>
-              <a:t>Public, reproducible sources — ChEMBL and B3DB.</a:t>
+              <a:t>Public, reproducible sources, ChEMBL and B3DB.</a:t>
             </a:r>
           </a:p>
           <a:p>
@@ -14507,7 +14166,6 @@
           <a:lstStyle/>
           <a:p>
             <a:pPr algn="ctr"/>
-            <a:endParaRPr/>
           </a:p>
         </p:txBody>
       </p:sp>
@@ -14552,7 +14210,6 @@
           <a:lstStyle/>
           <a:p>
             <a:pPr algn="ctr"/>
-            <a:endParaRPr/>
           </a:p>
         </p:txBody>
       </p:sp>
@@ -14599,7 +14256,7 @@
                 </a:solidFill>
                 <a:latin typeface="Calibri"/>
               </a:rPr>
-              <a:t>'measured' means someone physically tested each molecule in a lab and recorded the result. The tool learns from tens of thousands of these real results — it is not making things up from text on the internet.</a:t>
+              <a:t>'measured' means someone physically tested each molecule in a lab and recorded the result. The tool learns from tens of thousands of these real results, it is not making things up from text on the internet.</a:t>
             </a:r>
           </a:p>
         </p:txBody>
@@ -14613,7 +14270,7 @@
 </file>
 
 <file path=ppt/slides/slide5.xml><?xml version="1.0" encoding="utf-8"?>
-<p:sld xmlns:a="http://schemas.openxmlformats.org/drawingml/2006/main" xmlns:r="http://schemas.openxmlformats.org/officeDocument/2006/relationships" xmlns:p="http://schemas.openxmlformats.org/presentationml/2006/main">
+<p:sld xmlns:a="http://schemas.openxmlformats.org/drawingml/2006/main" xmlns:p="http://schemas.openxmlformats.org/presentationml/2006/main" xmlns:r="http://schemas.openxmlformats.org/officeDocument/2006/relationships">
   <p:cSld>
     <p:bg>
       <p:bgPr>
@@ -14629,14 +14286,7 @@
         <p:cNvGrpSpPr/>
         <p:nvPr/>
       </p:nvGrpSpPr>
-      <p:grpSpPr>
-        <a:xfrm>
-          <a:off x="0" y="0"/>
-          <a:ext cx="0" cy="0"/>
-          <a:chOff x="0" y="0"/>
-          <a:chExt cx="0" cy="0"/>
-        </a:xfrm>
-      </p:grpSpPr>
+      <p:grpSpPr/>
       <p:sp>
         <p:nvSpPr>
           <p:cNvPr id="2" name="TextBox 1"/>
@@ -14645,7 +14295,7 @@
         </p:nvSpPr>
         <p:spPr>
           <a:xfrm>
-            <a:off x="747544" y="578336"/>
+            <a:off x="822960" y="502920"/>
             <a:ext cx="10515600" cy="365760"/>
           </a:xfrm>
           <a:prstGeom prst="rect">
@@ -14668,7 +14318,7 @@
               </a:spcAft>
             </a:pPr>
             <a:r>
-              <a:rPr sz="1200" b="1" i="0" dirty="0">
+              <a:rPr sz="1200" b="1" i="0">
                 <a:solidFill>
                   <a:srgbClr val="0072B2"/>
                 </a:solidFill>
@@ -14720,7 +14370,6 @@
           <a:lstStyle/>
           <a:p>
             <a:pPr algn="ctr"/>
-            <a:endParaRPr/>
           </a:p>
         </p:txBody>
       </p:sp>
@@ -14785,32 +14434,14 @@
                 <a:tableStyleId>{5C22544A-7EE6-4342-B048-85BDC9FD1C3A}</a:tableStyleId>
               </a:tblPr>
               <a:tblGrid>
-                <a:gridCol w="2380015">
-                  <a:extLst>
-                    <a:ext uri="{9D8B030D-6E8A-4147-A177-3AD203B41FA5}">
-                      <a16:colId xmlns:a16="http://schemas.microsoft.com/office/drawing/2014/main" val="20000"/>
-                    </a:ext>
-                  </a:extLst>
-                </a:gridCol>
-                <a:gridCol w="3272521">
-                  <a:extLst>
-                    <a:ext uri="{9D8B030D-6E8A-4147-A177-3AD203B41FA5}">
-                      <a16:colId xmlns:a16="http://schemas.microsoft.com/office/drawing/2014/main" val="20001"/>
-                    </a:ext>
-                  </a:extLst>
-                </a:gridCol>
-                <a:gridCol w="1388342">
-                  <a:extLst>
-                    <a:ext uri="{9D8B030D-6E8A-4147-A177-3AD203B41FA5}">
-                      <a16:colId xmlns:a16="http://schemas.microsoft.com/office/drawing/2014/main" val="20002"/>
-                    </a:ext>
-                  </a:extLst>
-                </a:gridCol>
+                <a:gridCol w="2380015"/>
+                <a:gridCol w="3272521"/>
+                <a:gridCol w="1388342"/>
               </a:tblGrid>
               <a:tr h="384048">
                 <a:tc>
                   <a:txBody>
-                    <a:bodyPr/>
+                    <a:bodyPr wrap="square"/>
                     <a:lstStyle/>
                     <a:p>
                       <a:pPr algn="l"/>
@@ -14833,7 +14464,7 @@
                 </a:tc>
                 <a:tc>
                   <a:txBody>
-                    <a:bodyPr/>
+                    <a:bodyPr wrap="square"/>
                     <a:lstStyle/>
                     <a:p>
                       <a:pPr algn="ctr"/>
@@ -14856,7 +14487,7 @@
                 </a:tc>
                 <a:tc>
                   <a:txBody>
-                    <a:bodyPr/>
+                    <a:bodyPr wrap="square"/>
                     <a:lstStyle/>
                     <a:p>
                       <a:pPr algn="ctr"/>
@@ -14877,16 +14508,11 @@
                     </a:solidFill>
                   </a:tcPr>
                 </a:tc>
-                <a:extLst>
-                  <a:ext uri="{0D108BD9-81ED-4DB2-BD59-A6C34878D82A}">
-                    <a16:rowId xmlns:a16="http://schemas.microsoft.com/office/drawing/2014/main" val="10000"/>
-                  </a:ext>
-                </a:extLst>
               </a:tr>
               <a:tr h="384048">
                 <a:tc>
                   <a:txBody>
-                    <a:bodyPr/>
+                    <a:bodyPr wrap="square"/>
                     <a:lstStyle/>
                     <a:p>
                       <a:pPr algn="l"/>
@@ -14909,7 +14535,7 @@
                 </a:tc>
                 <a:tc>
                   <a:txBody>
-                    <a:bodyPr/>
+                    <a:bodyPr wrap="square"/>
                     <a:lstStyle/>
                     <a:p>
                       <a:pPr algn="ctr"/>
@@ -14932,7 +14558,7 @@
                 </a:tc>
                 <a:tc>
                   <a:txBody>
-                    <a:bodyPr/>
+                    <a:bodyPr wrap="square"/>
                     <a:lstStyle/>
                     <a:p>
                       <a:pPr algn="ctr"/>
@@ -14953,16 +14579,11 @@
                     </a:solidFill>
                   </a:tcPr>
                 </a:tc>
-                <a:extLst>
-                  <a:ext uri="{0D108BD9-81ED-4DB2-BD59-A6C34878D82A}">
-                    <a16:rowId xmlns:a16="http://schemas.microsoft.com/office/drawing/2014/main" val="10001"/>
-                  </a:ext>
-                </a:extLst>
               </a:tr>
               <a:tr h="384048">
                 <a:tc>
                   <a:txBody>
-                    <a:bodyPr/>
+                    <a:bodyPr wrap="square"/>
                     <a:lstStyle/>
                     <a:p>
                       <a:pPr algn="l"/>
@@ -14985,7 +14606,7 @@
                 </a:tc>
                 <a:tc>
                   <a:txBody>
-                    <a:bodyPr/>
+                    <a:bodyPr wrap="square"/>
                     <a:lstStyle/>
                     <a:p>
                       <a:pPr algn="ctr"/>
@@ -15008,7 +14629,7 @@
                 </a:tc>
                 <a:tc>
                   <a:txBody>
-                    <a:bodyPr/>
+                    <a:bodyPr wrap="square"/>
                     <a:lstStyle/>
                     <a:p>
                       <a:pPr algn="ctr"/>
@@ -15029,16 +14650,11 @@
                     </a:solidFill>
                   </a:tcPr>
                 </a:tc>
-                <a:extLst>
-                  <a:ext uri="{0D108BD9-81ED-4DB2-BD59-A6C34878D82A}">
-                    <a16:rowId xmlns:a16="http://schemas.microsoft.com/office/drawing/2014/main" val="10002"/>
-                  </a:ext>
-                </a:extLst>
               </a:tr>
               <a:tr h="384048">
                 <a:tc>
                   <a:txBody>
-                    <a:bodyPr/>
+                    <a:bodyPr wrap="square"/>
                     <a:lstStyle/>
                     <a:p>
                       <a:pPr algn="l"/>
@@ -15061,7 +14677,7 @@
                 </a:tc>
                 <a:tc>
                   <a:txBody>
-                    <a:bodyPr/>
+                    <a:bodyPr wrap="square"/>
                     <a:lstStyle/>
                     <a:p>
                       <a:pPr algn="ctr"/>
@@ -15084,7 +14700,7 @@
                 </a:tc>
                 <a:tc>
                   <a:txBody>
-                    <a:bodyPr/>
+                    <a:bodyPr wrap="square"/>
                     <a:lstStyle/>
                     <a:p>
                       <a:pPr algn="ctr"/>
@@ -15105,16 +14721,11 @@
                     </a:solidFill>
                   </a:tcPr>
                 </a:tc>
-                <a:extLst>
-                  <a:ext uri="{0D108BD9-81ED-4DB2-BD59-A6C34878D82A}">
-                    <a16:rowId xmlns:a16="http://schemas.microsoft.com/office/drawing/2014/main" val="10003"/>
-                  </a:ext>
-                </a:extLst>
               </a:tr>
               <a:tr h="384048">
                 <a:tc>
                   <a:txBody>
-                    <a:bodyPr/>
+                    <a:bodyPr wrap="square"/>
                     <a:lstStyle/>
                     <a:p>
                       <a:pPr algn="l"/>
@@ -15137,7 +14748,7 @@
                 </a:tc>
                 <a:tc>
                   <a:txBody>
-                    <a:bodyPr/>
+                    <a:bodyPr wrap="square"/>
                     <a:lstStyle/>
                     <a:p>
                       <a:pPr algn="ctr"/>
@@ -15160,7 +14771,7 @@
                 </a:tc>
                 <a:tc>
                   <a:txBody>
-                    <a:bodyPr/>
+                    <a:bodyPr wrap="square"/>
                     <a:lstStyle/>
                     <a:p>
                       <a:pPr algn="ctr"/>
@@ -15181,16 +14792,11 @@
                     </a:solidFill>
                   </a:tcPr>
                 </a:tc>
-                <a:extLst>
-                  <a:ext uri="{0D108BD9-81ED-4DB2-BD59-A6C34878D82A}">
-                    <a16:rowId xmlns:a16="http://schemas.microsoft.com/office/drawing/2014/main" val="10004"/>
-                  </a:ext>
-                </a:extLst>
               </a:tr>
               <a:tr h="384048">
                 <a:tc>
                   <a:txBody>
-                    <a:bodyPr/>
+                    <a:bodyPr wrap="square"/>
                     <a:lstStyle/>
                     <a:p>
                       <a:pPr algn="l"/>
@@ -15213,7 +14819,7 @@
                 </a:tc>
                 <a:tc>
                   <a:txBody>
-                    <a:bodyPr/>
+                    <a:bodyPr wrap="square"/>
                     <a:lstStyle/>
                     <a:p>
                       <a:pPr algn="ctr"/>
@@ -15236,7 +14842,7 @@
                 </a:tc>
                 <a:tc>
                   <a:txBody>
-                    <a:bodyPr/>
+                    <a:bodyPr wrap="square"/>
                     <a:lstStyle/>
                     <a:p>
                       <a:pPr algn="ctr"/>
@@ -15257,16 +14863,11 @@
                     </a:solidFill>
                   </a:tcPr>
                 </a:tc>
-                <a:extLst>
-                  <a:ext uri="{0D108BD9-81ED-4DB2-BD59-A6C34878D82A}">
-                    <a16:rowId xmlns:a16="http://schemas.microsoft.com/office/drawing/2014/main" val="10005"/>
-                  </a:ext>
-                </a:extLst>
               </a:tr>
               <a:tr h="384048">
                 <a:tc>
                   <a:txBody>
-                    <a:bodyPr/>
+                    <a:bodyPr wrap="square"/>
                     <a:lstStyle/>
                     <a:p>
                       <a:pPr algn="l"/>
@@ -15289,7 +14890,7 @@
                 </a:tc>
                 <a:tc>
                   <a:txBody>
-                    <a:bodyPr/>
+                    <a:bodyPr wrap="square"/>
                     <a:lstStyle/>
                     <a:p>
                       <a:pPr algn="ctr"/>
@@ -15312,7 +14913,7 @@
                 </a:tc>
                 <a:tc>
                   <a:txBody>
-                    <a:bodyPr/>
+                    <a:bodyPr wrap="square"/>
                     <a:lstStyle/>
                     <a:p>
                       <a:pPr algn="ctr"/>
@@ -15333,16 +14934,11 @@
                     </a:solidFill>
                   </a:tcPr>
                 </a:tc>
-                <a:extLst>
-                  <a:ext uri="{0D108BD9-81ED-4DB2-BD59-A6C34878D82A}">
-                    <a16:rowId xmlns:a16="http://schemas.microsoft.com/office/drawing/2014/main" val="10006"/>
-                  </a:ext>
-                </a:extLst>
               </a:tr>
               <a:tr h="384048">
                 <a:tc>
                   <a:txBody>
-                    <a:bodyPr/>
+                    <a:bodyPr wrap="square"/>
                     <a:lstStyle/>
                     <a:p>
                       <a:pPr algn="l"/>
@@ -15365,7 +14961,7 @@
                 </a:tc>
                 <a:tc>
                   <a:txBody>
-                    <a:bodyPr/>
+                    <a:bodyPr wrap="square"/>
                     <a:lstStyle/>
                     <a:p>
                       <a:pPr algn="ctr"/>
@@ -15388,7 +14984,7 @@
                 </a:tc>
                 <a:tc>
                   <a:txBody>
-                    <a:bodyPr/>
+                    <a:bodyPr wrap="square"/>
                     <a:lstStyle/>
                     <a:p>
                       <a:pPr algn="ctr"/>
@@ -15409,16 +15005,11 @@
                     </a:solidFill>
                   </a:tcPr>
                 </a:tc>
-                <a:extLst>
-                  <a:ext uri="{0D108BD9-81ED-4DB2-BD59-A6C34878D82A}">
-                    <a16:rowId xmlns:a16="http://schemas.microsoft.com/office/drawing/2014/main" val="10007"/>
-                  </a:ext>
-                </a:extLst>
               </a:tr>
               <a:tr h="384048">
                 <a:tc>
                   <a:txBody>
-                    <a:bodyPr/>
+                    <a:bodyPr wrap="square"/>
                     <a:lstStyle/>
                     <a:p>
                       <a:pPr algn="l"/>
@@ -15441,7 +15032,7 @@
                 </a:tc>
                 <a:tc>
                   <a:txBody>
-                    <a:bodyPr/>
+                    <a:bodyPr wrap="square"/>
                     <a:lstStyle/>
                     <a:p>
                       <a:pPr algn="ctr"/>
@@ -15464,7 +15055,7 @@
                 </a:tc>
                 <a:tc>
                   <a:txBody>
-                    <a:bodyPr/>
+                    <a:bodyPr wrap="square"/>
                     <a:lstStyle/>
                     <a:p>
                       <a:pPr algn="ctr"/>
@@ -15485,16 +15076,11 @@
                     </a:solidFill>
                   </a:tcPr>
                 </a:tc>
-                <a:extLst>
-                  <a:ext uri="{0D108BD9-81ED-4DB2-BD59-A6C34878D82A}">
-                    <a16:rowId xmlns:a16="http://schemas.microsoft.com/office/drawing/2014/main" val="10008"/>
-                  </a:ext>
-                </a:extLst>
               </a:tr>
               <a:tr h="384048">
                 <a:tc>
                   <a:txBody>
-                    <a:bodyPr/>
+                    <a:bodyPr wrap="square"/>
                     <a:lstStyle/>
                     <a:p>
                       <a:pPr algn="l"/>
@@ -15517,7 +15103,7 @@
                 </a:tc>
                 <a:tc>
                   <a:txBody>
-                    <a:bodyPr/>
+                    <a:bodyPr wrap="square"/>
                     <a:lstStyle/>
                     <a:p>
                       <a:pPr algn="ctr"/>
@@ -15540,7 +15126,7 @@
                 </a:tc>
                 <a:tc>
                   <a:txBody>
-                    <a:bodyPr/>
+                    <a:bodyPr wrap="square"/>
                     <a:lstStyle/>
                     <a:p>
                       <a:pPr algn="ctr"/>
@@ -15561,11 +15147,6 @@
                     </a:solidFill>
                   </a:tcPr>
                 </a:tc>
-                <a:extLst>
-                  <a:ext uri="{0D108BD9-81ED-4DB2-BD59-A6C34878D82A}">
-                    <a16:rowId xmlns:a16="http://schemas.microsoft.com/office/drawing/2014/main" val="10009"/>
-                  </a:ext>
-                </a:extLst>
               </a:tr>
             </a:tbl>
           </a:graphicData>
@@ -15677,7 +15258,7 @@
                 </a:solidFill>
                 <a:latin typeface="Calibri"/>
               </a:rPr>
-              <a:t>Why the split? The four receptors were 96–98% actives in the data — too lopsided for a fair yes/no model — so the tool ranks their strength instead. A quality gate decides this automatically.</a:t>
+              <a:t>Why the split? The four receptors were 96–98% actives in the data, too lopsided for a fair yes/no model, so the tool ranks their strength instead. A quality gate decides this automatically.</a:t>
             </a:r>
           </a:p>
         </p:txBody>
@@ -15691,14 +15272,12 @@
 </file>
 
 <file path=ppt/slides/slide6.xml><?xml version="1.0" encoding="utf-8"?>
-<p:sld xmlns:a="http://schemas.openxmlformats.org/drawingml/2006/main" xmlns:r="http://schemas.openxmlformats.org/officeDocument/2006/relationships" xmlns:p="http://schemas.openxmlformats.org/presentationml/2006/main">
+<p:sld xmlns:a="http://schemas.openxmlformats.org/drawingml/2006/main" xmlns:p="http://schemas.openxmlformats.org/presentationml/2006/main" xmlns:r="http://schemas.openxmlformats.org/officeDocument/2006/relationships">
   <p:cSld>
     <p:bg>
       <p:bgPr>
         <a:solidFill>
-          <a:schemeClr val="tx2">
-            <a:lumMod val="50000"/>
-          </a:schemeClr>
+          <a:srgbClr val="0D1B2A"/>
         </a:solidFill>
         <a:effectLst/>
       </p:bgPr>
@@ -15709,14 +15288,7 @@
         <p:cNvGrpSpPr/>
         <p:nvPr/>
       </p:nvGrpSpPr>
-      <p:grpSpPr>
-        <a:xfrm>
-          <a:off x="0" y="0"/>
-          <a:ext cx="0" cy="0"/>
-          <a:chOff x="0" y="0"/>
-          <a:chExt cx="0" cy="0"/>
-        </a:xfrm>
-      </p:grpSpPr>
+      <p:grpSpPr/>
       <p:sp>
         <p:nvSpPr>
           <p:cNvPr id="2" name="TextBox 1"/>
@@ -15725,7 +15297,7 @@
         </p:nvSpPr>
         <p:spPr>
           <a:xfrm>
-            <a:off x="777240" y="675337"/>
+            <a:off x="822960" y="502920"/>
             <a:ext cx="10515600" cy="365760"/>
           </a:xfrm>
           <a:prstGeom prst="rect">
@@ -15748,7 +15320,7 @@
               </a:spcAft>
             </a:pPr>
             <a:r>
-              <a:rPr sz="1200" b="1" i="0" dirty="0">
+              <a:rPr sz="1200" b="1" i="0">
                 <a:solidFill>
                   <a:srgbClr val="56B4E9"/>
                 </a:solidFill>
@@ -15800,7 +15372,6 @@
           <a:lstStyle/>
           <a:p>
             <a:pPr algn="ctr"/>
-            <a:endParaRPr/>
           </a:p>
         </p:txBody>
       </p:sp>
@@ -15835,13 +15406,13 @@
               </a:spcAft>
             </a:pPr>
             <a:r>
-              <a:rPr sz="3300" b="1" i="0" dirty="0">
+              <a:rPr sz="3300" b="1" i="0">
                 <a:solidFill>
                   <a:srgbClr val="FFFFFF"/>
                 </a:solidFill>
                 <a:latin typeface="Georgia"/>
               </a:rPr>
-              <a:t>How the computer 'sees' a molecule — and learns</a:t>
+              <a:t>How the computer 'sees' a molecule, and learns</a:t>
             </a:r>
           </a:p>
         </p:txBody>
@@ -15854,7 +15425,7 @@
         </p:nvSpPr>
         <p:spPr>
           <a:xfrm>
-            <a:off x="822960" y="1999897"/>
+            <a:off x="822960" y="1783080"/>
             <a:ext cx="5212080" cy="4023360"/>
           </a:xfrm>
           <a:prstGeom prst="roundRect">
@@ -15891,7 +15462,6 @@
           <a:lstStyle/>
           <a:p>
             <a:pPr algn="ctr"/>
-            <a:endParaRPr/>
           </a:p>
         </p:txBody>
       </p:sp>
@@ -15903,7 +15473,7 @@
         </p:nvSpPr>
         <p:spPr>
           <a:xfrm>
-            <a:off x="1127760" y="2057400"/>
+            <a:off x="1097280" y="2011680"/>
             <a:ext cx="4663440" cy="3657600"/>
           </a:xfrm>
           <a:prstGeom prst="rect">
@@ -15926,7 +15496,7 @@
               </a:spcAft>
             </a:pPr>
             <a:r>
-              <a:rPr sz="1700" b="1" i="0" dirty="0">
+              <a:rPr sz="1700" b="1" i="0">
                 <a:solidFill>
                   <a:srgbClr val="FFFFFF"/>
                 </a:solidFill>
@@ -15942,7 +15512,7 @@
               </a:spcAft>
             </a:pPr>
             <a:r>
-              <a:rPr sz="1350" b="1" dirty="0">
+              <a:rPr sz="1350" b="1">
                 <a:solidFill>
                   <a:srgbClr val="0072B2"/>
                 </a:solidFill>
@@ -15951,7 +15521,7 @@
               <a:t>▪  </a:t>
             </a:r>
             <a:r>
-              <a:rPr sz="1350" b="1" dirty="0">
+              <a:rPr sz="1350" b="1">
                 <a:solidFill>
                   <a:srgbClr val="56B4E9"/>
                 </a:solidFill>
@@ -15960,13 +15530,13 @@
               <a:t>Chemical fingerprint (ECFP-4)</a:t>
             </a:r>
             <a:r>
-              <a:rPr sz="1350" b="0" dirty="0">
+              <a:rPr sz="1350" b="0">
                 <a:solidFill>
                   <a:srgbClr val="EAF1F7"/>
                 </a:solidFill>
                 <a:latin typeface="Calibri"/>
               </a:rPr>
-              <a:t> — a 1,024-bit 'barcode' of the molecule's building blocks.</a:t>
+              <a:t>, a 1,024-bit 'barcode' of the molecule's building blocks.</a:t>
             </a:r>
           </a:p>
           <a:p>
@@ -15976,7 +15546,7 @@
               </a:spcAft>
             </a:pPr>
             <a:r>
-              <a:rPr sz="1350" b="1" dirty="0">
+              <a:rPr sz="1350" b="1">
                 <a:solidFill>
                   <a:srgbClr val="0072B2"/>
                 </a:solidFill>
@@ -15985,7 +15555,7 @@
               <a:t>▪  </a:t>
             </a:r>
             <a:r>
-              <a:rPr sz="1350" b="1" dirty="0">
+              <a:rPr sz="1350" b="1">
                 <a:solidFill>
                   <a:srgbClr val="56B4E9"/>
                 </a:solidFill>
@@ -15994,13 +15564,13 @@
               <a:t>24 physical descriptors</a:t>
             </a:r>
             <a:r>
-              <a:rPr sz="1350" b="0" dirty="0">
+              <a:rPr sz="1350" b="0">
                 <a:solidFill>
                   <a:srgbClr val="EAF1F7"/>
                 </a:solidFill>
                 <a:latin typeface="Calibri"/>
               </a:rPr>
-              <a:t> — size, greasiness, surface area, flexibility, drug-likeness.</a:t>
+              <a:t>, size, greasiness, surface area, flexibility, drug-likeness.</a:t>
             </a:r>
           </a:p>
           <a:p>
@@ -16010,7 +15580,7 @@
               </a:spcAft>
             </a:pPr>
             <a:r>
-              <a:rPr sz="1350" b="1" dirty="0">
+              <a:rPr sz="1350" b="1">
                 <a:solidFill>
                   <a:srgbClr val="0072B2"/>
                 </a:solidFill>
@@ -16019,7 +15589,7 @@
               <a:t>▪  </a:t>
             </a:r>
             <a:r>
-              <a:rPr sz="1350" b="1" dirty="0">
+              <a:rPr sz="1350" b="1">
                 <a:solidFill>
                   <a:srgbClr val="E69000"/>
                 </a:solidFill>
@@ -16028,7 +15598,7 @@
               <a:t>Why this?</a:t>
             </a:r>
             <a:r>
-              <a:rPr sz="1350" b="0" dirty="0">
+              <a:rPr sz="1350" b="0">
                 <a:solidFill>
                   <a:srgbClr val="EAF1F7"/>
                 </a:solidFill>
@@ -16047,7 +15617,7 @@
         </p:nvSpPr>
         <p:spPr>
           <a:xfrm>
-            <a:off x="6309360" y="2075311"/>
+            <a:off x="6309360" y="1783080"/>
             <a:ext cx="5029200" cy="4023360"/>
           </a:xfrm>
           <a:prstGeom prst="roundRect">
@@ -16084,7 +15654,6 @@
           <a:lstStyle/>
           <a:p>
             <a:pPr algn="ctr"/>
-            <a:endParaRPr/>
           </a:p>
         </p:txBody>
       </p:sp>
@@ -16096,7 +15665,7 @@
         </p:nvSpPr>
         <p:spPr>
           <a:xfrm>
-            <a:off x="6583680" y="2124804"/>
+            <a:off x="6583680" y="2011680"/>
             <a:ext cx="4480560" cy="3657600"/>
           </a:xfrm>
           <a:prstGeom prst="rect">
@@ -16119,7 +15688,7 @@
               </a:spcAft>
             </a:pPr>
             <a:r>
-              <a:rPr sz="1700" b="1" i="0" dirty="0">
+              <a:rPr sz="1700" b="1" i="0">
                 <a:solidFill>
                   <a:srgbClr val="FFFFFF"/>
                 </a:solidFill>
@@ -16135,7 +15704,7 @@
               </a:spcAft>
             </a:pPr>
             <a:r>
-              <a:rPr sz="1350" b="1" dirty="0">
+              <a:rPr sz="1350" b="1">
                 <a:solidFill>
                   <a:srgbClr val="0072B2"/>
                 </a:solidFill>
@@ -16144,13 +15713,13 @@
               <a:t>▪  </a:t>
             </a:r>
             <a:r>
-              <a:rPr sz="1350" b="0" dirty="0">
+              <a:rPr sz="1350" b="0">
                 <a:solidFill>
                   <a:srgbClr val="EAF1F7"/>
                 </a:solidFill>
                 <a:latin typeface="Calibri"/>
               </a:rPr>
-              <a:t>Random Forest — 300 decision trees</a:t>
+              <a:t>Random Forest, 300 decision trees</a:t>
             </a:r>
           </a:p>
           <a:p>
@@ -16160,7 +15729,7 @@
               </a:spcAft>
             </a:pPr>
             <a:r>
-              <a:rPr sz="1350" b="1" dirty="0">
+              <a:rPr sz="1350" b="1">
                 <a:solidFill>
                   <a:srgbClr val="0072B2"/>
                 </a:solidFill>
@@ -16169,31 +15738,13 @@
               <a:t>▪  </a:t>
             </a:r>
             <a:r>
-              <a:rPr sz="1350" b="0" dirty="0">
+              <a:rPr sz="1350" b="0">
                 <a:solidFill>
                   <a:srgbClr val="EAF1F7"/>
                 </a:solidFill>
                 <a:latin typeface="Calibri"/>
               </a:rPr>
-              <a:t>Extra Trees — 300 </a:t>
-            </a:r>
-            <a:r>
-              <a:rPr sz="1350" b="0" dirty="0" err="1">
-                <a:solidFill>
-                  <a:srgbClr val="EAF1F7"/>
-                </a:solidFill>
-                <a:latin typeface="Calibri"/>
-              </a:rPr>
-              <a:t>randomised</a:t>
-            </a:r>
-            <a:r>
-              <a:rPr sz="1350" b="0" dirty="0">
-                <a:solidFill>
-                  <a:srgbClr val="EAF1F7"/>
-                </a:solidFill>
-                <a:latin typeface="Calibri"/>
-              </a:rPr>
-              <a:t> trees</a:t>
+              <a:t>Extra Trees, 300 randomised trees</a:t>
             </a:r>
           </a:p>
           <a:p>
@@ -16203,7 +15754,7 @@
               </a:spcAft>
             </a:pPr>
             <a:r>
-              <a:rPr sz="1350" b="1" dirty="0">
+              <a:rPr sz="1350" b="1">
                 <a:solidFill>
                   <a:srgbClr val="0072B2"/>
                 </a:solidFill>
@@ -16212,13 +15763,13 @@
               <a:t>▪  </a:t>
             </a:r>
             <a:r>
-              <a:rPr sz="1350" b="0" dirty="0">
+              <a:rPr sz="1350" b="0">
                 <a:solidFill>
                   <a:srgbClr val="EAF1F7"/>
                 </a:solidFill>
                 <a:latin typeface="Calibri"/>
               </a:rPr>
-              <a:t>Gradient Boosting — 300 rounds</a:t>
+              <a:t>Gradient Boosting, 300 rounds</a:t>
             </a:r>
           </a:p>
           <a:p>
@@ -16228,7 +15779,7 @@
               </a:spcAft>
             </a:pPr>
             <a:r>
-              <a:rPr sz="1350" b="1" dirty="0">
+              <a:rPr sz="1350" b="1">
                 <a:solidFill>
                   <a:srgbClr val="009E73"/>
                 </a:solidFill>
@@ -16237,13 +15788,13 @@
               <a:t>Why a panel?</a:t>
             </a:r>
             <a:r>
-              <a:rPr sz="1350" b="0" dirty="0">
+              <a:rPr sz="1350" b="0">
                 <a:solidFill>
                   <a:srgbClr val="EAF1F7"/>
                 </a:solidFill>
                 <a:latin typeface="Calibri"/>
               </a:rPr>
-              <a:t> averaging three different learners is steadier and more accurate than any one — and beats simpler methods (shown next).</a:t>
+              <a:t> averaging three different learners is steadier and more accurate than any one, and beats simpler methods (shown next).</a:t>
             </a:r>
           </a:p>
         </p:txBody>
@@ -16291,7 +15842,6 @@
           <a:lstStyle/>
           <a:p>
             <a:pPr algn="ctr"/>
-            <a:endParaRPr/>
           </a:p>
         </p:txBody>
       </p:sp>
@@ -16336,7 +15886,54 @@
           <a:lstStyle/>
           <a:p>
             <a:pPr algn="ctr"/>
-            <a:endParaRPr/>
+          </a:p>
+        </p:txBody>
+      </p:sp>
+      <p:sp>
+        <p:nvSpPr>
+          <p:cNvPr id="11" name="TextBox 10"/>
+          <p:cNvSpPr txBox="1"/>
+          <p:nvPr/>
+        </p:nvSpPr>
+        <p:spPr>
+          <a:xfrm>
+            <a:off x="987552" y="6044183"/>
+            <a:ext cx="10241280" cy="-109728"/>
+          </a:xfrm>
+          <a:prstGeom prst="rect">
+            <a:avLst/>
+          </a:prstGeom>
+          <a:noFill/>
+        </p:spPr>
+        <p:txBody>
+          <a:bodyPr wrap="square" anchor="ctr">
+            <a:spAutoFit/>
+          </a:bodyPr>
+          <a:lstStyle/>
+          <a:p>
+            <a:pPr algn="l">
+              <a:spcAft>
+                <a:spcPts val="0"/>
+              </a:spcAft>
+            </a:pPr>
+            <a:r>
+              <a:rPr sz="1250" b="1">
+                <a:solidFill>
+                  <a:srgbClr val="0072B2"/>
+                </a:solidFill>
+                <a:latin typeface="Calibri"/>
+              </a:rPr>
+              <a:t>In plain terms:  </a:t>
+            </a:r>
+            <a:r>
+              <a:rPr sz="1250" b="0">
+                <a:solidFill>
+                  <a:srgbClr val="16222F"/>
+                </a:solidFill>
+                <a:latin typeface="Calibri"/>
+              </a:rPr>
+              <a:t/>
+            </a:r>
           </a:p>
         </p:txBody>
       </p:sp>
@@ -16349,7 +15946,7 @@
 </file>
 
 <file path=ppt/slides/slide7.xml><?xml version="1.0" encoding="utf-8"?>
-<p:sld xmlns:a="http://schemas.openxmlformats.org/drawingml/2006/main" xmlns:r="http://schemas.openxmlformats.org/officeDocument/2006/relationships" xmlns:p="http://schemas.openxmlformats.org/presentationml/2006/main">
+<p:sld xmlns:a="http://schemas.openxmlformats.org/drawingml/2006/main" xmlns:p="http://schemas.openxmlformats.org/presentationml/2006/main" xmlns:r="http://schemas.openxmlformats.org/officeDocument/2006/relationships">
   <p:cSld>
     <p:bg>
       <p:bgPr>
@@ -16365,14 +15962,7 @@
         <p:cNvGrpSpPr/>
         <p:nvPr/>
       </p:nvGrpSpPr>
-      <p:grpSpPr>
-        <a:xfrm>
-          <a:off x="0" y="0"/>
-          <a:ext cx="0" cy="0"/>
-          <a:chOff x="0" y="0"/>
-          <a:chExt cx="0" cy="0"/>
-        </a:xfrm>
-      </p:grpSpPr>
+      <p:grpSpPr/>
       <p:sp>
         <p:nvSpPr>
           <p:cNvPr id="2" name="TextBox 1"/>
@@ -16381,7 +15971,7 @@
         </p:nvSpPr>
         <p:spPr>
           <a:xfrm>
-            <a:off x="725240" y="663461"/>
+            <a:off x="822960" y="502920"/>
             <a:ext cx="10515600" cy="365760"/>
           </a:xfrm>
           <a:prstGeom prst="rect">
@@ -16404,7 +15994,7 @@
               </a:spcAft>
             </a:pPr>
             <a:r>
-              <a:rPr sz="1200" b="1" i="0" dirty="0">
+              <a:rPr sz="1200" b="1" i="0">
                 <a:solidFill>
                   <a:srgbClr val="0072B2"/>
                 </a:solidFill>
@@ -16456,7 +16046,6 @@
           <a:lstStyle/>
           <a:p>
             <a:pPr algn="ctr"/>
-            <a:endParaRPr/>
           </a:p>
         </p:txBody>
       </p:sp>
@@ -16468,7 +16057,7 @@
         </p:nvSpPr>
         <p:spPr>
           <a:xfrm>
-            <a:off x="822960" y="959420"/>
+            <a:off x="822960" y="868680"/>
             <a:ext cx="10515600" cy="1188720"/>
           </a:xfrm>
           <a:prstGeom prst="rect">
@@ -16491,7 +16080,7 @@
               </a:spcAft>
             </a:pPr>
             <a:r>
-              <a:rPr sz="3300" b="1" i="0" dirty="0">
+              <a:rPr sz="3300" b="1" i="0">
                 <a:solidFill>
                   <a:srgbClr val="16222F"/>
                 </a:solidFill>
@@ -16547,7 +16136,6 @@
           <a:lstStyle/>
           <a:p>
             <a:pPr algn="ctr"/>
-            <a:endParaRPr/>
           </a:p>
         </p:txBody>
       </p:sp>
@@ -16592,7 +16180,6 @@
           <a:lstStyle/>
           <a:p>
             <a:pPr algn="ctr"/>
-            <a:endParaRPr/>
           </a:p>
         </p:txBody>
       </p:sp>
@@ -16702,7 +16289,6 @@
           <a:lstStyle/>
           <a:p>
             <a:pPr algn="ctr"/>
-            <a:endParaRPr/>
           </a:p>
         </p:txBody>
       </p:sp>
@@ -16747,7 +16333,6 @@
           <a:lstStyle/>
           <a:p>
             <a:pPr algn="ctr"/>
-            <a:endParaRPr/>
           </a:p>
         </p:txBody>
       </p:sp>
@@ -16857,7 +16442,6 @@
           <a:lstStyle/>
           <a:p>
             <a:pPr algn="ctr"/>
-            <a:endParaRPr/>
           </a:p>
         </p:txBody>
       </p:sp>
@@ -16902,7 +16486,6 @@
           <a:lstStyle/>
           <a:p>
             <a:pPr algn="ctr"/>
-            <a:endParaRPr/>
           </a:p>
         </p:txBody>
       </p:sp>
@@ -16962,7 +16545,7 @@
                 </a:solidFill>
                 <a:latin typeface="Calibri"/>
               </a:rPr>
-              <a:t>Scores are adjusted (isotonic) so a '0.9' behaves like a real 90% — not just a ranking.</a:t>
+              <a:t>Scores are adjusted (isotonic) so a '0.9' behaves like a real 90%, not just a ranking.</a:t>
             </a:r>
           </a:p>
         </p:txBody>
@@ -17012,7 +16595,6 @@
           <a:lstStyle/>
           <a:p>
             <a:pPr algn="ctr"/>
-            <a:endParaRPr/>
           </a:p>
         </p:txBody>
       </p:sp>
@@ -17057,7 +16639,6 @@
           <a:lstStyle/>
           <a:p>
             <a:pPr algn="ctr"/>
-            <a:endParaRPr/>
           </a:p>
         </p:txBody>
       </p:sp>
@@ -17131,7 +16712,7 @@
 </file>
 
 <file path=ppt/slides/slide8.xml><?xml version="1.0" encoding="utf-8"?>
-<p:sld xmlns:a="http://schemas.openxmlformats.org/drawingml/2006/main" xmlns:r="http://schemas.openxmlformats.org/officeDocument/2006/relationships" xmlns:p="http://schemas.openxmlformats.org/presentationml/2006/main">
+<p:sld xmlns:a="http://schemas.openxmlformats.org/drawingml/2006/main" xmlns:p="http://schemas.openxmlformats.org/presentationml/2006/main" xmlns:r="http://schemas.openxmlformats.org/officeDocument/2006/relationships">
   <p:cSld>
     <p:bg>
       <p:bgPr>
@@ -17147,14 +16728,7 @@
         <p:cNvGrpSpPr/>
         <p:nvPr/>
       </p:nvGrpSpPr>
-      <p:grpSpPr>
-        <a:xfrm>
-          <a:off x="0" y="0"/>
-          <a:ext cx="0" cy="0"/>
-          <a:chOff x="0" y="0"/>
-          <a:chExt cx="0" cy="0"/>
-        </a:xfrm>
-      </p:grpSpPr>
+      <p:grpSpPr/>
       <p:sp>
         <p:nvSpPr>
           <p:cNvPr id="2" name="TextBox 1"/>
@@ -17163,7 +16737,7 @@
         </p:nvSpPr>
         <p:spPr>
           <a:xfrm>
-            <a:off x="732220" y="614600"/>
+            <a:off x="822960" y="502920"/>
             <a:ext cx="10515600" cy="365760"/>
           </a:xfrm>
           <a:prstGeom prst="rect">
@@ -17238,7 +16812,6 @@
           <a:lstStyle/>
           <a:p>
             <a:pPr algn="ctr"/>
-            <a:endParaRPr/>
           </a:p>
         </p:txBody>
       </p:sp>
@@ -17329,7 +16902,6 @@
           <a:lstStyle/>
           <a:p>
             <a:pPr algn="ctr"/>
-            <a:endParaRPr/>
           </a:p>
         </p:txBody>
       </p:sp>
@@ -17342,7 +16914,7 @@
         <p:spPr>
           <a:xfrm>
             <a:off x="1024128" y="2194560"/>
-            <a:ext cx="2240280" cy="997709"/>
+            <a:ext cx="2240280" cy="2468880"/>
           </a:xfrm>
           <a:prstGeom prst="rect">
             <a:avLst/>
@@ -17364,7 +16936,7 @@
               </a:spcAft>
             </a:pPr>
             <a:r>
-              <a:rPr sz="1100" b="1" i="0" dirty="0">
+              <a:rPr sz="1100" b="1" i="0">
                 <a:solidFill>
                   <a:srgbClr val="56B4E9"/>
                 </a:solidFill>
@@ -17383,7 +16955,7 @@
               </a:spcAft>
             </a:pPr>
             <a:r>
-              <a:rPr sz="1550" b="1" i="0" dirty="0">
+              <a:rPr sz="1550" b="1" i="0">
                 <a:solidFill>
                   <a:srgbClr val="FFFFFF"/>
                 </a:solidFill>
@@ -17402,31 +16974,13 @@
               </a:spcAft>
             </a:pPr>
             <a:r>
-              <a:rPr sz="1200" b="0" i="0" dirty="0">
+              <a:rPr sz="1200" b="0" i="0">
                 <a:solidFill>
                   <a:srgbClr val="EAF1F7"/>
                 </a:solidFill>
                 <a:latin typeface="Calibri"/>
               </a:rPr>
-              <a:t>Familiar questions </a:t>
-            </a:r>
-            <a:r>
-              <a:rPr lang="en-US" sz="1200" b="0" i="0" dirty="0">
-                <a:solidFill>
-                  <a:srgbClr val="EAF1F7"/>
-                </a:solidFill>
-                <a:latin typeface="Calibri"/>
-              </a:rPr>
-              <a:t>-</a:t>
-            </a:r>
-            <a:r>
-              <a:rPr sz="1200" b="0" i="0" dirty="0">
-                <a:solidFill>
-                  <a:srgbClr val="EAF1F7"/>
-                </a:solidFill>
-                <a:latin typeface="Calibri"/>
-              </a:rPr>
-              <a:t> the easy exam most papers report.</a:t>
+              <a:t>Familiar questions, the easy exam most papers report.</a:t>
             </a:r>
           </a:p>
         </p:txBody>
@@ -17518,7 +17072,6 @@
           <a:lstStyle/>
           <a:p>
             <a:pPr algn="ctr"/>
-            <a:endParaRPr/>
           </a:p>
         </p:txBody>
       </p:sp>
@@ -17689,7 +17242,6 @@
           <a:lstStyle/>
           <a:p>
             <a:pPr algn="ctr"/>
-            <a:endParaRPr/>
           </a:p>
         </p:txBody>
       </p:sp>
@@ -17860,7 +17412,6 @@
           <a:lstStyle/>
           <a:p>
             <a:pPr algn="ctr"/>
-            <a:endParaRPr/>
           </a:p>
         </p:txBody>
       </p:sp>
@@ -17873,7 +17424,7 @@
         <p:spPr>
           <a:xfrm>
             <a:off x="9308592" y="2194560"/>
-            <a:ext cx="2240280" cy="1182375"/>
+            <a:ext cx="2240280" cy="2468880"/>
           </a:xfrm>
           <a:prstGeom prst="rect">
             <a:avLst/>
@@ -17895,7 +17446,7 @@
               </a:spcAft>
             </a:pPr>
             <a:r>
-              <a:rPr sz="1100" b="1" i="0" dirty="0">
+              <a:rPr sz="1100" b="1" i="0">
                 <a:solidFill>
                   <a:srgbClr val="E69000"/>
                 </a:solidFill>
@@ -17914,7 +17465,7 @@
               </a:spcAft>
             </a:pPr>
             <a:r>
-              <a:rPr sz="1550" b="1" i="0" dirty="0">
+              <a:rPr sz="1550" b="1" i="0">
                 <a:solidFill>
                   <a:srgbClr val="FFFFFF"/>
                 </a:solidFill>
@@ -17933,31 +17484,13 @@
               </a:spcAft>
             </a:pPr>
             <a:r>
-              <a:rPr sz="1200" b="0" i="0" dirty="0">
+              <a:rPr sz="1200" b="0" i="0">
                 <a:solidFill>
                   <a:srgbClr val="EAF1F7"/>
                 </a:solidFill>
                 <a:latin typeface="Calibri"/>
               </a:rPr>
-              <a:t>Trained on older compounds, tested on the newest </a:t>
-            </a:r>
-            <a:r>
-              <a:rPr lang="en-US" sz="1200" b="0" i="0" dirty="0">
-                <a:solidFill>
-                  <a:srgbClr val="EAF1F7"/>
-                </a:solidFill>
-                <a:latin typeface="Calibri"/>
-              </a:rPr>
-              <a:t>-</a:t>
-            </a:r>
-            <a:r>
-              <a:rPr sz="1200" b="0" i="0" dirty="0">
-                <a:solidFill>
-                  <a:srgbClr val="EAF1F7"/>
-                </a:solidFill>
-                <a:latin typeface="Calibri"/>
-              </a:rPr>
-              <a:t> a true 'future' exam.</a:t>
+              <a:t>Trained on older compounds, tested on the newest, a true 'future' exam.</a:t>
             </a:r>
           </a:p>
         </p:txBody>
@@ -18013,7 +17546,7 @@
 </file>
 
 <file path=ppt/slides/slide9.xml><?xml version="1.0" encoding="utf-8"?>
-<p:sld xmlns:a="http://schemas.openxmlformats.org/drawingml/2006/main" xmlns:r="http://schemas.openxmlformats.org/officeDocument/2006/relationships" xmlns:p="http://schemas.openxmlformats.org/presentationml/2006/main">
+<p:sld xmlns:a="http://schemas.openxmlformats.org/drawingml/2006/main" xmlns:p="http://schemas.openxmlformats.org/presentationml/2006/main" xmlns:r="http://schemas.openxmlformats.org/officeDocument/2006/relationships">
   <p:cSld>
     <p:bg>
       <p:bgPr>
@@ -18029,14 +17562,7 @@
         <p:cNvGrpSpPr/>
         <p:nvPr/>
       </p:nvGrpSpPr>
-      <p:grpSpPr>
-        <a:xfrm>
-          <a:off x="0" y="0"/>
-          <a:ext cx="0" cy="0"/>
-          <a:chOff x="0" y="0"/>
-          <a:chExt cx="0" cy="0"/>
-        </a:xfrm>
-      </p:grpSpPr>
+      <p:grpSpPr/>
       <p:sp>
         <p:nvSpPr>
           <p:cNvPr id="2" name="TextBox 1"/>
@@ -18045,7 +17571,7 @@
         </p:nvSpPr>
         <p:spPr>
           <a:xfrm>
-            <a:off x="725239" y="663461"/>
+            <a:off x="822960" y="502920"/>
             <a:ext cx="10515600" cy="365760"/>
           </a:xfrm>
           <a:prstGeom prst="rect">
@@ -18074,7 +17600,7 @@
                 </a:solidFill>
                 <a:latin typeface="Consolas"/>
               </a:rPr>
-              <a:t>08 · RESULTS — THE YES/NO MODELS</a:t>
+              <a:t>08 · RESULTS, THE YES/NO MODELS</a:t>
             </a:r>
           </a:p>
         </p:txBody>
@@ -18120,7 +17646,6 @@
           <a:lstStyle/>
           <a:p>
             <a:pPr algn="ctr"/>
-            <a:endParaRPr/>
           </a:p>
         </p:txBody>
       </p:sp>
@@ -18185,46 +17710,16 @@
                 <a:tableStyleId>{5C22544A-7EE6-4342-B048-85BDC9FD1C3A}</a:tableStyleId>
               </a:tblPr>
               <a:tblGrid>
-                <a:gridCol w="1745672">
-                  <a:extLst>
-                    <a:ext uri="{9D8B030D-6E8A-4147-A177-3AD203B41FA5}">
-                      <a16:colId xmlns:a16="http://schemas.microsoft.com/office/drawing/2014/main" val="20000"/>
-                    </a:ext>
-                  </a:extLst>
-                </a:gridCol>
-                <a:gridCol w="1163781">
-                  <a:extLst>
-                    <a:ext uri="{9D8B030D-6E8A-4147-A177-3AD203B41FA5}">
-                      <a16:colId xmlns:a16="http://schemas.microsoft.com/office/drawing/2014/main" val="20001"/>
-                    </a:ext>
-                  </a:extLst>
-                </a:gridCol>
-                <a:gridCol w="1163781">
-                  <a:extLst>
-                    <a:ext uri="{9D8B030D-6E8A-4147-A177-3AD203B41FA5}">
-                      <a16:colId xmlns:a16="http://schemas.microsoft.com/office/drawing/2014/main" val="20002"/>
-                    </a:ext>
-                  </a:extLst>
-                </a:gridCol>
-                <a:gridCol w="1163781">
-                  <a:extLst>
-                    <a:ext uri="{9D8B030D-6E8A-4147-A177-3AD203B41FA5}">
-                      <a16:colId xmlns:a16="http://schemas.microsoft.com/office/drawing/2014/main" val="20003"/>
-                    </a:ext>
-                  </a:extLst>
-                </a:gridCol>
-                <a:gridCol w="1163781">
-                  <a:extLst>
-                    <a:ext uri="{9D8B030D-6E8A-4147-A177-3AD203B41FA5}">
-                      <a16:colId xmlns:a16="http://schemas.microsoft.com/office/drawing/2014/main" val="20004"/>
-                    </a:ext>
-                  </a:extLst>
-                </a:gridCol>
+                <a:gridCol w="1745672"/>
+                <a:gridCol w="1163781"/>
+                <a:gridCol w="1163781"/>
+                <a:gridCol w="1163781"/>
+                <a:gridCol w="1163781"/>
               </a:tblGrid>
               <a:tr h="365760">
                 <a:tc>
                   <a:txBody>
-                    <a:bodyPr/>
+                    <a:bodyPr wrap="square"/>
                     <a:lstStyle/>
                     <a:p>
                       <a:pPr algn="l"/>
@@ -18247,7 +17742,7 @@
                 </a:tc>
                 <a:tc>
                   <a:txBody>
-                    <a:bodyPr/>
+                    <a:bodyPr wrap="square"/>
                     <a:lstStyle/>
                     <a:p>
                       <a:pPr algn="ctr"/>
@@ -18270,7 +17765,7 @@
                 </a:tc>
                 <a:tc>
                   <a:txBody>
-                    <a:bodyPr/>
+                    <a:bodyPr wrap="square"/>
                     <a:lstStyle/>
                     <a:p>
                       <a:pPr algn="ctr"/>
@@ -18293,7 +17788,7 @@
                 </a:tc>
                 <a:tc>
                   <a:txBody>
-                    <a:bodyPr/>
+                    <a:bodyPr wrap="square"/>
                     <a:lstStyle/>
                     <a:p>
                       <a:pPr algn="ctr"/>
@@ -18316,7 +17811,7 @@
                 </a:tc>
                 <a:tc>
                   <a:txBody>
-                    <a:bodyPr/>
+                    <a:bodyPr wrap="square"/>
                     <a:lstStyle/>
                     <a:p>
                       <a:pPr algn="ctr"/>
@@ -18337,16 +17832,11 @@
                     </a:solidFill>
                   </a:tcPr>
                 </a:tc>
-                <a:extLst>
-                  <a:ext uri="{0D108BD9-81ED-4DB2-BD59-A6C34878D82A}">
-                    <a16:rowId xmlns:a16="http://schemas.microsoft.com/office/drawing/2014/main" val="10000"/>
-                  </a:ext>
-                </a:extLst>
               </a:tr>
               <a:tr h="365760">
                 <a:tc>
                   <a:txBody>
-                    <a:bodyPr/>
+                    <a:bodyPr wrap="square"/>
                     <a:lstStyle/>
                     <a:p>
                       <a:pPr algn="l"/>
@@ -18369,7 +17859,7 @@
                 </a:tc>
                 <a:tc>
                   <a:txBody>
-                    <a:bodyPr/>
+                    <a:bodyPr wrap="square"/>
                     <a:lstStyle/>
                     <a:p>
                       <a:pPr algn="ctr"/>
@@ -18392,7 +17882,7 @@
                 </a:tc>
                 <a:tc>
                   <a:txBody>
-                    <a:bodyPr/>
+                    <a:bodyPr wrap="square"/>
                     <a:lstStyle/>
                     <a:p>
                       <a:pPr algn="ctr"/>
@@ -18415,7 +17905,7 @@
                 </a:tc>
                 <a:tc>
                   <a:txBody>
-                    <a:bodyPr/>
+                    <a:bodyPr wrap="square"/>
                     <a:lstStyle/>
                     <a:p>
                       <a:pPr algn="ctr"/>
@@ -18438,7 +17928,7 @@
                 </a:tc>
                 <a:tc>
                   <a:txBody>
-                    <a:bodyPr/>
+                    <a:bodyPr wrap="square"/>
                     <a:lstStyle/>
                     <a:p>
                       <a:pPr algn="ctr"/>
@@ -18459,16 +17949,11 @@
                     </a:solidFill>
                   </a:tcPr>
                 </a:tc>
-                <a:extLst>
-                  <a:ext uri="{0D108BD9-81ED-4DB2-BD59-A6C34878D82A}">
-                    <a16:rowId xmlns:a16="http://schemas.microsoft.com/office/drawing/2014/main" val="10001"/>
-                  </a:ext>
-                </a:extLst>
               </a:tr>
               <a:tr h="365760">
                 <a:tc>
                   <a:txBody>
-                    <a:bodyPr/>
+                    <a:bodyPr wrap="square"/>
                     <a:lstStyle/>
                     <a:p>
                       <a:pPr algn="l"/>
@@ -18491,7 +17976,7 @@
                 </a:tc>
                 <a:tc>
                   <a:txBody>
-                    <a:bodyPr/>
+                    <a:bodyPr wrap="square"/>
                     <a:lstStyle/>
                     <a:p>
                       <a:pPr algn="ctr"/>
@@ -18514,7 +17999,7 @@
                 </a:tc>
                 <a:tc>
                   <a:txBody>
-                    <a:bodyPr/>
+                    <a:bodyPr wrap="square"/>
                     <a:lstStyle/>
                     <a:p>
                       <a:pPr algn="ctr"/>
@@ -18537,7 +18022,7 @@
                 </a:tc>
                 <a:tc>
                   <a:txBody>
-                    <a:bodyPr/>
+                    <a:bodyPr wrap="square"/>
                     <a:lstStyle/>
                     <a:p>
                       <a:pPr algn="ctr"/>
@@ -18560,7 +18045,7 @@
                 </a:tc>
                 <a:tc>
                   <a:txBody>
-                    <a:bodyPr/>
+                    <a:bodyPr wrap="square"/>
                     <a:lstStyle/>
                     <a:p>
                       <a:pPr algn="ctr"/>
@@ -18581,16 +18066,11 @@
                     </a:solidFill>
                   </a:tcPr>
                 </a:tc>
-                <a:extLst>
-                  <a:ext uri="{0D108BD9-81ED-4DB2-BD59-A6C34878D82A}">
-                    <a16:rowId xmlns:a16="http://schemas.microsoft.com/office/drawing/2014/main" val="10002"/>
-                  </a:ext>
-                </a:extLst>
               </a:tr>
               <a:tr h="365760">
                 <a:tc>
                   <a:txBody>
-                    <a:bodyPr/>
+                    <a:bodyPr wrap="square"/>
                     <a:lstStyle/>
                     <a:p>
                       <a:pPr algn="l"/>
@@ -18613,7 +18093,7 @@
                 </a:tc>
                 <a:tc>
                   <a:txBody>
-                    <a:bodyPr/>
+                    <a:bodyPr wrap="square"/>
                     <a:lstStyle/>
                     <a:p>
                       <a:pPr algn="ctr"/>
@@ -18636,7 +18116,7 @@
                 </a:tc>
                 <a:tc>
                   <a:txBody>
-                    <a:bodyPr/>
+                    <a:bodyPr wrap="square"/>
                     <a:lstStyle/>
                     <a:p>
                       <a:pPr algn="ctr"/>
@@ -18659,7 +18139,7 @@
                 </a:tc>
                 <a:tc>
                   <a:txBody>
-                    <a:bodyPr/>
+                    <a:bodyPr wrap="square"/>
                     <a:lstStyle/>
                     <a:p>
                       <a:pPr algn="ctr"/>
@@ -18682,7 +18162,7 @@
                 </a:tc>
                 <a:tc>
                   <a:txBody>
-                    <a:bodyPr/>
+                    <a:bodyPr wrap="square"/>
                     <a:lstStyle/>
                     <a:p>
                       <a:pPr algn="ctr"/>
@@ -18703,16 +18183,11 @@
                     </a:solidFill>
                   </a:tcPr>
                 </a:tc>
-                <a:extLst>
-                  <a:ext uri="{0D108BD9-81ED-4DB2-BD59-A6C34878D82A}">
-                    <a16:rowId xmlns:a16="http://schemas.microsoft.com/office/drawing/2014/main" val="10003"/>
-                  </a:ext>
-                </a:extLst>
               </a:tr>
               <a:tr h="365760">
                 <a:tc>
                   <a:txBody>
-                    <a:bodyPr/>
+                    <a:bodyPr wrap="square"/>
                     <a:lstStyle/>
                     <a:p>
                       <a:pPr algn="l"/>
@@ -18735,7 +18210,7 @@
                 </a:tc>
                 <a:tc>
                   <a:txBody>
-                    <a:bodyPr/>
+                    <a:bodyPr wrap="square"/>
                     <a:lstStyle/>
                     <a:p>
                       <a:pPr algn="ctr"/>
@@ -18758,7 +18233,7 @@
                 </a:tc>
                 <a:tc>
                   <a:txBody>
-                    <a:bodyPr/>
+                    <a:bodyPr wrap="square"/>
                     <a:lstStyle/>
                     <a:p>
                       <a:pPr algn="ctr"/>
@@ -18781,7 +18256,7 @@
                 </a:tc>
                 <a:tc>
                   <a:txBody>
-                    <a:bodyPr/>
+                    <a:bodyPr wrap="square"/>
                     <a:lstStyle/>
                     <a:p>
                       <a:pPr algn="ctr"/>
@@ -18804,7 +18279,7 @@
                 </a:tc>
                 <a:tc>
                   <a:txBody>
-                    <a:bodyPr/>
+                    <a:bodyPr wrap="square"/>
                     <a:lstStyle/>
                     <a:p>
                       <a:pPr algn="ctr"/>
@@ -18825,16 +18300,11 @@
                     </a:solidFill>
                   </a:tcPr>
                 </a:tc>
-                <a:extLst>
-                  <a:ext uri="{0D108BD9-81ED-4DB2-BD59-A6C34878D82A}">
-                    <a16:rowId xmlns:a16="http://schemas.microsoft.com/office/drawing/2014/main" val="10004"/>
-                  </a:ext>
-                </a:extLst>
               </a:tr>
               <a:tr h="365760">
                 <a:tc>
                   <a:txBody>
-                    <a:bodyPr/>
+                    <a:bodyPr wrap="square"/>
                     <a:lstStyle/>
                     <a:p>
                       <a:pPr algn="l"/>
@@ -18857,7 +18327,7 @@
                 </a:tc>
                 <a:tc>
                   <a:txBody>
-                    <a:bodyPr/>
+                    <a:bodyPr wrap="square"/>
                     <a:lstStyle/>
                     <a:p>
                       <a:pPr algn="ctr"/>
@@ -18880,7 +18350,7 @@
                 </a:tc>
                 <a:tc>
                   <a:txBody>
-                    <a:bodyPr/>
+                    <a:bodyPr wrap="square"/>
                     <a:lstStyle/>
                     <a:p>
                       <a:pPr algn="ctr"/>
@@ -18903,7 +18373,7 @@
                 </a:tc>
                 <a:tc>
                   <a:txBody>
-                    <a:bodyPr/>
+                    <a:bodyPr wrap="square"/>
                     <a:lstStyle/>
                     <a:p>
                       <a:pPr algn="ctr"/>
@@ -18926,7 +18396,7 @@
                 </a:tc>
                 <a:tc>
                   <a:txBody>
-                    <a:bodyPr/>
+                    <a:bodyPr wrap="square"/>
                     <a:lstStyle/>
                     <a:p>
                       <a:pPr algn="ctr"/>
@@ -18947,16 +18417,11 @@
                     </a:solidFill>
                   </a:tcPr>
                 </a:tc>
-                <a:extLst>
-                  <a:ext uri="{0D108BD9-81ED-4DB2-BD59-A6C34878D82A}">
-                    <a16:rowId xmlns:a16="http://schemas.microsoft.com/office/drawing/2014/main" val="10005"/>
-                  </a:ext>
-                </a:extLst>
               </a:tr>
               <a:tr h="365760">
                 <a:tc>
                   <a:txBody>
-                    <a:bodyPr/>
+                    <a:bodyPr wrap="square"/>
                     <a:lstStyle/>
                     <a:p>
                       <a:pPr algn="l"/>
@@ -18979,7 +18444,7 @@
                 </a:tc>
                 <a:tc>
                   <a:txBody>
-                    <a:bodyPr/>
+                    <a:bodyPr wrap="square"/>
                     <a:lstStyle/>
                     <a:p>
                       <a:pPr algn="ctr"/>
@@ -19002,7 +18467,7 @@
                 </a:tc>
                 <a:tc>
                   <a:txBody>
-                    <a:bodyPr/>
+                    <a:bodyPr wrap="square"/>
                     <a:lstStyle/>
                     <a:p>
                       <a:pPr algn="ctr"/>
@@ -19025,7 +18490,7 @@
                 </a:tc>
                 <a:tc>
                   <a:txBody>
-                    <a:bodyPr/>
+                    <a:bodyPr wrap="square"/>
                     <a:lstStyle/>
                     <a:p>
                       <a:pPr algn="ctr"/>
@@ -19048,7 +18513,7 @@
                 </a:tc>
                 <a:tc>
                   <a:txBody>
-                    <a:bodyPr/>
+                    <a:bodyPr wrap="square"/>
                     <a:lstStyle/>
                     <a:p>
                       <a:pPr algn="ctr"/>
@@ -19069,16 +18534,11 @@
                     </a:solidFill>
                   </a:tcPr>
                 </a:tc>
-                <a:extLst>
-                  <a:ext uri="{0D108BD9-81ED-4DB2-BD59-A6C34878D82A}">
-                    <a16:rowId xmlns:a16="http://schemas.microsoft.com/office/drawing/2014/main" val="10006"/>
-                  </a:ext>
-                </a:extLst>
               </a:tr>
               <a:tr h="365760">
                 <a:tc>
                   <a:txBody>
-                    <a:bodyPr/>
+                    <a:bodyPr wrap="square"/>
                     <a:lstStyle/>
                     <a:p>
                       <a:pPr algn="l"/>
@@ -19101,7 +18561,7 @@
                 </a:tc>
                 <a:tc>
                   <a:txBody>
-                    <a:bodyPr/>
+                    <a:bodyPr wrap="square"/>
                     <a:lstStyle/>
                     <a:p>
                       <a:pPr algn="ctr"/>
@@ -19124,7 +18584,7 @@
                 </a:tc>
                 <a:tc>
                   <a:txBody>
-                    <a:bodyPr/>
+                    <a:bodyPr wrap="square"/>
                     <a:lstStyle/>
                     <a:p>
                       <a:pPr algn="ctr"/>
@@ -19147,7 +18607,7 @@
                 </a:tc>
                 <a:tc>
                   <a:txBody>
-                    <a:bodyPr/>
+                    <a:bodyPr wrap="square"/>
                     <a:lstStyle/>
                     <a:p>
                       <a:pPr algn="ctr"/>
@@ -19170,7 +18630,7 @@
                 </a:tc>
                 <a:tc>
                   <a:txBody>
-                    <a:bodyPr/>
+                    <a:bodyPr wrap="square"/>
                     <a:lstStyle/>
                     <a:p>
                       <a:pPr algn="ctr"/>
@@ -19191,16 +18651,11 @@
                     </a:solidFill>
                   </a:tcPr>
                 </a:tc>
-                <a:extLst>
-                  <a:ext uri="{0D108BD9-81ED-4DB2-BD59-A6C34878D82A}">
-                    <a16:rowId xmlns:a16="http://schemas.microsoft.com/office/drawing/2014/main" val="10007"/>
-                  </a:ext>
-                </a:extLst>
               </a:tr>
               <a:tr h="365760">
                 <a:tc>
                   <a:txBody>
-                    <a:bodyPr/>
+                    <a:bodyPr wrap="square"/>
                     <a:lstStyle/>
                     <a:p>
                       <a:pPr algn="l"/>
@@ -19223,7 +18678,7 @@
                 </a:tc>
                 <a:tc>
                   <a:txBody>
-                    <a:bodyPr/>
+                    <a:bodyPr wrap="square"/>
                     <a:lstStyle/>
                     <a:p>
                       <a:pPr algn="ctr"/>
@@ -19246,7 +18701,7 @@
                 </a:tc>
                 <a:tc>
                   <a:txBody>
-                    <a:bodyPr/>
+                    <a:bodyPr wrap="square"/>
                     <a:lstStyle/>
                     <a:p>
                       <a:pPr algn="ctr"/>
@@ -19269,7 +18724,7 @@
                 </a:tc>
                 <a:tc>
                   <a:txBody>
-                    <a:bodyPr/>
+                    <a:bodyPr wrap="square"/>
                     <a:lstStyle/>
                     <a:p>
                       <a:pPr algn="ctr"/>
@@ -19292,7 +18747,7 @@
                 </a:tc>
                 <a:tc>
                   <a:txBody>
-                    <a:bodyPr/>
+                    <a:bodyPr wrap="square"/>
                     <a:lstStyle/>
                     <a:p>
                       <a:pPr algn="ctr"/>
@@ -19313,11 +18768,6 @@
                     </a:solidFill>
                   </a:tcPr>
                 </a:tc>
-                <a:extLst>
-                  <a:ext uri="{0D108BD9-81ED-4DB2-BD59-A6C34878D82A}">
-                    <a16:rowId xmlns:a16="http://schemas.microsoft.com/office/drawing/2014/main" val="10008"/>
-                  </a:ext>
-                </a:extLst>
               </a:tr>
             </a:tbl>
           </a:graphicData>
@@ -19410,7 +18860,6 @@
           <a:lstStyle/>
           <a:p>
             <a:pPr algn="ctr"/>
-            <a:endParaRPr/>
           </a:p>
         </p:txBody>
       </p:sp>
@@ -19455,7 +18904,6 @@
           <a:lstStyle/>
           <a:p>
             <a:pPr algn="ctr"/>
-            <a:endParaRPr/>
           </a:p>
         </p:txBody>
       </p:sp>
@@ -19552,7 +19000,6 @@
           <a:lstStyle/>
           <a:p>
             <a:pPr algn="ctr"/>
-            <a:endParaRPr/>
           </a:p>
         </p:txBody>
       </p:sp>
@@ -19597,7 +19044,6 @@
           <a:lstStyle/>
           <a:p>
             <a:pPr algn="ctr"/>
-            <a:endParaRPr/>
           </a:p>
         </p:txBody>
       </p:sp>
@@ -19694,7 +19140,6 @@
           <a:lstStyle/>
           <a:p>
             <a:pPr algn="ctr"/>
-            <a:endParaRPr/>
           </a:p>
         </p:txBody>
       </p:sp>
@@ -19739,7 +19184,6 @@
           <a:lstStyle/>
           <a:p>
             <a:pPr algn="ctr"/>
-            <a:endParaRPr/>
           </a:p>
         </p:txBody>
       </p:sp>
@@ -19836,7 +19280,6 @@
           <a:lstStyle/>
           <a:p>
             <a:pPr algn="ctr"/>
-            <a:endParaRPr/>
           </a:p>
         </p:txBody>
       </p:sp>
@@ -19881,7 +19324,6 @@
           <a:lstStyle/>
           <a:p>
             <a:pPr algn="ctr"/>
-            <a:endParaRPr/>
           </a:p>
         </p:txBody>
       </p:sp>
@@ -19976,7 +19418,6 @@
           <a:lstStyle/>
           <a:p>
             <a:pPr algn="ctr"/>
-            <a:endParaRPr/>
           </a:p>
         </p:txBody>
       </p:sp>
@@ -20021,7 +19462,6 @@
           <a:lstStyle/>
           <a:p>
             <a:pPr algn="ctr"/>
-            <a:endParaRPr/>
           </a:p>
         </p:txBody>
       </p:sp>
@@ -20053,7 +19493,7 @@
               </a:spcAft>
             </a:pPr>
             <a:r>
-              <a:rPr sz="1250" b="1" dirty="0">
+              <a:rPr sz="1250" b="1">
                 <a:solidFill>
                   <a:srgbClr val="0072B2"/>
                 </a:solidFill>
@@ -20062,7 +19502,7 @@
               <a:t>In plain terms:  </a:t>
             </a:r>
             <a:r>
-              <a:rPr sz="1250" b="0" dirty="0">
+              <a:rPr sz="1250" b="0">
                 <a:solidFill>
                   <a:srgbClr val="16222F"/>
                 </a:solidFill>
@@ -20412,44 +19852,44 @@
         <a:sysClr val="window" lastClr="FFFFFF"/>
       </a:lt1>
       <a:dk2>
-        <a:srgbClr val="0E2841"/>
+        <a:srgbClr val="1F497D"/>
       </a:dk2>
       <a:lt2>
-        <a:srgbClr val="E8E8E8"/>
+        <a:srgbClr val="EEECE1"/>
       </a:lt2>
       <a:accent1>
-        <a:srgbClr val="156082"/>
+        <a:srgbClr val="4F81BD"/>
       </a:accent1>
       <a:accent2>
-        <a:srgbClr val="E97132"/>
+        <a:srgbClr val="C0504D"/>
       </a:accent2>
       <a:accent3>
-        <a:srgbClr val="196B24"/>
+        <a:srgbClr val="9BBB59"/>
       </a:accent3>
       <a:accent4>
-        <a:srgbClr val="0F9ED5"/>
+        <a:srgbClr val="8064A2"/>
       </a:accent4>
       <a:accent5>
-        <a:srgbClr val="A02B93"/>
+        <a:srgbClr val="4BACC6"/>
       </a:accent5>
       <a:accent6>
-        <a:srgbClr val="4EA72E"/>
+        <a:srgbClr val="F79646"/>
       </a:accent6>
       <a:hlink>
-        <a:srgbClr val="467886"/>
+        <a:srgbClr val="0000FF"/>
       </a:hlink>
       <a:folHlink>
-        <a:srgbClr val="96607D"/>
+        <a:srgbClr val="800080"/>
       </a:folHlink>
     </a:clrScheme>
     <a:fontScheme name="Office">
       <a:majorFont>
-        <a:latin typeface="Aptos Display" panose="02110004020202020204"/>
+        <a:latin typeface="Calibri"/>
         <a:ea typeface=""/>
         <a:cs typeface=""/>
-        <a:font script="Jpan" typeface="游ゴシック Light"/>
+        <a:font script="Jpan" typeface="ＭＳ Ｐゴシック"/>
         <a:font script="Hang" typeface="맑은 고딕"/>
-        <a:font script="Hans" typeface="等线 Light"/>
+        <a:font script="Hans" typeface="宋体"/>
         <a:font script="Hant" typeface="新細明體"/>
         <a:font script="Arab" typeface="Times New Roman"/>
         <a:font script="Hebr" typeface="Times New Roman"/>
@@ -20477,31 +19917,14 @@
         <a:font script="Viet" typeface="Times New Roman"/>
         <a:font script="Uigh" typeface="Microsoft Uighur"/>
         <a:font script="Geor" typeface="Sylfaen"/>
-        <a:font script="Armn" typeface="Arial"/>
-        <a:font script="Bugi" typeface="Leelawadee UI"/>
-        <a:font script="Bopo" typeface="Microsoft JhengHei"/>
-        <a:font script="Java" typeface="Javanese Text"/>
-        <a:font script="Lisu" typeface="Segoe UI"/>
-        <a:font script="Mymr" typeface="Myanmar Text"/>
-        <a:font script="Nkoo" typeface="Ebrima"/>
-        <a:font script="Olck" typeface="Nirmala UI"/>
-        <a:font script="Osma" typeface="Ebrima"/>
-        <a:font script="Phag" typeface="Phagspa"/>
-        <a:font script="Syrn" typeface="Estrangelo Edessa"/>
-        <a:font script="Syrj" typeface="Estrangelo Edessa"/>
-        <a:font script="Syre" typeface="Estrangelo Edessa"/>
-        <a:font script="Sora" typeface="Nirmala UI"/>
-        <a:font script="Tale" typeface="Microsoft Tai Le"/>
-        <a:font script="Talu" typeface="Microsoft New Tai Lue"/>
-        <a:font script="Tfng" typeface="Ebrima"/>
       </a:majorFont>
       <a:minorFont>
-        <a:latin typeface="Aptos" panose="02110004020202020204"/>
+        <a:latin typeface="Calibri"/>
         <a:ea typeface=""/>
         <a:cs typeface=""/>
-        <a:font script="Jpan" typeface="游ゴシック"/>
+        <a:font script="Jpan" typeface="ＭＳ Ｐゴシック"/>
         <a:font script="Hang" typeface="맑은 고딕"/>
-        <a:font script="Hans" typeface="等线"/>
+        <a:font script="Hans" typeface="宋体"/>
         <a:font script="Hant" typeface="新細明體"/>
         <a:font script="Arab" typeface="Arial"/>
         <a:font script="Hebr" typeface="Arial"/>
@@ -20529,23 +19952,6 @@
         <a:font script="Viet" typeface="Arial"/>
         <a:font script="Uigh" typeface="Microsoft Uighur"/>
         <a:font script="Geor" typeface="Sylfaen"/>
-        <a:font script="Armn" typeface="Arial"/>
-        <a:font script="Bugi" typeface="Leelawadee UI"/>
-        <a:font script="Bopo" typeface="Microsoft JhengHei"/>
-        <a:font script="Java" typeface="Javanese Text"/>
-        <a:font script="Lisu" typeface="Segoe UI"/>
-        <a:font script="Mymr" typeface="Myanmar Text"/>
-        <a:font script="Nkoo" typeface="Ebrima"/>
-        <a:font script="Olck" typeface="Nirmala UI"/>
-        <a:font script="Osma" typeface="Ebrima"/>
-        <a:font script="Phag" typeface="Phagspa"/>
-        <a:font script="Syrn" typeface="Estrangelo Edessa"/>
-        <a:font script="Syrj" typeface="Estrangelo Edessa"/>
-        <a:font script="Syre" typeface="Estrangelo Edessa"/>
-        <a:font script="Sora" typeface="Nirmala UI"/>
-        <a:font script="Tale" typeface="Microsoft Tai Le"/>
-        <a:font script="Talu" typeface="Microsoft New Tai Lue"/>
-        <a:font script="Tfng" typeface="Ebrima"/>
       </a:minorFont>
     </a:fontScheme>
     <a:fmtScheme name="Office">
@@ -20557,136 +19963,180 @@
           <a:gsLst>
             <a:gs pos="0">
               <a:schemeClr val="phClr">
-                <a:lumMod val="110000"/>
-                <a:satMod val="105000"/>
-                <a:tint val="67000"/>
+                <a:tint val="50000"/>
+                <a:satMod val="300000"/>
               </a:schemeClr>
             </a:gs>
-            <a:gs pos="50000">
+            <a:gs pos="35000">
               <a:schemeClr val="phClr">
-                <a:lumMod val="105000"/>
-                <a:satMod val="103000"/>
-                <a:tint val="73000"/>
+                <a:tint val="37000"/>
+                <a:satMod val="300000"/>
               </a:schemeClr>
             </a:gs>
             <a:gs pos="100000">
               <a:schemeClr val="phClr">
-                <a:lumMod val="105000"/>
-                <a:satMod val="109000"/>
-                <a:tint val="81000"/>
+                <a:tint val="15000"/>
+                <a:satMod val="350000"/>
               </a:schemeClr>
             </a:gs>
           </a:gsLst>
-          <a:lin ang="5400000" scaled="0"/>
+          <a:lin ang="16200000" scaled="1"/>
         </a:gradFill>
         <a:gradFill rotWithShape="1">
           <a:gsLst>
             <a:gs pos="0">
               <a:schemeClr val="phClr">
-                <a:satMod val="103000"/>
-                <a:lumMod val="102000"/>
-                <a:tint val="94000"/>
-              </a:schemeClr>
-            </a:gs>
-            <a:gs pos="50000">
-              <a:schemeClr val="phClr">
-                <a:satMod val="110000"/>
-                <a:lumMod val="100000"/>
+                <a:tint val="100000"/>
                 <a:shade val="100000"/>
+                <a:satMod val="130000"/>
               </a:schemeClr>
             </a:gs>
             <a:gs pos="100000">
               <a:schemeClr val="phClr">
-                <a:lumMod val="99000"/>
-                <a:satMod val="120000"/>
-                <a:shade val="78000"/>
+                <a:tint val="50000"/>
+                <a:shade val="100000"/>
+                <a:satMod val="350000"/>
               </a:schemeClr>
             </a:gs>
           </a:gsLst>
-          <a:lin ang="5400000" scaled="0"/>
+          <a:lin ang="16200000" scaled="0"/>
         </a:gradFill>
       </a:fillStyleLst>
       <a:lnStyleLst>
-        <a:ln w="12700" cap="flat" cmpd="sng" algn="ctr">
+        <a:ln w="9525" cap="flat" cmpd="sng" algn="ctr">
           <a:solidFill>
-            <a:schemeClr val="phClr"/>
+            <a:schemeClr val="phClr">
+              <a:shade val="95000"/>
+              <a:satMod val="105000"/>
+            </a:schemeClr>
           </a:solidFill>
           <a:prstDash val="solid"/>
-          <a:miter lim="800000"/>
-        </a:ln>
-        <a:ln w="19050" cap="flat" cmpd="sng" algn="ctr">
-          <a:solidFill>
-            <a:schemeClr val="phClr"/>
-          </a:solidFill>
-          <a:prstDash val="solid"/>
-          <a:miter lim="800000"/>
         </a:ln>
         <a:ln w="25400" cap="flat" cmpd="sng" algn="ctr">
           <a:solidFill>
             <a:schemeClr val="phClr"/>
           </a:solidFill>
           <a:prstDash val="solid"/>
-          <a:miter lim="800000"/>
+        </a:ln>
+        <a:ln w="38100" cap="flat" cmpd="sng" algn="ctr">
+          <a:solidFill>
+            <a:schemeClr val="phClr"/>
+          </a:solidFill>
+          <a:prstDash val="solid"/>
         </a:ln>
       </a:lnStyleLst>
       <a:effectStyleLst>
         <a:effectStyle>
-          <a:effectLst/>
-        </a:effectStyle>
-        <a:effectStyle>
-          <a:effectLst/>
+          <a:effectLst>
+            <a:outerShdw blurRad="40000" dist="20000" dir="5400000" rotWithShape="0">
+              <a:srgbClr val="000000">
+                <a:alpha val="38000"/>
+              </a:srgbClr>
+            </a:outerShdw>
+          </a:effectLst>
         </a:effectStyle>
         <a:effectStyle>
           <a:effectLst>
-            <a:outerShdw blurRad="57150" dist="19050" dir="5400000" algn="ctr" rotWithShape="0">
+            <a:outerShdw blurRad="40000" dist="23000" dir="5400000" rotWithShape="0">
               <a:srgbClr val="000000">
-                <a:alpha val="63000"/>
+                <a:alpha val="35000"/>
               </a:srgbClr>
             </a:outerShdw>
           </a:effectLst>
+        </a:effectStyle>
+        <a:effectStyle>
+          <a:effectLst>
+            <a:outerShdw blurRad="40000" dist="23000" dir="5400000" rotWithShape="0">
+              <a:srgbClr val="000000">
+                <a:alpha val="35000"/>
+              </a:srgbClr>
+            </a:outerShdw>
+          </a:effectLst>
+          <a:scene3d>
+            <a:camera prst="orthographicFront">
+              <a:rot lat="0" lon="0" rev="0"/>
+            </a:camera>
+            <a:lightRig rig="threePt" dir="t">
+              <a:rot lat="0" lon="0" rev="1200000"/>
+            </a:lightRig>
+          </a:scene3d>
+          <a:sp3d>
+            <a:bevelT w="63500" h="25400"/>
+          </a:sp3d>
         </a:effectStyle>
       </a:effectStyleLst>
       <a:bgFillStyleLst>
         <a:solidFill>
           <a:schemeClr val="phClr"/>
         </a:solidFill>
-        <a:solidFill>
-          <a:schemeClr val="phClr">
-            <a:tint val="95000"/>
-            <a:satMod val="170000"/>
-          </a:schemeClr>
-        </a:solidFill>
         <a:gradFill rotWithShape="1">
           <a:gsLst>
             <a:gs pos="0">
               <a:schemeClr val="phClr">
-                <a:tint val="93000"/>
-                <a:satMod val="150000"/>
-                <a:shade val="98000"/>
-                <a:lumMod val="102000"/>
+                <a:tint val="40000"/>
+                <a:satMod val="350000"/>
               </a:schemeClr>
             </a:gs>
-            <a:gs pos="50000">
+            <a:gs pos="40000">
               <a:schemeClr val="phClr">
-                <a:tint val="98000"/>
-                <a:satMod val="130000"/>
-                <a:shade val="90000"/>
-                <a:lumMod val="103000"/>
+                <a:tint val="45000"/>
+                <a:shade val="99000"/>
+                <a:satMod val="350000"/>
               </a:schemeClr>
             </a:gs>
             <a:gs pos="100000">
               <a:schemeClr val="phClr">
-                <a:shade val="63000"/>
-                <a:satMod val="120000"/>
+                <a:shade val="20000"/>
+                <a:satMod val="255000"/>
               </a:schemeClr>
             </a:gs>
           </a:gsLst>
-          <a:lin ang="5400000" scaled="0"/>
+          <a:path path="circle">
+            <a:fillToRect l="50000" t="-80000" r="50000" b="180000"/>
+          </a:path>
+        </a:gradFill>
+        <a:gradFill rotWithShape="1">
+          <a:gsLst>
+            <a:gs pos="0">
+              <a:schemeClr val="phClr">
+                <a:tint val="80000"/>
+                <a:satMod val="300000"/>
+              </a:schemeClr>
+            </a:gs>
+            <a:gs pos="100000">
+              <a:schemeClr val="phClr">
+                <a:shade val="30000"/>
+                <a:satMod val="200000"/>
+              </a:schemeClr>
+            </a:gs>
+          </a:gsLst>
+          <a:path path="circle">
+            <a:fillToRect l="50000" t="50000" r="50000" b="50000"/>
+          </a:path>
         </a:gradFill>
       </a:bgFillStyleLst>
     </a:fmtScheme>
   </a:themeElements>
   <a:objectDefaults>
+    <a:spDef>
+      <a:spPr/>
+      <a:bodyPr/>
+      <a:lstStyle/>
+      <a:style>
+        <a:lnRef idx="1">
+          <a:schemeClr val="accent1"/>
+        </a:lnRef>
+        <a:fillRef idx="3">
+          <a:schemeClr val="accent1"/>
+        </a:fillRef>
+        <a:effectRef idx="2">
+          <a:schemeClr val="accent1"/>
+        </a:effectRef>
+        <a:fontRef idx="minor">
+          <a:schemeClr val="lt1"/>
+        </a:fontRef>
+      </a:style>
+    </a:spDef>
     <a:lnDef>
       <a:spPr/>
       <a:bodyPr/>
@@ -20708,10 +20158,5 @@
     </a:lnDef>
   </a:objectDefaults>
   <a:extraClrSchemeLst/>
-  <a:extLst>
-    <a:ext uri="{05A4C25C-085E-4340-85A3-A5531E510DB2}">
-      <thm15:themeFamily xmlns:thm15="http://schemas.microsoft.com/office/thememl/2012/main" name="Office Theme" id="{2E142A2C-CD16-42D6-873A-C26D2A0506FA}" vid="{1BDDFF52-6CD6-40A5-AB3C-68EB2F1E4D0A}"/>
-    </a:ext>
-  </a:extLst>
 </a:theme>
 </file>